--- a/pptx canvas/Lecture8.pptx
+++ b/pptx canvas/Lecture8.pptx
@@ -5,44 +5,46 @@
     <p:sldMasterId id="2147483648" r:id="rId1"/>
   </p:sldMasterIdLst>
   <p:notesMasterIdLst>
-    <p:notesMasterId r:id="rId37"/>
+    <p:notesMasterId r:id="rId39"/>
   </p:notesMasterIdLst>
   <p:sldIdLst>
     <p:sldId id="256" r:id="rId2"/>
-    <p:sldId id="316" r:id="rId3"/>
-    <p:sldId id="295" r:id="rId4"/>
-    <p:sldId id="334" r:id="rId5"/>
-    <p:sldId id="358" r:id="rId6"/>
-    <p:sldId id="296" r:id="rId7"/>
-    <p:sldId id="317" r:id="rId8"/>
-    <p:sldId id="325" r:id="rId9"/>
-    <p:sldId id="335" r:id="rId10"/>
-    <p:sldId id="344" r:id="rId11"/>
-    <p:sldId id="359" r:id="rId12"/>
-    <p:sldId id="360" r:id="rId13"/>
-    <p:sldId id="361" r:id="rId14"/>
-    <p:sldId id="351" r:id="rId15"/>
-    <p:sldId id="362" r:id="rId16"/>
-    <p:sldId id="352" r:id="rId17"/>
-    <p:sldId id="354" r:id="rId18"/>
-    <p:sldId id="322" r:id="rId19"/>
-    <p:sldId id="338" r:id="rId20"/>
-    <p:sldId id="356" r:id="rId21"/>
-    <p:sldId id="357" r:id="rId22"/>
-    <p:sldId id="353" r:id="rId23"/>
-    <p:sldId id="327" r:id="rId24"/>
-    <p:sldId id="340" r:id="rId25"/>
-    <p:sldId id="341" r:id="rId26"/>
-    <p:sldId id="355" r:id="rId27"/>
-    <p:sldId id="342" r:id="rId28"/>
-    <p:sldId id="343" r:id="rId29"/>
-    <p:sldId id="329" r:id="rId30"/>
-    <p:sldId id="345" r:id="rId31"/>
-    <p:sldId id="326" r:id="rId32"/>
-    <p:sldId id="346" r:id="rId33"/>
-    <p:sldId id="347" r:id="rId34"/>
-    <p:sldId id="348" r:id="rId35"/>
-    <p:sldId id="349" r:id="rId36"/>
+    <p:sldId id="364" r:id="rId3"/>
+    <p:sldId id="365" r:id="rId4"/>
+    <p:sldId id="316" r:id="rId5"/>
+    <p:sldId id="295" r:id="rId6"/>
+    <p:sldId id="334" r:id="rId7"/>
+    <p:sldId id="358" r:id="rId8"/>
+    <p:sldId id="296" r:id="rId9"/>
+    <p:sldId id="317" r:id="rId10"/>
+    <p:sldId id="325" r:id="rId11"/>
+    <p:sldId id="335" r:id="rId12"/>
+    <p:sldId id="344" r:id="rId13"/>
+    <p:sldId id="359" r:id="rId14"/>
+    <p:sldId id="360" r:id="rId15"/>
+    <p:sldId id="361" r:id="rId16"/>
+    <p:sldId id="351" r:id="rId17"/>
+    <p:sldId id="362" r:id="rId18"/>
+    <p:sldId id="352" r:id="rId19"/>
+    <p:sldId id="354" r:id="rId20"/>
+    <p:sldId id="322" r:id="rId21"/>
+    <p:sldId id="338" r:id="rId22"/>
+    <p:sldId id="356" r:id="rId23"/>
+    <p:sldId id="357" r:id="rId24"/>
+    <p:sldId id="353" r:id="rId25"/>
+    <p:sldId id="327" r:id="rId26"/>
+    <p:sldId id="340" r:id="rId27"/>
+    <p:sldId id="341" r:id="rId28"/>
+    <p:sldId id="355" r:id="rId29"/>
+    <p:sldId id="342" r:id="rId30"/>
+    <p:sldId id="343" r:id="rId31"/>
+    <p:sldId id="329" r:id="rId32"/>
+    <p:sldId id="345" r:id="rId33"/>
+    <p:sldId id="326" r:id="rId34"/>
+    <p:sldId id="346" r:id="rId35"/>
+    <p:sldId id="347" r:id="rId36"/>
+    <p:sldId id="348" r:id="rId37"/>
+    <p:sldId id="349" r:id="rId38"/>
   </p:sldIdLst>
   <p:sldSz cx="12192000" cy="6858000"/>
   <p:notesSz cx="6858000" cy="9144000"/>
@@ -1010,7 +1012,7 @@
           <a:p>
             <a:fld id="{1560C251-82B7-4253-A774-38D73C276BCE}" type="slidenum">
               <a:rPr lang="en-US" smtClean="0"/>
-              <a:t>10</a:t>
+              <a:t>12</a:t>
             </a:fld>
             <a:endParaRPr lang="en-US"/>
           </a:p>
@@ -1181,7 +1183,7 @@
           <a:p>
             <a:fld id="{1560C251-82B7-4253-A774-38D73C276BCE}" type="slidenum">
               <a:rPr lang="en-US" smtClean="0"/>
-              <a:t>11</a:t>
+              <a:t>13</a:t>
             </a:fld>
             <a:endParaRPr lang="en-US"/>
           </a:p>
@@ -1295,7 +1297,7 @@
           <a:p>
             <a:fld id="{1560C251-82B7-4253-A774-38D73C276BCE}" type="slidenum">
               <a:rPr lang="en-US" smtClean="0"/>
-              <a:t>12</a:t>
+              <a:t>14</a:t>
             </a:fld>
             <a:endParaRPr lang="en-US"/>
           </a:p>
@@ -1358,6 +1360,114 @@
           <a:bodyPr/>
           <a:lstStyle/>
           <a:p>
+            <a:pPr marL="685800" marR="0" lvl="1" indent="-228600" algn="l" defTabSz="914400" rtl="0" eaLnBrk="1" fontAlgn="auto" latinLnBrk="0" hangingPunct="1">
+              <a:lnSpc>
+                <a:spcPct val="100000"/>
+              </a:lnSpc>
+              <a:spcBef>
+                <a:spcPts val="0"/>
+              </a:spcBef>
+              <a:spcAft>
+                <a:spcPts val="0"/>
+              </a:spcAft>
+              <a:buClrTx/>
+              <a:buSzTx/>
+              <a:buFont typeface="Arial" panose="020B0604020202020204" pitchFamily="34" charset="0"/>
+              <a:buChar char="•"/>
+              <a:tabLst/>
+              <a:defRPr/>
+            </a:pPr>
+            <a:r>
+              <a:rPr lang="en-GB" dirty="0"/>
+              <a:t>Measurements within one athlete may be more symmetric, especially under similar conditions, but we should check the plot rather than assume a normal distribution.</a:t>
+            </a:r>
+            <a:endParaRPr lang="en-US" dirty="0"/>
+          </a:p>
+          <a:p>
+            <a:endParaRPr lang="en-US" dirty="0"/>
+          </a:p>
+        </p:txBody>
+      </p:sp>
+      <p:sp>
+        <p:nvSpPr>
+          <p:cNvPr id="4" name="Slide Number Placeholder 3"/>
+          <p:cNvSpPr>
+            <a:spLocks noGrp="1"/>
+          </p:cNvSpPr>
+          <p:nvPr>
+            <p:ph type="sldNum" sz="quarter" idx="5"/>
+          </p:nvPr>
+        </p:nvSpPr>
+        <p:spPr/>
+        <p:txBody>
+          <a:bodyPr/>
+          <a:lstStyle/>
+          <a:p>
+            <a:fld id="{117D17FD-8842-8E4F-8C3E-EC8B634B2D5A}" type="slidenum">
+              <a:rPr lang="en-US" smtClean="0"/>
+              <a:t>17</a:t>
+            </a:fld>
+            <a:endParaRPr lang="en-US"/>
+          </a:p>
+        </p:txBody>
+      </p:sp>
+    </p:spTree>
+    <p:extLst>
+      <p:ext uri="{BB962C8B-B14F-4D97-AF65-F5344CB8AC3E}">
+        <p14:creationId xmlns:p14="http://schemas.microsoft.com/office/powerpoint/2010/main" val="4014037205"/>
+      </p:ext>
+    </p:extLst>
+  </p:cSld>
+  <p:clrMapOvr>
+    <a:masterClrMapping/>
+  </p:clrMapOvr>
+</p:notes>
+</file>
+
+<file path=ppt/notesSlides/notesSlide14.xml><?xml version="1.0" encoding="utf-8"?>
+<p:notes xmlns:a="http://schemas.openxmlformats.org/drawingml/2006/main" xmlns:r="http://schemas.openxmlformats.org/officeDocument/2006/relationships" xmlns:p="http://schemas.openxmlformats.org/presentationml/2006/main">
+  <p:cSld>
+    <p:spTree>
+      <p:nvGrpSpPr>
+        <p:cNvPr id="1" name=""/>
+        <p:cNvGrpSpPr/>
+        <p:nvPr/>
+      </p:nvGrpSpPr>
+      <p:grpSpPr>
+        <a:xfrm>
+          <a:off x="0" y="0"/>
+          <a:ext cx="0" cy="0"/>
+          <a:chOff x="0" y="0"/>
+          <a:chExt cx="0" cy="0"/>
+        </a:xfrm>
+      </p:grpSpPr>
+      <p:sp>
+        <p:nvSpPr>
+          <p:cNvPr id="2" name="Slide Image Placeholder 1"/>
+          <p:cNvSpPr>
+            <a:spLocks noGrp="1" noRot="1" noChangeAspect="1"/>
+          </p:cNvSpPr>
+          <p:nvPr>
+            <p:ph type="sldImg"/>
+          </p:nvPr>
+        </p:nvSpPr>
+        <p:spPr/>
+      </p:sp>
+      <p:sp>
+        <p:nvSpPr>
+          <p:cNvPr id="3" name="Notes Placeholder 2"/>
+          <p:cNvSpPr>
+            <a:spLocks noGrp="1"/>
+          </p:cNvSpPr>
+          <p:nvPr>
+            <p:ph type="body" idx="1"/>
+          </p:nvPr>
+        </p:nvSpPr>
+        <p:spPr/>
+        <p:txBody>
+          <a:bodyPr/>
+          <a:lstStyle/>
+          <a:p>
             <a:pPr marL="228600" lvl="0" indent="-228600">
               <a:buFont typeface="Arial" panose="020B0604020202020204" pitchFamily="34" charset="0"/>
               <a:buChar char="•"/>
@@ -1454,7 +1564,7 @@
           <a:p>
             <a:fld id="{117D17FD-8842-8E4F-8C3E-EC8B634B2D5A}" type="slidenum">
               <a:rPr lang="en-US" smtClean="0"/>
-              <a:t>16</a:t>
+              <a:t>18</a:t>
             </a:fld>
             <a:endParaRPr lang="en-US"/>
           </a:p>
@@ -1473,7 +1583,7 @@
 </p:notes>
 </file>
 
-<file path=ppt/notesSlides/notesSlide14.xml><?xml version="1.0" encoding="utf-8"?>
+<file path=ppt/notesSlides/notesSlide15.xml><?xml version="1.0" encoding="utf-8"?>
 <p:notes xmlns:a="http://schemas.openxmlformats.org/drawingml/2006/main" xmlns:r="http://schemas.openxmlformats.org/officeDocument/2006/relationships" xmlns:p="http://schemas.openxmlformats.org/presentationml/2006/main">
   <p:cSld>
     <p:spTree>
@@ -1568,7 +1678,7 @@
           <a:p>
             <a:fld id="{1560C251-82B7-4253-A774-38D73C276BCE}" type="slidenum">
               <a:rPr lang="en-US" smtClean="0"/>
-              <a:t>17</a:t>
+              <a:t>19</a:t>
             </a:fld>
             <a:endParaRPr lang="en-US"/>
           </a:p>
@@ -1587,7 +1697,7 @@
 </p:notes>
 </file>
 
-<file path=ppt/notesSlides/notesSlide15.xml><?xml version="1.0" encoding="utf-8"?>
+<file path=ppt/notesSlides/notesSlide16.xml><?xml version="1.0" encoding="utf-8"?>
 <p:notes xmlns:a="http://schemas.openxmlformats.org/drawingml/2006/main" xmlns:r="http://schemas.openxmlformats.org/officeDocument/2006/relationships" xmlns:p="http://schemas.openxmlformats.org/presentationml/2006/main">
   <p:cSld>
     <p:spTree>
@@ -1702,7 +1812,7 @@
           <a:p>
             <a:fld id="{1560C251-82B7-4253-A774-38D73C276BCE}" type="slidenum">
               <a:rPr lang="en-US" smtClean="0"/>
-              <a:t>18</a:t>
+              <a:t>20</a:t>
             </a:fld>
             <a:endParaRPr lang="en-US"/>
           </a:p>
@@ -1721,7 +1831,7 @@
 </p:notes>
 </file>
 
-<file path=ppt/notesSlides/notesSlide16.xml><?xml version="1.0" encoding="utf-8"?>
+<file path=ppt/notesSlides/notesSlide17.xml><?xml version="1.0" encoding="utf-8"?>
 <p:notes xmlns:a="http://schemas.openxmlformats.org/drawingml/2006/main" xmlns:r="http://schemas.openxmlformats.org/officeDocument/2006/relationships" xmlns:p="http://schemas.openxmlformats.org/presentationml/2006/main">
   <p:cSld>
     <p:spTree>
@@ -1860,7 +1970,7 @@
           <a:p>
             <a:fld id="{1560C251-82B7-4253-A774-38D73C276BCE}" type="slidenum">
               <a:rPr lang="en-US" smtClean="0"/>
-              <a:t>19</a:t>
+              <a:t>21</a:t>
             </a:fld>
             <a:endParaRPr lang="en-US"/>
           </a:p>
@@ -1879,7 +1989,7 @@
 </p:notes>
 </file>
 
-<file path=ppt/notesSlides/notesSlide17.xml><?xml version="1.0" encoding="utf-8"?>
+<file path=ppt/notesSlides/notesSlide18.xml><?xml version="1.0" encoding="utf-8"?>
 <p:notes xmlns:a="http://schemas.openxmlformats.org/drawingml/2006/main" xmlns:r="http://schemas.openxmlformats.org/officeDocument/2006/relationships" xmlns:p="http://schemas.openxmlformats.org/presentationml/2006/main">
   <p:cSld>
     <p:spTree>
@@ -2018,7 +2128,7 @@
           <a:p>
             <a:fld id="{1560C251-82B7-4253-A774-38D73C276BCE}" type="slidenum">
               <a:rPr lang="en-US" smtClean="0"/>
-              <a:t>20</a:t>
+              <a:t>22</a:t>
             </a:fld>
             <a:endParaRPr lang="en-US"/>
           </a:p>
@@ -2037,7 +2147,7 @@
 </p:notes>
 </file>
 
-<file path=ppt/notesSlides/notesSlide18.xml><?xml version="1.0" encoding="utf-8"?>
+<file path=ppt/notesSlides/notesSlide19.xml><?xml version="1.0" encoding="utf-8"?>
 <p:notes xmlns:a="http://schemas.openxmlformats.org/drawingml/2006/main" xmlns:r="http://schemas.openxmlformats.org/officeDocument/2006/relationships" xmlns:p="http://schemas.openxmlformats.org/presentationml/2006/main">
   <p:cSld>
     <p:spTree>
@@ -2132,7 +2242,7 @@
           <a:p>
             <a:fld id="{1560C251-82B7-4253-A774-38D73C276BCE}" type="slidenum">
               <a:rPr lang="en-US" smtClean="0"/>
-              <a:t>21</a:t>
+              <a:t>23</a:t>
             </a:fld>
             <a:endParaRPr lang="en-US"/>
           </a:p>
@@ -2142,140 +2252,6 @@
     <p:extLst>
       <p:ext uri="{BB962C8B-B14F-4D97-AF65-F5344CB8AC3E}">
         <p14:creationId xmlns:p14="http://schemas.microsoft.com/office/powerpoint/2010/main" val="3639405884"/>
-      </p:ext>
-    </p:extLst>
-  </p:cSld>
-  <p:clrMapOvr>
-    <a:masterClrMapping/>
-  </p:clrMapOvr>
-</p:notes>
-</file>
-
-<file path=ppt/notesSlides/notesSlide19.xml><?xml version="1.0" encoding="utf-8"?>
-<p:notes xmlns:a="http://schemas.openxmlformats.org/drawingml/2006/main" xmlns:r="http://schemas.openxmlformats.org/officeDocument/2006/relationships" xmlns:p="http://schemas.openxmlformats.org/presentationml/2006/main">
-  <p:cSld>
-    <p:spTree>
-      <p:nvGrpSpPr>
-        <p:cNvPr id="1" name=""/>
-        <p:cNvGrpSpPr/>
-        <p:nvPr/>
-      </p:nvGrpSpPr>
-      <p:grpSpPr>
-        <a:xfrm>
-          <a:off x="0" y="0"/>
-          <a:ext cx="0" cy="0"/>
-          <a:chOff x="0" y="0"/>
-          <a:chExt cx="0" cy="0"/>
-        </a:xfrm>
-      </p:grpSpPr>
-      <p:sp>
-        <p:nvSpPr>
-          <p:cNvPr id="2" name="Slide Image Placeholder 1"/>
-          <p:cNvSpPr>
-            <a:spLocks noGrp="1" noRot="1" noChangeAspect="1"/>
-          </p:cNvSpPr>
-          <p:nvPr>
-            <p:ph type="sldImg"/>
-          </p:nvPr>
-        </p:nvSpPr>
-        <p:spPr/>
-      </p:sp>
-      <p:sp>
-        <p:nvSpPr>
-          <p:cNvPr id="3" name="Notes Placeholder 2"/>
-          <p:cNvSpPr>
-            <a:spLocks noGrp="1"/>
-          </p:cNvSpPr>
-          <p:nvPr>
-            <p:ph type="body" idx="1"/>
-          </p:nvPr>
-        </p:nvSpPr>
-        <p:spPr/>
-        <p:txBody>
-          <a:bodyPr/>
-          <a:lstStyle/>
-          <a:p>
-            <a:r>
-              <a:rPr lang="en-US" sz="1200" b="0" i="0" u="none" strike="noStrike" kern="1200" baseline="0" dirty="0">
-                <a:solidFill>
-                  <a:schemeClr val="tx1"/>
-                </a:solidFill>
-                <a:latin typeface="+mn-lt"/>
-                <a:ea typeface="+mn-ea"/>
-                <a:cs typeface="+mn-cs"/>
-              </a:rPr>
-              <a:t>mistaken expectation that aggregate data will reflect the same relationships found within subgroups such as categories, classes, or individuals that comprise the aggregate.</a:t>
-            </a:r>
-          </a:p>
-          <a:p>
-            <a:endParaRPr lang="en-US" sz="1200" b="0" i="0" u="none" strike="noStrike" kern="1200" baseline="0" dirty="0">
-              <a:solidFill>
-                <a:schemeClr val="tx1"/>
-              </a:solidFill>
-              <a:latin typeface="+mn-lt"/>
-              <a:ea typeface="+mn-ea"/>
-              <a:cs typeface="+mn-cs"/>
-            </a:endParaRPr>
-          </a:p>
-          <a:p>
-            <a:r>
-              <a:rPr lang="en-US" sz="1200" b="0" i="0" u="none" strike="noStrike" kern="1200" baseline="0" dirty="0">
-                <a:solidFill>
-                  <a:schemeClr val="tx1"/>
-                </a:solidFill>
-                <a:latin typeface="+mn-lt"/>
-                <a:ea typeface="+mn-ea"/>
-                <a:cs typeface="+mn-cs"/>
-              </a:rPr>
-              <a:t>In this example, summarizing (aggregating) the two types of shots leading to the devaluing of the 3 point shot</a:t>
-            </a:r>
-          </a:p>
-          <a:p>
-            <a:r>
-              <a:rPr lang="en-US" sz="1200" b="0" i="0" u="none" strike="noStrike" kern="1200" baseline="0" dirty="0">
-                <a:solidFill>
-                  <a:schemeClr val="tx1"/>
-                </a:solidFill>
-                <a:latin typeface="+mn-lt"/>
-                <a:ea typeface="+mn-ea"/>
-                <a:cs typeface="+mn-cs"/>
-              </a:rPr>
-              <a:t>- </a:t>
-            </a:r>
-            <a:r>
-              <a:rPr lang="en-US" dirty="0"/>
-              <a:t>Since Larry Bird took far more two-point shots, his overall percentage is dominated by two-point efficiency. Reggie Miller took many more three-point shots, so his overall percentage is more influenced by three-point efficiency. Because three-pointers are harder shots, that weighting pulls Miller’s overall percentage down</a:t>
-            </a:r>
-          </a:p>
-        </p:txBody>
-      </p:sp>
-      <p:sp>
-        <p:nvSpPr>
-          <p:cNvPr id="4" name="Slide Number Placeholder 3"/>
-          <p:cNvSpPr>
-            <a:spLocks noGrp="1"/>
-          </p:cNvSpPr>
-          <p:nvPr>
-            <p:ph type="sldNum" sz="quarter" idx="5"/>
-          </p:nvPr>
-        </p:nvSpPr>
-        <p:spPr/>
-        <p:txBody>
-          <a:bodyPr/>
-          <a:lstStyle/>
-          <a:p>
-            <a:fld id="{1560C251-82B7-4253-A774-38D73C276BCE}" type="slidenum">
-              <a:rPr lang="en-US" smtClean="0"/>
-              <a:t>23</a:t>
-            </a:fld>
-            <a:endParaRPr lang="en-US"/>
-          </a:p>
-        </p:txBody>
-      </p:sp>
-    </p:spTree>
-    <p:extLst>
-      <p:ext uri="{BB962C8B-B14F-4D97-AF65-F5344CB8AC3E}">
-        <p14:creationId xmlns:p14="http://schemas.microsoft.com/office/powerpoint/2010/main" val="3448769395"/>
       </p:ext>
     </p:extLst>
   </p:cSld>
@@ -2359,7 +2335,7 @@
           <a:p>
             <a:fld id="{1560C251-82B7-4253-A774-38D73C276BCE}" type="slidenum">
               <a:rPr lang="en-US" smtClean="0"/>
-              <a:t>2</a:t>
+              <a:t>4</a:t>
             </a:fld>
             <a:endParaRPr lang="en-US"/>
           </a:p>
@@ -2379,6 +2355,228 @@
 </file>
 
 <file path=ppt/notesSlides/notesSlide20.xml><?xml version="1.0" encoding="utf-8"?>
+<p:notes xmlns:a="http://schemas.openxmlformats.org/drawingml/2006/main" xmlns:r="http://schemas.openxmlformats.org/officeDocument/2006/relationships" xmlns:p="http://schemas.openxmlformats.org/presentationml/2006/main">
+  <p:cSld>
+    <p:spTree>
+      <p:nvGrpSpPr>
+        <p:cNvPr id="1" name=""/>
+        <p:cNvGrpSpPr/>
+        <p:nvPr/>
+      </p:nvGrpSpPr>
+      <p:grpSpPr>
+        <a:xfrm>
+          <a:off x="0" y="0"/>
+          <a:ext cx="0" cy="0"/>
+          <a:chOff x="0" y="0"/>
+          <a:chExt cx="0" cy="0"/>
+        </a:xfrm>
+      </p:grpSpPr>
+      <p:sp>
+        <p:nvSpPr>
+          <p:cNvPr id="2" name="Slide Image Placeholder 1"/>
+          <p:cNvSpPr>
+            <a:spLocks noGrp="1" noRot="1" noChangeAspect="1"/>
+          </p:cNvSpPr>
+          <p:nvPr>
+            <p:ph type="sldImg"/>
+          </p:nvPr>
+        </p:nvSpPr>
+        <p:spPr/>
+      </p:sp>
+      <p:sp>
+        <p:nvSpPr>
+          <p:cNvPr id="3" name="Notes Placeholder 2"/>
+          <p:cNvSpPr>
+            <a:spLocks noGrp="1"/>
+          </p:cNvSpPr>
+          <p:nvPr>
+            <p:ph type="body" idx="1"/>
+          </p:nvPr>
+        </p:nvSpPr>
+        <p:spPr/>
+        <p:txBody>
+          <a:bodyPr/>
+          <a:lstStyle/>
+          <a:p>
+            <a:r>
+              <a:rPr lang="en-GB" dirty="0"/>
+              <a:t>We’ve talked about comparing players by position. Here’s a case where grouping changes the conclusion entirely.</a:t>
+            </a:r>
+            <a:endParaRPr lang="en-US" dirty="0"/>
+          </a:p>
+        </p:txBody>
+      </p:sp>
+      <p:sp>
+        <p:nvSpPr>
+          <p:cNvPr id="4" name="Slide Number Placeholder 3"/>
+          <p:cNvSpPr>
+            <a:spLocks noGrp="1"/>
+          </p:cNvSpPr>
+          <p:nvPr>
+            <p:ph type="sldNum" sz="quarter" idx="5"/>
+          </p:nvPr>
+        </p:nvSpPr>
+        <p:spPr/>
+        <p:txBody>
+          <a:bodyPr/>
+          <a:lstStyle/>
+          <a:p>
+            <a:fld id="{117D17FD-8842-8E4F-8C3E-EC8B634B2D5A}" type="slidenum">
+              <a:rPr lang="en-US" smtClean="0"/>
+              <a:t>24</a:t>
+            </a:fld>
+            <a:endParaRPr lang="en-US"/>
+          </a:p>
+        </p:txBody>
+      </p:sp>
+    </p:spTree>
+    <p:extLst>
+      <p:ext uri="{BB962C8B-B14F-4D97-AF65-F5344CB8AC3E}">
+        <p14:creationId xmlns:p14="http://schemas.microsoft.com/office/powerpoint/2010/main" val="2733012499"/>
+      </p:ext>
+    </p:extLst>
+  </p:cSld>
+  <p:clrMapOvr>
+    <a:masterClrMapping/>
+  </p:clrMapOvr>
+</p:notes>
+</file>
+
+<file path=ppt/notesSlides/notesSlide21.xml><?xml version="1.0" encoding="utf-8"?>
+<p:notes xmlns:a="http://schemas.openxmlformats.org/drawingml/2006/main" xmlns:r="http://schemas.openxmlformats.org/officeDocument/2006/relationships" xmlns:p="http://schemas.openxmlformats.org/presentationml/2006/main">
+  <p:cSld>
+    <p:spTree>
+      <p:nvGrpSpPr>
+        <p:cNvPr id="1" name=""/>
+        <p:cNvGrpSpPr/>
+        <p:nvPr/>
+      </p:nvGrpSpPr>
+      <p:grpSpPr>
+        <a:xfrm>
+          <a:off x="0" y="0"/>
+          <a:ext cx="0" cy="0"/>
+          <a:chOff x="0" y="0"/>
+          <a:chExt cx="0" cy="0"/>
+        </a:xfrm>
+      </p:grpSpPr>
+      <p:sp>
+        <p:nvSpPr>
+          <p:cNvPr id="2" name="Slide Image Placeholder 1"/>
+          <p:cNvSpPr>
+            <a:spLocks noGrp="1" noRot="1" noChangeAspect="1"/>
+          </p:cNvSpPr>
+          <p:nvPr>
+            <p:ph type="sldImg"/>
+          </p:nvPr>
+        </p:nvSpPr>
+        <p:spPr/>
+      </p:sp>
+      <p:sp>
+        <p:nvSpPr>
+          <p:cNvPr id="3" name="Notes Placeholder 2"/>
+          <p:cNvSpPr>
+            <a:spLocks noGrp="1"/>
+          </p:cNvSpPr>
+          <p:nvPr>
+            <p:ph type="body" idx="1"/>
+          </p:nvPr>
+        </p:nvSpPr>
+        <p:spPr/>
+        <p:txBody>
+          <a:bodyPr/>
+          <a:lstStyle/>
+          <a:p>
+            <a:r>
+              <a:rPr lang="en-US" sz="1200" b="0" i="0" u="none" strike="noStrike" kern="1200" baseline="0" dirty="0">
+                <a:solidFill>
+                  <a:schemeClr val="tx1"/>
+                </a:solidFill>
+                <a:latin typeface="+mn-lt"/>
+                <a:ea typeface="+mn-ea"/>
+                <a:cs typeface="+mn-cs"/>
+              </a:rPr>
+              <a:t>mistaken expectation that aggregate data will reflect the same relationships found within subgroups such as categories, classes, or individuals that comprise the aggregate.</a:t>
+            </a:r>
+          </a:p>
+          <a:p>
+            <a:endParaRPr lang="en-US" sz="1200" b="0" i="0" u="none" strike="noStrike" kern="1200" baseline="0" dirty="0">
+              <a:solidFill>
+                <a:schemeClr val="tx1"/>
+              </a:solidFill>
+              <a:latin typeface="+mn-lt"/>
+              <a:ea typeface="+mn-ea"/>
+              <a:cs typeface="+mn-cs"/>
+            </a:endParaRPr>
+          </a:p>
+          <a:p>
+            <a:r>
+              <a:rPr lang="en-US" sz="1200" b="0" i="0" u="none" strike="noStrike" kern="1200" baseline="0" dirty="0">
+                <a:solidFill>
+                  <a:schemeClr val="tx1"/>
+                </a:solidFill>
+                <a:latin typeface="+mn-lt"/>
+                <a:ea typeface="+mn-ea"/>
+                <a:cs typeface="+mn-cs"/>
+              </a:rPr>
+              <a:t>In this example, summarizing (aggregating) the two types of shots leading to the devaluing of the 3 point shot</a:t>
+            </a:r>
+          </a:p>
+          <a:p>
+            <a:r>
+              <a:rPr lang="en-US" sz="1200" b="0" i="0" u="none" strike="noStrike" kern="1200" baseline="0" dirty="0">
+                <a:solidFill>
+                  <a:schemeClr val="tx1"/>
+                </a:solidFill>
+                <a:latin typeface="+mn-lt"/>
+                <a:ea typeface="+mn-ea"/>
+                <a:cs typeface="+mn-cs"/>
+              </a:rPr>
+              <a:t>- </a:t>
+            </a:r>
+            <a:r>
+              <a:rPr lang="en-US" dirty="0"/>
+              <a:t>Since Larry Bird took far more two-point shots, his overall percentage is dominated by two-point efficiency. Reggie Miller took many more three-point shots, so his overall percentage is more influenced by three-point efficiency. Because three-pointers are harder shots, that weighting pulls Miller’s overall percentage down</a:t>
+            </a:r>
+          </a:p>
+        </p:txBody>
+      </p:sp>
+      <p:sp>
+        <p:nvSpPr>
+          <p:cNvPr id="4" name="Slide Number Placeholder 3"/>
+          <p:cNvSpPr>
+            <a:spLocks noGrp="1"/>
+          </p:cNvSpPr>
+          <p:nvPr>
+            <p:ph type="sldNum" sz="quarter" idx="5"/>
+          </p:nvPr>
+        </p:nvSpPr>
+        <p:spPr/>
+        <p:txBody>
+          <a:bodyPr/>
+          <a:lstStyle/>
+          <a:p>
+            <a:fld id="{1560C251-82B7-4253-A774-38D73C276BCE}" type="slidenum">
+              <a:rPr lang="en-US" smtClean="0"/>
+              <a:t>25</a:t>
+            </a:fld>
+            <a:endParaRPr lang="en-US"/>
+          </a:p>
+        </p:txBody>
+      </p:sp>
+    </p:spTree>
+    <p:extLst>
+      <p:ext uri="{BB962C8B-B14F-4D97-AF65-F5344CB8AC3E}">
+        <p14:creationId xmlns:p14="http://schemas.microsoft.com/office/powerpoint/2010/main" val="3448769395"/>
+      </p:ext>
+    </p:extLst>
+  </p:cSld>
+  <p:clrMapOvr>
+    <a:masterClrMapping/>
+  </p:clrMapOvr>
+</p:notes>
+</file>
+
+<file path=ppt/notesSlides/notesSlide22.xml><?xml version="1.0" encoding="utf-8"?>
 <p:notes xmlns:a="http://schemas.openxmlformats.org/drawingml/2006/main" xmlns:r="http://schemas.openxmlformats.org/officeDocument/2006/relationships" xmlns:p="http://schemas.openxmlformats.org/presentationml/2006/main">
   <p:cSld>
     <p:spTree>
@@ -2517,7 +2715,7 @@
           <a:p>
             <a:fld id="{1560C251-82B7-4253-A774-38D73C276BCE}" type="slidenum">
               <a:rPr lang="en-US" smtClean="0"/>
-              <a:t>24</a:t>
+              <a:t>26</a:t>
             </a:fld>
             <a:endParaRPr lang="en-US"/>
           </a:p>
@@ -2536,7 +2734,7 @@
 </p:notes>
 </file>
 
-<file path=ppt/notesSlides/notesSlide21.xml><?xml version="1.0" encoding="utf-8"?>
+<file path=ppt/notesSlides/notesSlide23.xml><?xml version="1.0" encoding="utf-8"?>
 <p:notes xmlns:a="http://schemas.openxmlformats.org/drawingml/2006/main" xmlns:r="http://schemas.openxmlformats.org/officeDocument/2006/relationships" xmlns:p="http://schemas.openxmlformats.org/presentationml/2006/main">
   <p:cSld>
     <p:spTree>
@@ -2675,7 +2873,7 @@
           <a:p>
             <a:fld id="{1560C251-82B7-4253-A774-38D73C276BCE}" type="slidenum">
               <a:rPr lang="en-US" smtClean="0"/>
-              <a:t>25</a:t>
+              <a:t>27</a:t>
             </a:fld>
             <a:endParaRPr lang="en-US"/>
           </a:p>
@@ -2685,204 +2883,6 @@
     <p:extLst>
       <p:ext uri="{BB962C8B-B14F-4D97-AF65-F5344CB8AC3E}">
         <p14:creationId xmlns:p14="http://schemas.microsoft.com/office/powerpoint/2010/main" val="4010814745"/>
-      </p:ext>
-    </p:extLst>
-  </p:cSld>
-  <p:clrMapOvr>
-    <a:masterClrMapping/>
-  </p:clrMapOvr>
-</p:notes>
-</file>
-
-<file path=ppt/notesSlides/notesSlide22.xml><?xml version="1.0" encoding="utf-8"?>
-<p:notes xmlns:a="http://schemas.openxmlformats.org/drawingml/2006/main" xmlns:r="http://schemas.openxmlformats.org/officeDocument/2006/relationships" xmlns:p="http://schemas.openxmlformats.org/presentationml/2006/main">
-  <p:cSld>
-    <p:spTree>
-      <p:nvGrpSpPr>
-        <p:cNvPr id="1" name=""/>
-        <p:cNvGrpSpPr/>
-        <p:nvPr/>
-      </p:nvGrpSpPr>
-      <p:grpSpPr>
-        <a:xfrm>
-          <a:off x="0" y="0"/>
-          <a:ext cx="0" cy="0"/>
-          <a:chOff x="0" y="0"/>
-          <a:chExt cx="0" cy="0"/>
-        </a:xfrm>
-      </p:grpSpPr>
-      <p:sp>
-        <p:nvSpPr>
-          <p:cNvPr id="2" name="Slide Image Placeholder 1"/>
-          <p:cNvSpPr>
-            <a:spLocks noGrp="1" noRot="1" noChangeAspect="1"/>
-          </p:cNvSpPr>
-          <p:nvPr>
-            <p:ph type="sldImg"/>
-          </p:nvPr>
-        </p:nvSpPr>
-        <p:spPr/>
-      </p:sp>
-      <p:sp>
-        <p:nvSpPr>
-          <p:cNvPr id="3" name="Notes Placeholder 2"/>
-          <p:cNvSpPr>
-            <a:spLocks noGrp="1"/>
-          </p:cNvSpPr>
-          <p:nvPr>
-            <p:ph type="body" idx="1"/>
-          </p:nvPr>
-        </p:nvSpPr>
-        <p:spPr/>
-        <p:txBody>
-          <a:bodyPr/>
-          <a:lstStyle/>
-          <a:p>
-            <a:r>
-              <a:rPr lang="en-US" dirty="0"/>
-              <a:t>This is the real Anscombe’s quartet, in case you ever come across it outside of this class</a:t>
-            </a:r>
-          </a:p>
-        </p:txBody>
-      </p:sp>
-      <p:sp>
-        <p:nvSpPr>
-          <p:cNvPr id="4" name="Slide Number Placeholder 3"/>
-          <p:cNvSpPr>
-            <a:spLocks noGrp="1"/>
-          </p:cNvSpPr>
-          <p:nvPr>
-            <p:ph type="sldNum" sz="quarter" idx="5"/>
-          </p:nvPr>
-        </p:nvSpPr>
-        <p:spPr/>
-        <p:txBody>
-          <a:bodyPr/>
-          <a:lstStyle/>
-          <a:p>
-            <a:fld id="{1560C251-82B7-4253-A774-38D73C276BCE}" type="slidenum">
-              <a:rPr lang="en-US" smtClean="0"/>
-              <a:t>29</a:t>
-            </a:fld>
-            <a:endParaRPr lang="en-US"/>
-          </a:p>
-        </p:txBody>
-      </p:sp>
-    </p:spTree>
-    <p:extLst>
-      <p:ext uri="{BB962C8B-B14F-4D97-AF65-F5344CB8AC3E}">
-        <p14:creationId xmlns:p14="http://schemas.microsoft.com/office/powerpoint/2010/main" val="450748608"/>
-      </p:ext>
-    </p:extLst>
-  </p:cSld>
-  <p:clrMapOvr>
-    <a:masterClrMapping/>
-  </p:clrMapOvr>
-</p:notes>
-</file>
-
-<file path=ppt/notesSlides/notesSlide23.xml><?xml version="1.0" encoding="utf-8"?>
-<p:notes xmlns:a="http://schemas.openxmlformats.org/drawingml/2006/main" xmlns:r="http://schemas.openxmlformats.org/officeDocument/2006/relationships" xmlns:p="http://schemas.openxmlformats.org/presentationml/2006/main">
-  <p:cSld>
-    <p:spTree>
-      <p:nvGrpSpPr>
-        <p:cNvPr id="1" name="">
-          <a:extLst>
-            <a:ext uri="{FF2B5EF4-FFF2-40B4-BE49-F238E27FC236}">
-              <a16:creationId xmlns:a16="http://schemas.microsoft.com/office/drawing/2014/main" id="{17D6C3BF-1410-282C-E358-4DAEDAD30E2D}"/>
-            </a:ext>
-          </a:extLst>
-        </p:cNvPr>
-        <p:cNvGrpSpPr/>
-        <p:nvPr/>
-      </p:nvGrpSpPr>
-      <p:grpSpPr>
-        <a:xfrm>
-          <a:off x="0" y="0"/>
-          <a:ext cx="0" cy="0"/>
-          <a:chOff x="0" y="0"/>
-          <a:chExt cx="0" cy="0"/>
-        </a:xfrm>
-      </p:grpSpPr>
-      <p:sp>
-        <p:nvSpPr>
-          <p:cNvPr id="2" name="Slide Image Placeholder 1">
-            <a:extLst>
-              <a:ext uri="{FF2B5EF4-FFF2-40B4-BE49-F238E27FC236}">
-                <a16:creationId xmlns:a16="http://schemas.microsoft.com/office/drawing/2014/main" id="{BAF13BA8-57D9-8395-C333-5A57AD9C0DF5}"/>
-              </a:ext>
-            </a:extLst>
-          </p:cNvPr>
-          <p:cNvSpPr>
-            <a:spLocks noGrp="1" noRot="1" noChangeAspect="1"/>
-          </p:cNvSpPr>
-          <p:nvPr>
-            <p:ph type="sldImg"/>
-          </p:nvPr>
-        </p:nvSpPr>
-        <p:spPr/>
-      </p:sp>
-      <p:sp>
-        <p:nvSpPr>
-          <p:cNvPr id="3" name="Notes Placeholder 2">
-            <a:extLst>
-              <a:ext uri="{FF2B5EF4-FFF2-40B4-BE49-F238E27FC236}">
-                <a16:creationId xmlns:a16="http://schemas.microsoft.com/office/drawing/2014/main" id="{807B752B-7357-A385-8B29-763FD6749BDC}"/>
-              </a:ext>
-            </a:extLst>
-          </p:cNvPr>
-          <p:cNvSpPr>
-            <a:spLocks noGrp="1"/>
-          </p:cNvSpPr>
-          <p:nvPr>
-            <p:ph type="body" idx="1"/>
-          </p:nvPr>
-        </p:nvSpPr>
-        <p:spPr/>
-        <p:txBody>
-          <a:bodyPr/>
-          <a:lstStyle/>
-          <a:p>
-            <a:r>
-              <a:rPr lang="en-US" b="1" dirty="0"/>
-              <a:t>Section 3: What summaries reveal vs. what they hide</a:t>
-            </a:r>
-          </a:p>
-        </p:txBody>
-      </p:sp>
-      <p:sp>
-        <p:nvSpPr>
-          <p:cNvPr id="4" name="Slide Number Placeholder 3">
-            <a:extLst>
-              <a:ext uri="{FF2B5EF4-FFF2-40B4-BE49-F238E27FC236}">
-                <a16:creationId xmlns:a16="http://schemas.microsoft.com/office/drawing/2014/main" id="{644BD303-86C6-3EB0-E571-19959F856032}"/>
-              </a:ext>
-            </a:extLst>
-          </p:cNvPr>
-          <p:cNvSpPr>
-            <a:spLocks noGrp="1"/>
-          </p:cNvSpPr>
-          <p:nvPr>
-            <p:ph type="sldNum" sz="quarter" idx="5"/>
-          </p:nvPr>
-        </p:nvSpPr>
-        <p:spPr/>
-        <p:txBody>
-          <a:bodyPr/>
-          <a:lstStyle/>
-          <a:p>
-            <a:fld id="{1560C251-82B7-4253-A774-38D73C276BCE}" type="slidenum">
-              <a:rPr lang="en-US" smtClean="0"/>
-              <a:t>30</a:t>
-            </a:fld>
-            <a:endParaRPr lang="en-US"/>
-          </a:p>
-        </p:txBody>
-      </p:sp>
-    </p:spTree>
-    <p:extLst>
-      <p:ext uri="{BB962C8B-B14F-4D97-AF65-F5344CB8AC3E}">
-        <p14:creationId xmlns:p14="http://schemas.microsoft.com/office/powerpoint/2010/main" val="414880112"/>
       </p:ext>
     </p:extLst>
   </p:cSld>
@@ -2938,144 +2938,7 @@
           <a:p>
             <a:r>
               <a:rPr lang="en-US" dirty="0"/>
-              <a:t>– Which summary statistics are </a:t>
-            </a:r>
-            <a:r>
-              <a:rPr lang="en-US" b="1" dirty="0"/>
-              <a:t>invalid</a:t>
-            </a:r>
-            <a:r>
-              <a:rPr lang="en-US" dirty="0"/>
-              <a:t> for Position, and why?</a:t>
-            </a:r>
-          </a:p>
-          <a:p>
-            <a:r>
-              <a:rPr lang="en-US" dirty="0"/>
-              <a:t>– What is the </a:t>
-            </a:r>
-            <a:r>
-              <a:rPr lang="en-US" b="1" dirty="0"/>
-              <a:t>mode</a:t>
-            </a:r>
-            <a:r>
-              <a:rPr lang="en-US" dirty="0"/>
-              <a:t> of Position?</a:t>
-            </a:r>
-            <a:br>
-              <a:rPr lang="en-US" dirty="0"/>
-            </a:br>
-            <a:endParaRPr lang="en-US" dirty="0"/>
-          </a:p>
-          <a:p>
-            <a:r>
-              <a:rPr lang="en-US" dirty="0"/>
-              <a:t>– For </a:t>
-            </a:r>
-            <a:r>
-              <a:rPr lang="en-US" dirty="0" err="1"/>
-              <a:t>JumpHeight_cm</a:t>
-            </a:r>
-            <a:r>
-              <a:rPr lang="en-US" dirty="0"/>
-              <a:t>, which is more representative of a “typical” athlete: </a:t>
-            </a:r>
-            <a:r>
-              <a:rPr lang="en-US" b="1" dirty="0"/>
-              <a:t>mean or median</a:t>
-            </a:r>
-            <a:r>
-              <a:rPr lang="en-US" dirty="0"/>
-              <a:t>?</a:t>
-            </a:r>
-          </a:p>
-          <a:p>
-            <a:endParaRPr lang="en-US" dirty="0"/>
-          </a:p>
-          <a:p>
-            <a:r>
-              <a:rPr lang="en-US" dirty="0"/>
-              <a:t>– Which variability measure is </a:t>
-            </a:r>
-            <a:r>
-              <a:rPr lang="en-US" b="1" dirty="0"/>
-              <a:t>most affected</a:t>
-            </a:r>
-            <a:r>
-              <a:rPr lang="en-US" dirty="0"/>
-              <a:t> by Athlete A10?</a:t>
-            </a:r>
-            <a:br>
-              <a:rPr lang="en-US" dirty="0"/>
-            </a:br>
-            <a:r>
-              <a:rPr lang="en-US" dirty="0"/>
-              <a:t>– Which variability measure is </a:t>
-            </a:r>
-            <a:r>
-              <a:rPr lang="en-US" b="1" dirty="0"/>
-              <a:t>least affected</a:t>
-            </a:r>
-            <a:r>
-              <a:rPr lang="en-US" dirty="0"/>
-              <a:t> by Athlete A10?</a:t>
-            </a:r>
-          </a:p>
-          <a:p>
-            <a:endParaRPr lang="en-US" dirty="0"/>
-          </a:p>
-          <a:p>
-            <a:r>
-              <a:rPr lang="en-US" dirty="0"/>
-              <a:t>– If you were </a:t>
-            </a:r>
-            <a:r>
-              <a:rPr lang="en-US" b="1" dirty="0"/>
-              <a:t>validating the data</a:t>
-            </a:r>
-            <a:r>
-              <a:rPr lang="en-US" dirty="0"/>
-              <a:t>, which variability measure would you look at first?</a:t>
-            </a:r>
-            <a:br>
-              <a:rPr lang="en-US" dirty="0"/>
-            </a:br>
-            <a:r>
-              <a:rPr lang="en-US" dirty="0"/>
-              <a:t>– If you were </a:t>
-            </a:r>
-            <a:r>
-              <a:rPr lang="en-US" b="1" dirty="0"/>
-              <a:t>describing performance consistency</a:t>
-            </a:r>
-            <a:r>
-              <a:rPr lang="en-US" dirty="0"/>
-              <a:t>, which would you report?</a:t>
-            </a:r>
-          </a:p>
-          <a:p>
-            <a:endParaRPr lang="en-US" dirty="0"/>
-          </a:p>
-          <a:p>
-            <a:r>
-              <a:rPr lang="en-US" dirty="0"/>
-              <a:t>– If you could report </a:t>
-            </a:r>
-            <a:r>
-              <a:rPr lang="en-US" b="1" dirty="0"/>
-              <a:t>one number for “typical performance”</a:t>
-            </a:r>
-            <a:r>
-              <a:rPr lang="en-US" dirty="0"/>
-              <a:t> and </a:t>
-            </a:r>
-            <a:r>
-              <a:rPr lang="en-US" b="1" dirty="0"/>
-              <a:t>one number for “spread”</a:t>
-            </a:r>
-            <a:r>
-              <a:rPr lang="en-US" dirty="0"/>
-              <a:t> to a coach, what would you choose and why?</a:t>
+              <a:t>This is the real Anscombe’s quartet, in case you ever come across it outside of this class</a:t>
             </a:r>
           </a:p>
         </p:txBody>
@@ -3098,6 +2961,341 @@
             <a:fld id="{1560C251-82B7-4253-A774-38D73C276BCE}" type="slidenum">
               <a:rPr lang="en-US" smtClean="0"/>
               <a:t>31</a:t>
+            </a:fld>
+            <a:endParaRPr lang="en-US"/>
+          </a:p>
+        </p:txBody>
+      </p:sp>
+    </p:spTree>
+    <p:extLst>
+      <p:ext uri="{BB962C8B-B14F-4D97-AF65-F5344CB8AC3E}">
+        <p14:creationId xmlns:p14="http://schemas.microsoft.com/office/powerpoint/2010/main" val="450748608"/>
+      </p:ext>
+    </p:extLst>
+  </p:cSld>
+  <p:clrMapOvr>
+    <a:masterClrMapping/>
+  </p:clrMapOvr>
+</p:notes>
+</file>
+
+<file path=ppt/notesSlides/notesSlide25.xml><?xml version="1.0" encoding="utf-8"?>
+<p:notes xmlns:a="http://schemas.openxmlformats.org/drawingml/2006/main" xmlns:r="http://schemas.openxmlformats.org/officeDocument/2006/relationships" xmlns:p="http://schemas.openxmlformats.org/presentationml/2006/main">
+  <p:cSld>
+    <p:spTree>
+      <p:nvGrpSpPr>
+        <p:cNvPr id="1" name="">
+          <a:extLst>
+            <a:ext uri="{FF2B5EF4-FFF2-40B4-BE49-F238E27FC236}">
+              <a16:creationId xmlns:a16="http://schemas.microsoft.com/office/drawing/2014/main" id="{17D6C3BF-1410-282C-E358-4DAEDAD30E2D}"/>
+            </a:ext>
+          </a:extLst>
+        </p:cNvPr>
+        <p:cNvGrpSpPr/>
+        <p:nvPr/>
+      </p:nvGrpSpPr>
+      <p:grpSpPr>
+        <a:xfrm>
+          <a:off x="0" y="0"/>
+          <a:ext cx="0" cy="0"/>
+          <a:chOff x="0" y="0"/>
+          <a:chExt cx="0" cy="0"/>
+        </a:xfrm>
+      </p:grpSpPr>
+      <p:sp>
+        <p:nvSpPr>
+          <p:cNvPr id="2" name="Slide Image Placeholder 1">
+            <a:extLst>
+              <a:ext uri="{FF2B5EF4-FFF2-40B4-BE49-F238E27FC236}">
+                <a16:creationId xmlns:a16="http://schemas.microsoft.com/office/drawing/2014/main" id="{BAF13BA8-57D9-8395-C333-5A57AD9C0DF5}"/>
+              </a:ext>
+            </a:extLst>
+          </p:cNvPr>
+          <p:cNvSpPr>
+            <a:spLocks noGrp="1" noRot="1" noChangeAspect="1"/>
+          </p:cNvSpPr>
+          <p:nvPr>
+            <p:ph type="sldImg"/>
+          </p:nvPr>
+        </p:nvSpPr>
+        <p:spPr/>
+      </p:sp>
+      <p:sp>
+        <p:nvSpPr>
+          <p:cNvPr id="3" name="Notes Placeholder 2">
+            <a:extLst>
+              <a:ext uri="{FF2B5EF4-FFF2-40B4-BE49-F238E27FC236}">
+                <a16:creationId xmlns:a16="http://schemas.microsoft.com/office/drawing/2014/main" id="{807B752B-7357-A385-8B29-763FD6749BDC}"/>
+              </a:ext>
+            </a:extLst>
+          </p:cNvPr>
+          <p:cNvSpPr>
+            <a:spLocks noGrp="1"/>
+          </p:cNvSpPr>
+          <p:nvPr>
+            <p:ph type="body" idx="1"/>
+          </p:nvPr>
+        </p:nvSpPr>
+        <p:spPr/>
+        <p:txBody>
+          <a:bodyPr/>
+          <a:lstStyle/>
+          <a:p>
+            <a:r>
+              <a:rPr lang="en-US" b="1" dirty="0"/>
+              <a:t>Section 3: What summaries reveal vs. what they hide</a:t>
+            </a:r>
+          </a:p>
+        </p:txBody>
+      </p:sp>
+      <p:sp>
+        <p:nvSpPr>
+          <p:cNvPr id="4" name="Slide Number Placeholder 3">
+            <a:extLst>
+              <a:ext uri="{FF2B5EF4-FFF2-40B4-BE49-F238E27FC236}">
+                <a16:creationId xmlns:a16="http://schemas.microsoft.com/office/drawing/2014/main" id="{644BD303-86C6-3EB0-E571-19959F856032}"/>
+              </a:ext>
+            </a:extLst>
+          </p:cNvPr>
+          <p:cNvSpPr>
+            <a:spLocks noGrp="1"/>
+          </p:cNvSpPr>
+          <p:nvPr>
+            <p:ph type="sldNum" sz="quarter" idx="5"/>
+          </p:nvPr>
+        </p:nvSpPr>
+        <p:spPr/>
+        <p:txBody>
+          <a:bodyPr/>
+          <a:lstStyle/>
+          <a:p>
+            <a:fld id="{1560C251-82B7-4253-A774-38D73C276BCE}" type="slidenum">
+              <a:rPr lang="en-US" smtClean="0"/>
+              <a:t>32</a:t>
+            </a:fld>
+            <a:endParaRPr lang="en-US"/>
+          </a:p>
+        </p:txBody>
+      </p:sp>
+    </p:spTree>
+    <p:extLst>
+      <p:ext uri="{BB962C8B-B14F-4D97-AF65-F5344CB8AC3E}">
+        <p14:creationId xmlns:p14="http://schemas.microsoft.com/office/powerpoint/2010/main" val="414880112"/>
+      </p:ext>
+    </p:extLst>
+  </p:cSld>
+  <p:clrMapOvr>
+    <a:masterClrMapping/>
+  </p:clrMapOvr>
+</p:notes>
+</file>
+
+<file path=ppt/notesSlides/notesSlide26.xml><?xml version="1.0" encoding="utf-8"?>
+<p:notes xmlns:a="http://schemas.openxmlformats.org/drawingml/2006/main" xmlns:r="http://schemas.openxmlformats.org/officeDocument/2006/relationships" xmlns:p="http://schemas.openxmlformats.org/presentationml/2006/main">
+  <p:cSld>
+    <p:spTree>
+      <p:nvGrpSpPr>
+        <p:cNvPr id="1" name=""/>
+        <p:cNvGrpSpPr/>
+        <p:nvPr/>
+      </p:nvGrpSpPr>
+      <p:grpSpPr>
+        <a:xfrm>
+          <a:off x="0" y="0"/>
+          <a:ext cx="0" cy="0"/>
+          <a:chOff x="0" y="0"/>
+          <a:chExt cx="0" cy="0"/>
+        </a:xfrm>
+      </p:grpSpPr>
+      <p:sp>
+        <p:nvSpPr>
+          <p:cNvPr id="2" name="Slide Image Placeholder 1"/>
+          <p:cNvSpPr>
+            <a:spLocks noGrp="1" noRot="1" noChangeAspect="1"/>
+          </p:cNvSpPr>
+          <p:nvPr>
+            <p:ph type="sldImg"/>
+          </p:nvPr>
+        </p:nvSpPr>
+        <p:spPr/>
+      </p:sp>
+      <p:sp>
+        <p:nvSpPr>
+          <p:cNvPr id="3" name="Notes Placeholder 2"/>
+          <p:cNvSpPr>
+            <a:spLocks noGrp="1"/>
+          </p:cNvSpPr>
+          <p:nvPr>
+            <p:ph type="body" idx="1"/>
+          </p:nvPr>
+        </p:nvSpPr>
+        <p:spPr/>
+        <p:txBody>
+          <a:bodyPr/>
+          <a:lstStyle/>
+          <a:p>
+            <a:r>
+              <a:rPr lang="en-US" dirty="0"/>
+              <a:t>– Which summary statistics are </a:t>
+            </a:r>
+            <a:r>
+              <a:rPr lang="en-US" b="1" dirty="0"/>
+              <a:t>invalid</a:t>
+            </a:r>
+            <a:r>
+              <a:rPr lang="en-US" dirty="0"/>
+              <a:t> for Position, and why?</a:t>
+            </a:r>
+          </a:p>
+          <a:p>
+            <a:r>
+              <a:rPr lang="en-US" dirty="0"/>
+              <a:t>– What is the </a:t>
+            </a:r>
+            <a:r>
+              <a:rPr lang="en-US" b="1" dirty="0"/>
+              <a:t>mode</a:t>
+            </a:r>
+            <a:r>
+              <a:rPr lang="en-US" dirty="0"/>
+              <a:t> of Position?</a:t>
+            </a:r>
+            <a:br>
+              <a:rPr lang="en-US" dirty="0"/>
+            </a:br>
+            <a:endParaRPr lang="en-US" dirty="0"/>
+          </a:p>
+          <a:p>
+            <a:r>
+              <a:rPr lang="en-US" dirty="0"/>
+              <a:t>– For </a:t>
+            </a:r>
+            <a:r>
+              <a:rPr lang="en-US" dirty="0" err="1"/>
+              <a:t>JumpHeight_cm</a:t>
+            </a:r>
+            <a:r>
+              <a:rPr lang="en-US" dirty="0"/>
+              <a:t>, which is more representative of a “typical” athlete: </a:t>
+            </a:r>
+            <a:r>
+              <a:rPr lang="en-US" b="1" dirty="0"/>
+              <a:t>mean or median</a:t>
+            </a:r>
+            <a:r>
+              <a:rPr lang="en-US" dirty="0"/>
+              <a:t>?</a:t>
+            </a:r>
+          </a:p>
+          <a:p>
+            <a:endParaRPr lang="en-US" dirty="0"/>
+          </a:p>
+          <a:p>
+            <a:r>
+              <a:rPr lang="en-US" dirty="0"/>
+              <a:t>– Which variability measure is </a:t>
+            </a:r>
+            <a:r>
+              <a:rPr lang="en-US" b="1" dirty="0"/>
+              <a:t>most affected</a:t>
+            </a:r>
+            <a:r>
+              <a:rPr lang="en-US" dirty="0"/>
+              <a:t> by Athlete A10?</a:t>
+            </a:r>
+            <a:br>
+              <a:rPr lang="en-US" dirty="0"/>
+            </a:br>
+            <a:r>
+              <a:rPr lang="en-US" dirty="0"/>
+              <a:t>– Which variability measure is </a:t>
+            </a:r>
+            <a:r>
+              <a:rPr lang="en-US" b="1" dirty="0"/>
+              <a:t>least affected</a:t>
+            </a:r>
+            <a:r>
+              <a:rPr lang="en-US" dirty="0"/>
+              <a:t> by Athlete A10?</a:t>
+            </a:r>
+          </a:p>
+          <a:p>
+            <a:endParaRPr lang="en-US" dirty="0"/>
+          </a:p>
+          <a:p>
+            <a:r>
+              <a:rPr lang="en-US" dirty="0"/>
+              <a:t>– If you were </a:t>
+            </a:r>
+            <a:r>
+              <a:rPr lang="en-US" b="1" dirty="0"/>
+              <a:t>validating the data</a:t>
+            </a:r>
+            <a:r>
+              <a:rPr lang="en-US" dirty="0"/>
+              <a:t>, which variability measure would you look at first?</a:t>
+            </a:r>
+            <a:br>
+              <a:rPr lang="en-US" dirty="0"/>
+            </a:br>
+            <a:r>
+              <a:rPr lang="en-US" dirty="0"/>
+              <a:t>– If you were </a:t>
+            </a:r>
+            <a:r>
+              <a:rPr lang="en-US" b="1" dirty="0"/>
+              <a:t>describing performance consistency</a:t>
+            </a:r>
+            <a:r>
+              <a:rPr lang="en-US" dirty="0"/>
+              <a:t>, which would you report?</a:t>
+            </a:r>
+          </a:p>
+          <a:p>
+            <a:endParaRPr lang="en-US" dirty="0"/>
+          </a:p>
+          <a:p>
+            <a:r>
+              <a:rPr lang="en-US" dirty="0"/>
+              <a:t>– If you could report </a:t>
+            </a:r>
+            <a:r>
+              <a:rPr lang="en-US" b="1" dirty="0"/>
+              <a:t>one number for “typical performance”</a:t>
+            </a:r>
+            <a:r>
+              <a:rPr lang="en-US" dirty="0"/>
+              <a:t> and </a:t>
+            </a:r>
+            <a:r>
+              <a:rPr lang="en-US" b="1" dirty="0"/>
+              <a:t>one number for “spread”</a:t>
+            </a:r>
+            <a:r>
+              <a:rPr lang="en-US" dirty="0"/>
+              <a:t> to a coach, what would you choose and why?</a:t>
+            </a:r>
+          </a:p>
+        </p:txBody>
+      </p:sp>
+      <p:sp>
+        <p:nvSpPr>
+          <p:cNvPr id="4" name="Slide Number Placeholder 3"/>
+          <p:cNvSpPr>
+            <a:spLocks noGrp="1"/>
+          </p:cNvSpPr>
+          <p:nvPr>
+            <p:ph type="sldNum" sz="quarter" idx="5"/>
+          </p:nvPr>
+        </p:nvSpPr>
+        <p:spPr/>
+        <p:txBody>
+          <a:bodyPr/>
+          <a:lstStyle/>
+          <a:p>
+            <a:fld id="{1560C251-82B7-4253-A774-38D73C276BCE}" type="slidenum">
+              <a:rPr lang="en-US" smtClean="0"/>
+              <a:t>33</a:t>
             </a:fld>
             <a:endParaRPr lang="en-US"/>
           </a:p>
@@ -3116,7 +3314,7 @@
 </p:notes>
 </file>
 
-<file path=ppt/notesSlides/notesSlide25.xml><?xml version="1.0" encoding="utf-8"?>
+<file path=ppt/notesSlides/notesSlide27.xml><?xml version="1.0" encoding="utf-8"?>
 <p:notes xmlns:a="http://schemas.openxmlformats.org/drawingml/2006/main" xmlns:r="http://schemas.openxmlformats.org/officeDocument/2006/relationships" xmlns:p="http://schemas.openxmlformats.org/presentationml/2006/main">
   <p:cSld>
     <p:spTree>
@@ -3205,7 +3403,7 @@
           <a:p>
             <a:fld id="{1560C251-82B7-4253-A774-38D73C276BCE}" type="slidenum">
               <a:rPr lang="en-US" smtClean="0"/>
-              <a:t>32</a:t>
+              <a:t>34</a:t>
             </a:fld>
             <a:endParaRPr lang="en-US"/>
           </a:p>
@@ -3315,7 +3513,7 @@
           <a:p>
             <a:fld id="{1560C251-82B7-4253-A774-38D73C276BCE}" type="slidenum">
               <a:rPr lang="en-US" smtClean="0"/>
-              <a:t>3</a:t>
+              <a:t>5</a:t>
             </a:fld>
             <a:endParaRPr lang="en-US"/>
           </a:p>
@@ -3462,7 +3660,7 @@
           <a:p>
             <a:fld id="{1560C251-82B7-4253-A774-38D73C276BCE}" type="slidenum">
               <a:rPr lang="en-US" smtClean="0"/>
-              <a:t>4</a:t>
+              <a:t>6</a:t>
             </a:fld>
             <a:endParaRPr lang="en-US"/>
           </a:p>
@@ -3609,7 +3807,7 @@
           <a:p>
             <a:fld id="{1560C251-82B7-4253-A774-38D73C276BCE}" type="slidenum">
               <a:rPr lang="en-US" smtClean="0"/>
-              <a:t>5</a:t>
+              <a:t>7</a:t>
             </a:fld>
             <a:endParaRPr lang="en-US"/>
           </a:p>
@@ -3699,7 +3897,7 @@
           <a:p>
             <a:fld id="{1560C251-82B7-4253-A774-38D73C276BCE}" type="slidenum">
               <a:rPr lang="en-US" smtClean="0"/>
-              <a:t>6</a:t>
+              <a:t>8</a:t>
             </a:fld>
             <a:endParaRPr lang="en-US"/>
           </a:p>
@@ -3841,7 +4039,7 @@
           <a:p>
             <a:fld id="{1560C251-82B7-4253-A774-38D73C276BCE}" type="slidenum">
               <a:rPr lang="en-US" smtClean="0"/>
-              <a:t>7</a:t>
+              <a:t>9</a:t>
             </a:fld>
             <a:endParaRPr lang="en-US"/>
           </a:p>
@@ -3988,7 +4186,7 @@
           <a:p>
             <a:fld id="{1560C251-82B7-4253-A774-38D73C276BCE}" type="slidenum">
               <a:rPr lang="en-US" smtClean="0"/>
-              <a:t>8</a:t>
+              <a:t>10</a:t>
             </a:fld>
             <a:endParaRPr lang="en-US"/>
           </a:p>
@@ -4159,7 +4357,7 @@
           <a:p>
             <a:fld id="{1560C251-82B7-4253-A774-38D73C276BCE}" type="slidenum">
               <a:rPr lang="en-US" smtClean="0"/>
-              <a:t>9</a:t>
+              <a:t>11</a:t>
             </a:fld>
             <a:endParaRPr lang="en-US"/>
           </a:p>
@@ -7709,6 +7907,780 @@
   <p:cSld>
     <p:spTree>
       <p:nvGrpSpPr>
+        <p:cNvPr id="1" name=""/>
+        <p:cNvGrpSpPr/>
+        <p:nvPr/>
+      </p:nvGrpSpPr>
+      <p:grpSpPr>
+        <a:xfrm>
+          <a:off x="0" y="0"/>
+          <a:ext cx="0" cy="0"/>
+          <a:chOff x="0" y="0"/>
+          <a:chExt cx="0" cy="0"/>
+        </a:xfrm>
+      </p:grpSpPr>
+      <p:sp>
+        <p:nvSpPr>
+          <p:cNvPr id="2" name="Title 1">
+            <a:extLst>
+              <a:ext uri="{FF2B5EF4-FFF2-40B4-BE49-F238E27FC236}">
+                <a16:creationId xmlns:a16="http://schemas.microsoft.com/office/drawing/2014/main" id="{08CA7D61-3432-671B-3EFC-43F846227E36}"/>
+              </a:ext>
+            </a:extLst>
+          </p:cNvPr>
+          <p:cNvSpPr>
+            <a:spLocks noGrp="1"/>
+          </p:cNvSpPr>
+          <p:nvPr>
+            <p:ph type="title"/>
+          </p:nvPr>
+        </p:nvSpPr>
+        <p:spPr/>
+        <p:txBody>
+          <a:bodyPr/>
+          <a:lstStyle/>
+          <a:p>
+            <a:r>
+              <a:rPr lang="en-US" dirty="0"/>
+              <a:t>Range</a:t>
+            </a:r>
+          </a:p>
+        </p:txBody>
+      </p:sp>
+      <p:sp>
+        <p:nvSpPr>
+          <p:cNvPr id="3" name="Content Placeholder 2">
+            <a:extLst>
+              <a:ext uri="{FF2B5EF4-FFF2-40B4-BE49-F238E27FC236}">
+                <a16:creationId xmlns:a16="http://schemas.microsoft.com/office/drawing/2014/main" id="{4BFE3BC2-A03B-D6FE-A07F-A2B5C66A40B1}"/>
+              </a:ext>
+            </a:extLst>
+          </p:cNvPr>
+          <p:cNvSpPr>
+            <a:spLocks noGrp="1"/>
+          </p:cNvSpPr>
+          <p:nvPr>
+            <p:ph idx="1"/>
+          </p:nvPr>
+        </p:nvSpPr>
+        <p:spPr/>
+        <p:txBody>
+          <a:bodyPr>
+            <a:normAutofit/>
+          </a:bodyPr>
+          <a:lstStyle/>
+          <a:p>
+            <a:r>
+              <a:rPr lang="en-US" dirty="0"/>
+              <a:t>Range: distance between the smallest and largest values.</a:t>
+            </a:r>
+          </a:p>
+          <a:p>
+            <a:pPr lvl="1"/>
+            <a:r>
+              <a:rPr lang="en-US" dirty="0"/>
+              <a:t>Sensitive to outliers</a:t>
+            </a:r>
+          </a:p>
+          <a:p>
+            <a:pPr lvl="1"/>
+            <a:endParaRPr lang="en-US" dirty="0"/>
+          </a:p>
+          <a:p>
+            <a:r>
+              <a:rPr lang="en-US" dirty="0"/>
+              <a:t>IQR: spread of the middle 50% of the data.</a:t>
+            </a:r>
+          </a:p>
+          <a:p>
+            <a:pPr lvl="1"/>
+            <a:r>
+              <a:rPr lang="en-US" dirty="0"/>
+              <a:t>Less sensitive to outliers</a:t>
+            </a:r>
+          </a:p>
+          <a:p>
+            <a:pPr lvl="1"/>
+            <a:endParaRPr lang="en-US" dirty="0"/>
+          </a:p>
+          <a:p>
+            <a:r>
+              <a:rPr lang="en-US" dirty="0">
+                <a:solidFill>
+                  <a:schemeClr val="bg2">
+                    <a:lumMod val="75000"/>
+                  </a:schemeClr>
+                </a:solidFill>
+              </a:rPr>
+              <a:t>Standard Deviation: square root of variance</a:t>
+            </a:r>
+          </a:p>
+          <a:p>
+            <a:pPr lvl="1"/>
+            <a:r>
+              <a:rPr lang="en-US" dirty="0">
+                <a:solidFill>
+                  <a:schemeClr val="bg2">
+                    <a:lumMod val="75000"/>
+                  </a:schemeClr>
+                </a:solidFill>
+              </a:rPr>
+              <a:t>Typical deviation from the mean </a:t>
+            </a:r>
+          </a:p>
+          <a:p>
+            <a:pPr lvl="1"/>
+            <a:r>
+              <a:rPr lang="en-US" dirty="0">
+                <a:solidFill>
+                  <a:schemeClr val="bg2">
+                    <a:lumMod val="75000"/>
+                  </a:schemeClr>
+                </a:solidFill>
+              </a:rPr>
+              <a:t>Same units as the data</a:t>
+            </a:r>
+          </a:p>
+          <a:p>
+            <a:endParaRPr lang="en-US" dirty="0"/>
+          </a:p>
+        </p:txBody>
+      </p:sp>
+      <p:sp>
+        <p:nvSpPr>
+          <p:cNvPr id="4" name="Slide Number Placeholder 3">
+            <a:extLst>
+              <a:ext uri="{FF2B5EF4-FFF2-40B4-BE49-F238E27FC236}">
+                <a16:creationId xmlns:a16="http://schemas.microsoft.com/office/drawing/2014/main" id="{F61C70DC-37FB-87E0-5D03-00D92FDD6D3C}"/>
+              </a:ext>
+            </a:extLst>
+          </p:cNvPr>
+          <p:cNvSpPr>
+            <a:spLocks noGrp="1"/>
+          </p:cNvSpPr>
+          <p:nvPr>
+            <p:ph type="sldNum" sz="quarter" idx="12"/>
+          </p:nvPr>
+        </p:nvSpPr>
+        <p:spPr/>
+        <p:txBody>
+          <a:bodyPr/>
+          <a:lstStyle/>
+          <a:p>
+            <a:fld id="{45C00377-489B-40EC-B059-26BDDD2E89B9}" type="slidenum">
+              <a:rPr lang="en-US" smtClean="0"/>
+              <a:pPr/>
+              <a:t>10</a:t>
+            </a:fld>
+            <a:endParaRPr lang="en-US" dirty="0"/>
+          </a:p>
+        </p:txBody>
+      </p:sp>
+    </p:spTree>
+    <p:extLst>
+      <p:ext uri="{BB962C8B-B14F-4D97-AF65-F5344CB8AC3E}">
+        <p14:creationId xmlns:p14="http://schemas.microsoft.com/office/powerpoint/2010/main" val="4206175980"/>
+      </p:ext>
+    </p:extLst>
+  </p:cSld>
+  <p:clrMapOvr>
+    <a:masterClrMapping/>
+  </p:clrMapOvr>
+  <p:timing>
+    <p:tnLst>
+      <p:par>
+        <p:cTn id="1" dur="indefinite" restart="never" nodeType="tmRoot">
+          <p:childTnLst>
+            <p:seq concurrent="1" nextAc="seek">
+              <p:cTn id="2" dur="indefinite" nodeType="mainSeq">
+                <p:childTnLst>
+                  <p:par>
+                    <p:cTn id="3" fill="hold">
+                      <p:stCondLst>
+                        <p:cond delay="indefinite"/>
+                      </p:stCondLst>
+                      <p:childTnLst>
+                        <p:par>
+                          <p:cTn id="4" fill="hold">
+                            <p:stCondLst>
+                              <p:cond delay="0"/>
+                            </p:stCondLst>
+                            <p:childTnLst>
+                              <p:par>
+                                <p:cTn id="5" presetID="1" presetClass="entr" presetSubtype="0" fill="hold" grpId="0" nodeType="clickEffect">
+                                  <p:stCondLst>
+                                    <p:cond delay="0"/>
+                                  </p:stCondLst>
+                                  <p:childTnLst>
+                                    <p:set>
+                                      <p:cBhvr>
+                                        <p:cTn id="6" dur="1" fill="hold">
+                                          <p:stCondLst>
+                                            <p:cond delay="0"/>
+                                          </p:stCondLst>
+                                        </p:cTn>
+                                        <p:tgtEl>
+                                          <p:spTgt spid="3">
+                                            <p:txEl>
+                                              <p:pRg st="0" end="0"/>
+                                            </p:txEl>
+                                          </p:spTgt>
+                                        </p:tgtEl>
+                                        <p:attrNameLst>
+                                          <p:attrName>style.visibility</p:attrName>
+                                        </p:attrNameLst>
+                                      </p:cBhvr>
+                                      <p:to>
+                                        <p:strVal val="visible"/>
+                                      </p:to>
+                                    </p:set>
+                                  </p:childTnLst>
+                                </p:cTn>
+                              </p:par>
+                              <p:par>
+                                <p:cTn id="7" presetID="1" presetClass="entr" presetSubtype="0" fill="hold" grpId="0" nodeType="withEffect">
+                                  <p:stCondLst>
+                                    <p:cond delay="0"/>
+                                  </p:stCondLst>
+                                  <p:childTnLst>
+                                    <p:set>
+                                      <p:cBhvr>
+                                        <p:cTn id="8" dur="1" fill="hold">
+                                          <p:stCondLst>
+                                            <p:cond delay="0"/>
+                                          </p:stCondLst>
+                                        </p:cTn>
+                                        <p:tgtEl>
+                                          <p:spTgt spid="3">
+                                            <p:txEl>
+                                              <p:pRg st="1" end="1"/>
+                                            </p:txEl>
+                                          </p:spTgt>
+                                        </p:tgtEl>
+                                        <p:attrNameLst>
+                                          <p:attrName>style.visibility</p:attrName>
+                                        </p:attrNameLst>
+                                      </p:cBhvr>
+                                      <p:to>
+                                        <p:strVal val="visible"/>
+                                      </p:to>
+                                    </p:set>
+                                  </p:childTnLst>
+                                </p:cTn>
+                              </p:par>
+                            </p:childTnLst>
+                          </p:cTn>
+                        </p:par>
+                      </p:childTnLst>
+                    </p:cTn>
+                  </p:par>
+                  <p:par>
+                    <p:cTn id="9" fill="hold">
+                      <p:stCondLst>
+                        <p:cond delay="indefinite"/>
+                      </p:stCondLst>
+                      <p:childTnLst>
+                        <p:par>
+                          <p:cTn id="10" fill="hold">
+                            <p:stCondLst>
+                              <p:cond delay="0"/>
+                            </p:stCondLst>
+                            <p:childTnLst>
+                              <p:par>
+                                <p:cTn id="11" presetID="1" presetClass="entr" presetSubtype="0" fill="hold" grpId="0" nodeType="clickEffect">
+                                  <p:stCondLst>
+                                    <p:cond delay="0"/>
+                                  </p:stCondLst>
+                                  <p:childTnLst>
+                                    <p:set>
+                                      <p:cBhvr>
+                                        <p:cTn id="12" dur="1" fill="hold">
+                                          <p:stCondLst>
+                                            <p:cond delay="0"/>
+                                          </p:stCondLst>
+                                        </p:cTn>
+                                        <p:tgtEl>
+                                          <p:spTgt spid="3">
+                                            <p:txEl>
+                                              <p:pRg st="3" end="3"/>
+                                            </p:txEl>
+                                          </p:spTgt>
+                                        </p:tgtEl>
+                                        <p:attrNameLst>
+                                          <p:attrName>style.visibility</p:attrName>
+                                        </p:attrNameLst>
+                                      </p:cBhvr>
+                                      <p:to>
+                                        <p:strVal val="visible"/>
+                                      </p:to>
+                                    </p:set>
+                                  </p:childTnLst>
+                                </p:cTn>
+                              </p:par>
+                              <p:par>
+                                <p:cTn id="13" presetID="1" presetClass="entr" presetSubtype="0" fill="hold" grpId="0" nodeType="withEffect">
+                                  <p:stCondLst>
+                                    <p:cond delay="0"/>
+                                  </p:stCondLst>
+                                  <p:childTnLst>
+                                    <p:set>
+                                      <p:cBhvr>
+                                        <p:cTn id="14" dur="1" fill="hold">
+                                          <p:stCondLst>
+                                            <p:cond delay="0"/>
+                                          </p:stCondLst>
+                                        </p:cTn>
+                                        <p:tgtEl>
+                                          <p:spTgt spid="3">
+                                            <p:txEl>
+                                              <p:pRg st="4" end="4"/>
+                                            </p:txEl>
+                                          </p:spTgt>
+                                        </p:tgtEl>
+                                        <p:attrNameLst>
+                                          <p:attrName>style.visibility</p:attrName>
+                                        </p:attrNameLst>
+                                      </p:cBhvr>
+                                      <p:to>
+                                        <p:strVal val="visible"/>
+                                      </p:to>
+                                    </p:set>
+                                  </p:childTnLst>
+                                </p:cTn>
+                              </p:par>
+                            </p:childTnLst>
+                          </p:cTn>
+                        </p:par>
+                      </p:childTnLst>
+                    </p:cTn>
+                  </p:par>
+                  <p:par>
+                    <p:cTn id="15" fill="hold">
+                      <p:stCondLst>
+                        <p:cond delay="indefinite"/>
+                      </p:stCondLst>
+                      <p:childTnLst>
+                        <p:par>
+                          <p:cTn id="16" fill="hold">
+                            <p:stCondLst>
+                              <p:cond delay="0"/>
+                            </p:stCondLst>
+                            <p:childTnLst>
+                              <p:par>
+                                <p:cTn id="17" presetID="1" presetClass="entr" presetSubtype="0" fill="hold" grpId="0" nodeType="clickEffect">
+                                  <p:stCondLst>
+                                    <p:cond delay="0"/>
+                                  </p:stCondLst>
+                                  <p:childTnLst>
+                                    <p:set>
+                                      <p:cBhvr>
+                                        <p:cTn id="18" dur="1" fill="hold">
+                                          <p:stCondLst>
+                                            <p:cond delay="0"/>
+                                          </p:stCondLst>
+                                        </p:cTn>
+                                        <p:tgtEl>
+                                          <p:spTgt spid="3">
+                                            <p:txEl>
+                                              <p:pRg st="6" end="6"/>
+                                            </p:txEl>
+                                          </p:spTgt>
+                                        </p:tgtEl>
+                                        <p:attrNameLst>
+                                          <p:attrName>style.visibility</p:attrName>
+                                        </p:attrNameLst>
+                                      </p:cBhvr>
+                                      <p:to>
+                                        <p:strVal val="visible"/>
+                                      </p:to>
+                                    </p:set>
+                                  </p:childTnLst>
+                                </p:cTn>
+                              </p:par>
+                              <p:par>
+                                <p:cTn id="19" presetID="1" presetClass="entr" presetSubtype="0" fill="hold" grpId="0" nodeType="withEffect">
+                                  <p:stCondLst>
+                                    <p:cond delay="0"/>
+                                  </p:stCondLst>
+                                  <p:childTnLst>
+                                    <p:set>
+                                      <p:cBhvr>
+                                        <p:cTn id="20" dur="1" fill="hold">
+                                          <p:stCondLst>
+                                            <p:cond delay="0"/>
+                                          </p:stCondLst>
+                                        </p:cTn>
+                                        <p:tgtEl>
+                                          <p:spTgt spid="3">
+                                            <p:txEl>
+                                              <p:pRg st="7" end="7"/>
+                                            </p:txEl>
+                                          </p:spTgt>
+                                        </p:tgtEl>
+                                        <p:attrNameLst>
+                                          <p:attrName>style.visibility</p:attrName>
+                                        </p:attrNameLst>
+                                      </p:cBhvr>
+                                      <p:to>
+                                        <p:strVal val="visible"/>
+                                      </p:to>
+                                    </p:set>
+                                  </p:childTnLst>
+                                </p:cTn>
+                              </p:par>
+                              <p:par>
+                                <p:cTn id="21" presetID="1" presetClass="entr" presetSubtype="0" fill="hold" grpId="0" nodeType="withEffect">
+                                  <p:stCondLst>
+                                    <p:cond delay="0"/>
+                                  </p:stCondLst>
+                                  <p:childTnLst>
+                                    <p:set>
+                                      <p:cBhvr>
+                                        <p:cTn id="22" dur="1" fill="hold">
+                                          <p:stCondLst>
+                                            <p:cond delay="0"/>
+                                          </p:stCondLst>
+                                        </p:cTn>
+                                        <p:tgtEl>
+                                          <p:spTgt spid="3">
+                                            <p:txEl>
+                                              <p:pRg st="8" end="8"/>
+                                            </p:txEl>
+                                          </p:spTgt>
+                                        </p:tgtEl>
+                                        <p:attrNameLst>
+                                          <p:attrName>style.visibility</p:attrName>
+                                        </p:attrNameLst>
+                                      </p:cBhvr>
+                                      <p:to>
+                                        <p:strVal val="visible"/>
+                                      </p:to>
+                                    </p:set>
+                                  </p:childTnLst>
+                                </p:cTn>
+                              </p:par>
+                            </p:childTnLst>
+                          </p:cTn>
+                        </p:par>
+                      </p:childTnLst>
+                    </p:cTn>
+                  </p:par>
+                </p:childTnLst>
+              </p:cTn>
+              <p:prevCondLst>
+                <p:cond evt="onPrev" delay="0">
+                  <p:tgtEl>
+                    <p:sldTgt/>
+                  </p:tgtEl>
+                </p:cond>
+              </p:prevCondLst>
+              <p:nextCondLst>
+                <p:cond evt="onNext" delay="0">
+                  <p:tgtEl>
+                    <p:sldTgt/>
+                  </p:tgtEl>
+                </p:cond>
+              </p:nextCondLst>
+            </p:seq>
+          </p:childTnLst>
+        </p:cTn>
+      </p:par>
+    </p:tnLst>
+    <p:bldLst>
+      <p:bldP spid="3" grpId="0" build="p"/>
+    </p:bldLst>
+  </p:timing>
+</p:sld>
+</file>
+
+<file path=ppt/slides/slide11.xml><?xml version="1.0" encoding="utf-8"?>
+<p:sld xmlns:a="http://schemas.openxmlformats.org/drawingml/2006/main" xmlns:r="http://schemas.openxmlformats.org/officeDocument/2006/relationships" xmlns:p="http://schemas.openxmlformats.org/presentationml/2006/main">
+  <p:cSld>
+    <p:spTree>
+      <p:nvGrpSpPr>
+        <p:cNvPr id="1" name="">
+          <a:extLst>
+            <a:ext uri="{FF2B5EF4-FFF2-40B4-BE49-F238E27FC236}">
+              <a16:creationId xmlns:a16="http://schemas.microsoft.com/office/drawing/2014/main" id="{8AAAEA5E-7577-2AE3-0E8B-A2EACB10EEDF}"/>
+            </a:ext>
+          </a:extLst>
+        </p:cNvPr>
+        <p:cNvGrpSpPr/>
+        <p:nvPr/>
+      </p:nvGrpSpPr>
+      <p:grpSpPr>
+        <a:xfrm>
+          <a:off x="0" y="0"/>
+          <a:ext cx="0" cy="0"/>
+          <a:chOff x="0" y="0"/>
+          <a:chExt cx="0" cy="0"/>
+        </a:xfrm>
+      </p:grpSpPr>
+      <p:sp>
+        <p:nvSpPr>
+          <p:cNvPr id="2" name="Title 1">
+            <a:extLst>
+              <a:ext uri="{FF2B5EF4-FFF2-40B4-BE49-F238E27FC236}">
+                <a16:creationId xmlns:a16="http://schemas.microsoft.com/office/drawing/2014/main" id="{3CBFB0CF-2A71-D3A2-2FF0-1B2A0CE00118}"/>
+              </a:ext>
+            </a:extLst>
+          </p:cNvPr>
+          <p:cNvSpPr>
+            <a:spLocks noGrp="1"/>
+          </p:cNvSpPr>
+          <p:nvPr>
+            <p:ph type="title"/>
+          </p:nvPr>
+        </p:nvSpPr>
+        <p:spPr/>
+        <p:txBody>
+          <a:bodyPr/>
+          <a:lstStyle/>
+          <a:p>
+            <a:r>
+              <a:rPr lang="en-US" dirty="0"/>
+              <a:t>Range and IQR</a:t>
+            </a:r>
+          </a:p>
+        </p:txBody>
+      </p:sp>
+      <p:sp>
+        <p:nvSpPr>
+          <p:cNvPr id="4" name="Slide Number Placeholder 3">
+            <a:extLst>
+              <a:ext uri="{FF2B5EF4-FFF2-40B4-BE49-F238E27FC236}">
+                <a16:creationId xmlns:a16="http://schemas.microsoft.com/office/drawing/2014/main" id="{FDD9E4FB-2395-2EC7-0828-BDF71DCE4A66}"/>
+              </a:ext>
+            </a:extLst>
+          </p:cNvPr>
+          <p:cNvSpPr>
+            <a:spLocks noGrp="1"/>
+          </p:cNvSpPr>
+          <p:nvPr>
+            <p:ph type="sldNum" sz="quarter" idx="12"/>
+          </p:nvPr>
+        </p:nvSpPr>
+        <p:spPr/>
+        <p:txBody>
+          <a:bodyPr/>
+          <a:lstStyle/>
+          <a:p>
+            <a:fld id="{45C00377-489B-40EC-B059-26BDDD2E89B9}" type="slidenum">
+              <a:rPr lang="en-US" smtClean="0"/>
+              <a:pPr/>
+              <a:t>11</a:t>
+            </a:fld>
+            <a:endParaRPr lang="en-US"/>
+          </a:p>
+        </p:txBody>
+      </p:sp>
+      <p:pic>
+        <p:nvPicPr>
+          <p:cNvPr id="9" name="Picture 8">
+            <a:extLst>
+              <a:ext uri="{FF2B5EF4-FFF2-40B4-BE49-F238E27FC236}">
+                <a16:creationId xmlns:a16="http://schemas.microsoft.com/office/drawing/2014/main" id="{870C3C5B-B049-1768-3B29-0B864DB2D1B2}"/>
+              </a:ext>
+            </a:extLst>
+          </p:cNvPr>
+          <p:cNvPicPr>
+            <a:picLocks noChangeAspect="1"/>
+          </p:cNvPicPr>
+          <p:nvPr/>
+        </p:nvPicPr>
+        <p:blipFill>
+          <a:blip r:embed="rId3"/>
+          <a:stretch>
+            <a:fillRect/>
+          </a:stretch>
+        </p:blipFill>
+        <p:spPr>
+          <a:xfrm>
+            <a:off x="3810000" y="2446866"/>
+            <a:ext cx="4876800" cy="2767013"/>
+          </a:xfrm>
+          <a:prstGeom prst="rect">
+            <a:avLst/>
+          </a:prstGeom>
+        </p:spPr>
+      </p:pic>
+      <p:cxnSp>
+        <p:nvCxnSpPr>
+          <p:cNvPr id="11" name="Straight Arrow Connector 10">
+            <a:extLst>
+              <a:ext uri="{FF2B5EF4-FFF2-40B4-BE49-F238E27FC236}">
+                <a16:creationId xmlns:a16="http://schemas.microsoft.com/office/drawing/2014/main" id="{4251B779-5782-62AB-EF5A-1689D42E8607}"/>
+              </a:ext>
+            </a:extLst>
+          </p:cNvPr>
+          <p:cNvCxnSpPr/>
+          <p:nvPr/>
+        </p:nvCxnSpPr>
+        <p:spPr>
+          <a:xfrm>
+            <a:off x="5283200" y="4741333"/>
+            <a:ext cx="1930400" cy="0"/>
+          </a:xfrm>
+          <a:prstGeom prst="straightConnector1">
+            <a:avLst/>
+          </a:prstGeom>
+          <a:ln w="28575">
+            <a:headEnd type="triangle"/>
+            <a:tailEnd type="triangle"/>
+          </a:ln>
+        </p:spPr>
+        <p:style>
+          <a:lnRef idx="1">
+            <a:schemeClr val="accent1"/>
+          </a:lnRef>
+          <a:fillRef idx="0">
+            <a:schemeClr val="accent1"/>
+          </a:fillRef>
+          <a:effectRef idx="0">
+            <a:schemeClr val="accent1"/>
+          </a:effectRef>
+          <a:fontRef idx="minor">
+            <a:schemeClr val="tx1"/>
+          </a:fontRef>
+        </p:style>
+      </p:cxnSp>
+      <p:cxnSp>
+        <p:nvCxnSpPr>
+          <p:cNvPr id="12" name="Straight Arrow Connector 11">
+            <a:extLst>
+              <a:ext uri="{FF2B5EF4-FFF2-40B4-BE49-F238E27FC236}">
+                <a16:creationId xmlns:a16="http://schemas.microsoft.com/office/drawing/2014/main" id="{99A5919D-D89C-D771-B49D-57D20C3EA9D6}"/>
+              </a:ext>
+            </a:extLst>
+          </p:cNvPr>
+          <p:cNvCxnSpPr>
+            <a:cxnSpLocks/>
+          </p:cNvCxnSpPr>
+          <p:nvPr/>
+        </p:nvCxnSpPr>
+        <p:spPr>
+          <a:xfrm>
+            <a:off x="4267201" y="2946399"/>
+            <a:ext cx="3962399" cy="0"/>
+          </a:xfrm>
+          <a:prstGeom prst="straightConnector1">
+            <a:avLst/>
+          </a:prstGeom>
+          <a:ln w="28575">
+            <a:headEnd type="triangle"/>
+            <a:tailEnd type="triangle"/>
+          </a:ln>
+        </p:spPr>
+        <p:style>
+          <a:lnRef idx="1">
+            <a:schemeClr val="accent1"/>
+          </a:lnRef>
+          <a:fillRef idx="0">
+            <a:schemeClr val="accent1"/>
+          </a:fillRef>
+          <a:effectRef idx="0">
+            <a:schemeClr val="accent1"/>
+          </a:effectRef>
+          <a:fontRef idx="minor">
+            <a:schemeClr val="tx1"/>
+          </a:fontRef>
+        </p:style>
+      </p:cxnSp>
+      <p:sp>
+        <p:nvSpPr>
+          <p:cNvPr id="14" name="TextBox 13">
+            <a:extLst>
+              <a:ext uri="{FF2B5EF4-FFF2-40B4-BE49-F238E27FC236}">
+                <a16:creationId xmlns:a16="http://schemas.microsoft.com/office/drawing/2014/main" id="{DC05E2EB-CC66-E792-FE91-C7F6FF66FEB0}"/>
+              </a:ext>
+            </a:extLst>
+          </p:cNvPr>
+          <p:cNvSpPr txBox="1"/>
+          <p:nvPr/>
+        </p:nvSpPr>
+        <p:spPr>
+          <a:xfrm>
+            <a:off x="5890898" y="2473854"/>
+            <a:ext cx="715004" cy="369332"/>
+          </a:xfrm>
+          <a:prstGeom prst="rect">
+            <a:avLst/>
+          </a:prstGeom>
+          <a:noFill/>
+        </p:spPr>
+        <p:txBody>
+          <a:bodyPr wrap="none" rtlCol="0">
+            <a:spAutoFit/>
+          </a:bodyPr>
+          <a:lstStyle/>
+          <a:p>
+            <a:r>
+              <a:rPr lang="en-US" dirty="0"/>
+              <a:t>range</a:t>
+            </a:r>
+          </a:p>
+        </p:txBody>
+      </p:sp>
+      <p:sp>
+        <p:nvSpPr>
+          <p:cNvPr id="15" name="TextBox 14">
+            <a:extLst>
+              <a:ext uri="{FF2B5EF4-FFF2-40B4-BE49-F238E27FC236}">
+                <a16:creationId xmlns:a16="http://schemas.microsoft.com/office/drawing/2014/main" id="{427B8F54-2B58-134B-0684-97B1817A1CD3}"/>
+              </a:ext>
+            </a:extLst>
+          </p:cNvPr>
+          <p:cNvSpPr txBox="1"/>
+          <p:nvPr/>
+        </p:nvSpPr>
+        <p:spPr>
+          <a:xfrm>
+            <a:off x="5570041" y="4741333"/>
+            <a:ext cx="1356718" cy="646331"/>
+          </a:xfrm>
+          <a:prstGeom prst="rect">
+            <a:avLst/>
+          </a:prstGeom>
+          <a:noFill/>
+        </p:spPr>
+        <p:txBody>
+          <a:bodyPr wrap="none" rtlCol="0">
+            <a:spAutoFit/>
+          </a:bodyPr>
+          <a:lstStyle/>
+          <a:p>
+            <a:r>
+              <a:rPr lang="en-US" dirty="0"/>
+              <a:t>Interquartile</a:t>
+            </a:r>
+          </a:p>
+          <a:p>
+            <a:pPr algn="ctr"/>
+            <a:r>
+              <a:rPr lang="en-US" dirty="0"/>
+              <a:t>range</a:t>
+            </a:r>
+          </a:p>
+        </p:txBody>
+      </p:sp>
+    </p:spTree>
+    <p:extLst>
+      <p:ext uri="{BB962C8B-B14F-4D97-AF65-F5344CB8AC3E}">
+        <p14:creationId xmlns:p14="http://schemas.microsoft.com/office/powerpoint/2010/main" val="3410868396"/>
+      </p:ext>
+    </p:extLst>
+  </p:cSld>
+  <p:clrMapOvr>
+    <a:masterClrMapping/>
+  </p:clrMapOvr>
+</p:sld>
+</file>
+
+<file path=ppt/slides/slide12.xml><?xml version="1.0" encoding="utf-8"?>
+<p:sld xmlns:a="http://schemas.openxmlformats.org/drawingml/2006/main" xmlns:r="http://schemas.openxmlformats.org/officeDocument/2006/relationships" xmlns:p="http://schemas.openxmlformats.org/presentationml/2006/main">
+  <p:cSld>
+    <p:spTree>
+      <p:nvGrpSpPr>
         <p:cNvPr id="1" name="">
           <a:extLst>
             <a:ext uri="{FF2B5EF4-FFF2-40B4-BE49-F238E27FC236}">
@@ -7864,6 +8836,14 @@
             </a:r>
           </a:p>
           <a:p>
+            <a:pPr lvl="1"/>
+            <a:r>
+              <a:rPr lang="en-GB" dirty="0"/>
+              <a:t>=STDEV.S(range)</a:t>
+            </a:r>
+            <a:endParaRPr lang="en-US" dirty="0"/>
+          </a:p>
+          <a:p>
             <a:endParaRPr lang="en-US" dirty="0"/>
           </a:p>
         </p:txBody>
@@ -7892,7 +8872,7 @@
             <a:fld id="{45C00377-489B-40EC-B059-26BDDD2E89B9}" type="slidenum">
               <a:rPr lang="en-US" smtClean="0"/>
               <a:pPr/>
-              <a:t>10</a:t>
+              <a:t>12</a:t>
             </a:fld>
             <a:endParaRPr lang="en-US" dirty="0"/>
           </a:p>
@@ -7908,10 +8888,345 @@
   <p:clrMapOvr>
     <a:masterClrMapping/>
   </p:clrMapOvr>
+  <p:timing>
+    <p:tnLst>
+      <p:par>
+        <p:cTn id="1" dur="indefinite" restart="never" nodeType="tmRoot">
+          <p:childTnLst>
+            <p:seq concurrent="1" nextAc="seek">
+              <p:cTn id="2" dur="indefinite" nodeType="mainSeq">
+                <p:childTnLst>
+                  <p:par>
+                    <p:cTn id="3" fill="hold">
+                      <p:stCondLst>
+                        <p:cond delay="indefinite"/>
+                      </p:stCondLst>
+                      <p:childTnLst>
+                        <p:par>
+                          <p:cTn id="4" fill="hold">
+                            <p:stCondLst>
+                              <p:cond delay="0"/>
+                            </p:stCondLst>
+                            <p:childTnLst>
+                              <p:par>
+                                <p:cTn id="5" presetID="1" presetClass="entr" presetSubtype="0" fill="hold" grpId="0" nodeType="clickEffect">
+                                  <p:stCondLst>
+                                    <p:cond delay="0"/>
+                                  </p:stCondLst>
+                                  <p:childTnLst>
+                                    <p:set>
+                                      <p:cBhvr>
+                                        <p:cTn id="6" dur="1" fill="hold">
+                                          <p:stCondLst>
+                                            <p:cond delay="0"/>
+                                          </p:stCondLst>
+                                        </p:cTn>
+                                        <p:tgtEl>
+                                          <p:spTgt spid="3">
+                                            <p:txEl>
+                                              <p:pRg st="0" end="0"/>
+                                            </p:txEl>
+                                          </p:spTgt>
+                                        </p:tgtEl>
+                                        <p:attrNameLst>
+                                          <p:attrName>style.visibility</p:attrName>
+                                        </p:attrNameLst>
+                                      </p:cBhvr>
+                                      <p:to>
+                                        <p:strVal val="visible"/>
+                                      </p:to>
+                                    </p:set>
+                                  </p:childTnLst>
+                                </p:cTn>
+                              </p:par>
+                              <p:par>
+                                <p:cTn id="7" presetID="1" presetClass="entr" presetSubtype="0" fill="hold" grpId="0" nodeType="withEffect">
+                                  <p:stCondLst>
+                                    <p:cond delay="0"/>
+                                  </p:stCondLst>
+                                  <p:childTnLst>
+                                    <p:set>
+                                      <p:cBhvr>
+                                        <p:cTn id="8" dur="1" fill="hold">
+                                          <p:stCondLst>
+                                            <p:cond delay="0"/>
+                                          </p:stCondLst>
+                                        </p:cTn>
+                                        <p:tgtEl>
+                                          <p:spTgt spid="3">
+                                            <p:txEl>
+                                              <p:pRg st="1" end="1"/>
+                                            </p:txEl>
+                                          </p:spTgt>
+                                        </p:tgtEl>
+                                        <p:attrNameLst>
+                                          <p:attrName>style.visibility</p:attrName>
+                                        </p:attrNameLst>
+                                      </p:cBhvr>
+                                      <p:to>
+                                        <p:strVal val="visible"/>
+                                      </p:to>
+                                    </p:set>
+                                  </p:childTnLst>
+                                </p:cTn>
+                              </p:par>
+                            </p:childTnLst>
+                          </p:cTn>
+                        </p:par>
+                      </p:childTnLst>
+                    </p:cTn>
+                  </p:par>
+                  <p:par>
+                    <p:cTn id="9" fill="hold">
+                      <p:stCondLst>
+                        <p:cond delay="indefinite"/>
+                      </p:stCondLst>
+                      <p:childTnLst>
+                        <p:par>
+                          <p:cTn id="10" fill="hold">
+                            <p:stCondLst>
+                              <p:cond delay="0"/>
+                            </p:stCondLst>
+                            <p:childTnLst>
+                              <p:par>
+                                <p:cTn id="11" presetID="1" presetClass="entr" presetSubtype="0" fill="hold" grpId="0" nodeType="clickEffect">
+                                  <p:stCondLst>
+                                    <p:cond delay="0"/>
+                                  </p:stCondLst>
+                                  <p:childTnLst>
+                                    <p:set>
+                                      <p:cBhvr>
+                                        <p:cTn id="12" dur="1" fill="hold">
+                                          <p:stCondLst>
+                                            <p:cond delay="0"/>
+                                          </p:stCondLst>
+                                        </p:cTn>
+                                        <p:tgtEl>
+                                          <p:spTgt spid="3">
+                                            <p:txEl>
+                                              <p:pRg st="3" end="3"/>
+                                            </p:txEl>
+                                          </p:spTgt>
+                                        </p:tgtEl>
+                                        <p:attrNameLst>
+                                          <p:attrName>style.visibility</p:attrName>
+                                        </p:attrNameLst>
+                                      </p:cBhvr>
+                                      <p:to>
+                                        <p:strVal val="visible"/>
+                                      </p:to>
+                                    </p:set>
+                                  </p:childTnLst>
+                                </p:cTn>
+                              </p:par>
+                              <p:par>
+                                <p:cTn id="13" presetID="1" presetClass="entr" presetSubtype="0" fill="hold" grpId="0" nodeType="withEffect">
+                                  <p:stCondLst>
+                                    <p:cond delay="0"/>
+                                  </p:stCondLst>
+                                  <p:childTnLst>
+                                    <p:set>
+                                      <p:cBhvr>
+                                        <p:cTn id="14" dur="1" fill="hold">
+                                          <p:stCondLst>
+                                            <p:cond delay="0"/>
+                                          </p:stCondLst>
+                                        </p:cTn>
+                                        <p:tgtEl>
+                                          <p:spTgt spid="3">
+                                            <p:txEl>
+                                              <p:pRg st="4" end="4"/>
+                                            </p:txEl>
+                                          </p:spTgt>
+                                        </p:tgtEl>
+                                        <p:attrNameLst>
+                                          <p:attrName>style.visibility</p:attrName>
+                                        </p:attrNameLst>
+                                      </p:cBhvr>
+                                      <p:to>
+                                        <p:strVal val="visible"/>
+                                      </p:to>
+                                    </p:set>
+                                  </p:childTnLst>
+                                </p:cTn>
+                              </p:par>
+                            </p:childTnLst>
+                          </p:cTn>
+                        </p:par>
+                      </p:childTnLst>
+                    </p:cTn>
+                  </p:par>
+                  <p:par>
+                    <p:cTn id="15" fill="hold">
+                      <p:stCondLst>
+                        <p:cond delay="indefinite"/>
+                      </p:stCondLst>
+                      <p:childTnLst>
+                        <p:par>
+                          <p:cTn id="16" fill="hold">
+                            <p:stCondLst>
+                              <p:cond delay="0"/>
+                            </p:stCondLst>
+                            <p:childTnLst>
+                              <p:par>
+                                <p:cTn id="17" presetID="1" presetClass="entr" presetSubtype="0" fill="hold" grpId="0" nodeType="clickEffect">
+                                  <p:stCondLst>
+                                    <p:cond delay="0"/>
+                                  </p:stCondLst>
+                                  <p:childTnLst>
+                                    <p:set>
+                                      <p:cBhvr>
+                                        <p:cTn id="18" dur="1" fill="hold">
+                                          <p:stCondLst>
+                                            <p:cond delay="0"/>
+                                          </p:stCondLst>
+                                        </p:cTn>
+                                        <p:tgtEl>
+                                          <p:spTgt spid="3">
+                                            <p:txEl>
+                                              <p:pRg st="6" end="6"/>
+                                            </p:txEl>
+                                          </p:spTgt>
+                                        </p:tgtEl>
+                                        <p:attrNameLst>
+                                          <p:attrName>style.visibility</p:attrName>
+                                        </p:attrNameLst>
+                                      </p:cBhvr>
+                                      <p:to>
+                                        <p:strVal val="visible"/>
+                                      </p:to>
+                                    </p:set>
+                                  </p:childTnLst>
+                                </p:cTn>
+                              </p:par>
+                              <p:par>
+                                <p:cTn id="19" presetID="1" presetClass="entr" presetSubtype="0" fill="hold" grpId="0" nodeType="withEffect">
+                                  <p:stCondLst>
+                                    <p:cond delay="0"/>
+                                  </p:stCondLst>
+                                  <p:childTnLst>
+                                    <p:set>
+                                      <p:cBhvr>
+                                        <p:cTn id="20" dur="1" fill="hold">
+                                          <p:stCondLst>
+                                            <p:cond delay="0"/>
+                                          </p:stCondLst>
+                                        </p:cTn>
+                                        <p:tgtEl>
+                                          <p:spTgt spid="3">
+                                            <p:txEl>
+                                              <p:pRg st="7" end="7"/>
+                                            </p:txEl>
+                                          </p:spTgt>
+                                        </p:tgtEl>
+                                        <p:attrNameLst>
+                                          <p:attrName>style.visibility</p:attrName>
+                                        </p:attrNameLst>
+                                      </p:cBhvr>
+                                      <p:to>
+                                        <p:strVal val="visible"/>
+                                      </p:to>
+                                    </p:set>
+                                  </p:childTnLst>
+                                </p:cTn>
+                              </p:par>
+                              <p:par>
+                                <p:cTn id="21" presetID="1" presetClass="entr" presetSubtype="0" fill="hold" grpId="0" nodeType="withEffect">
+                                  <p:stCondLst>
+                                    <p:cond delay="0"/>
+                                  </p:stCondLst>
+                                  <p:childTnLst>
+                                    <p:set>
+                                      <p:cBhvr>
+                                        <p:cTn id="22" dur="1" fill="hold">
+                                          <p:stCondLst>
+                                            <p:cond delay="0"/>
+                                          </p:stCondLst>
+                                        </p:cTn>
+                                        <p:tgtEl>
+                                          <p:spTgt spid="3">
+                                            <p:txEl>
+                                              <p:pRg st="8" end="8"/>
+                                            </p:txEl>
+                                          </p:spTgt>
+                                        </p:tgtEl>
+                                        <p:attrNameLst>
+                                          <p:attrName>style.visibility</p:attrName>
+                                        </p:attrNameLst>
+                                      </p:cBhvr>
+                                      <p:to>
+                                        <p:strVal val="visible"/>
+                                      </p:to>
+                                    </p:set>
+                                  </p:childTnLst>
+                                </p:cTn>
+                              </p:par>
+                              <p:par>
+                                <p:cTn id="23" presetID="1" presetClass="entr" presetSubtype="0" fill="hold" grpId="0" nodeType="withEffect">
+                                  <p:stCondLst>
+                                    <p:cond delay="0"/>
+                                  </p:stCondLst>
+                                  <p:childTnLst>
+                                    <p:set>
+                                      <p:cBhvr>
+                                        <p:cTn id="24" dur="1" fill="hold">
+                                          <p:stCondLst>
+                                            <p:cond delay="0"/>
+                                          </p:stCondLst>
+                                        </p:cTn>
+                                        <p:tgtEl>
+                                          <p:spTgt spid="3">
+                                            <p:txEl>
+                                              <p:pRg st="9" end="9"/>
+                                            </p:txEl>
+                                          </p:spTgt>
+                                        </p:tgtEl>
+                                        <p:attrNameLst>
+                                          <p:attrName>style.visibility</p:attrName>
+                                        </p:attrNameLst>
+                                      </p:cBhvr>
+                                      <p:to>
+                                        <p:strVal val="visible"/>
+                                      </p:to>
+                                    </p:set>
+                                  </p:childTnLst>
+                                </p:cTn>
+                              </p:par>
+                            </p:childTnLst>
+                          </p:cTn>
+                        </p:par>
+                      </p:childTnLst>
+                    </p:cTn>
+                  </p:par>
+                </p:childTnLst>
+              </p:cTn>
+              <p:prevCondLst>
+                <p:cond evt="onPrev" delay="0">
+                  <p:tgtEl>
+                    <p:sldTgt/>
+                  </p:tgtEl>
+                </p:cond>
+              </p:prevCondLst>
+              <p:nextCondLst>
+                <p:cond evt="onNext" delay="0">
+                  <p:tgtEl>
+                    <p:sldTgt/>
+                  </p:tgtEl>
+                </p:cond>
+              </p:nextCondLst>
+            </p:seq>
+          </p:childTnLst>
+        </p:cTn>
+      </p:par>
+    </p:tnLst>
+    <p:bldLst>
+      <p:bldP spid="3" grpId="0" build="p"/>
+    </p:bldLst>
+  </p:timing>
 </p:sld>
 </file>
 
-<file path=ppt/slides/slide11.xml><?xml version="1.0" encoding="utf-8"?>
+<file path=ppt/slides/slide13.xml><?xml version="1.0" encoding="utf-8"?>
 <p:sld xmlns:a="http://schemas.openxmlformats.org/drawingml/2006/main" xmlns:r="http://schemas.openxmlformats.org/officeDocument/2006/relationships" xmlns:p="http://schemas.openxmlformats.org/presentationml/2006/main">
   <p:cSld>
     <p:spTree>
@@ -7986,7 +9301,7 @@
             <a:fld id="{45C00377-489B-40EC-B059-26BDDD2E89B9}" type="slidenum">
               <a:rPr lang="en-US" smtClean="0"/>
               <a:pPr/>
-              <a:t>11</a:t>
+              <a:t>13</a:t>
             </a:fld>
             <a:endParaRPr lang="en-US" dirty="0"/>
           </a:p>
@@ -8116,7 +9431,7 @@
 </p:sld>
 </file>
 
-<file path=ppt/slides/slide12.xml><?xml version="1.0" encoding="utf-8"?>
+<file path=ppt/slides/slide14.xml><?xml version="1.0" encoding="utf-8"?>
 <p:sld xmlns:a="http://schemas.openxmlformats.org/drawingml/2006/main" xmlns:r="http://schemas.openxmlformats.org/officeDocument/2006/relationships" xmlns:p="http://schemas.openxmlformats.org/presentationml/2006/main">
   <p:cSld>
     <p:spTree>
@@ -8163,7 +9478,7 @@
             <a:fld id="{45C00377-489B-40EC-B059-26BDDD2E89B9}" type="slidenum">
               <a:rPr lang="en-US" smtClean="0"/>
               <a:pPr/>
-              <a:t>12</a:t>
+              <a:t>14</a:t>
             </a:fld>
             <a:endParaRPr lang="en-US"/>
           </a:p>
@@ -8212,7 +9527,7 @@
 </p:sld>
 </file>
 
-<file path=ppt/slides/slide13.xml><?xml version="1.0" encoding="utf-8"?>
+<file path=ppt/slides/slide15.xml><?xml version="1.0" encoding="utf-8"?>
 <p:sld xmlns:a="http://schemas.openxmlformats.org/drawingml/2006/main" xmlns:r="http://schemas.openxmlformats.org/officeDocument/2006/relationships" xmlns:p="http://schemas.openxmlformats.org/presentationml/2006/main">
   <p:cSld>
     <p:spTree>
@@ -8360,7 +9675,7 @@
 </p:sld>
 </file>
 
-<file path=ppt/slides/slide14.xml><?xml version="1.0" encoding="utf-8"?>
+<file path=ppt/slides/slide16.xml><?xml version="1.0" encoding="utf-8"?>
 <p:sld xmlns:a="http://schemas.openxmlformats.org/drawingml/2006/main" xmlns:r="http://schemas.openxmlformats.org/officeDocument/2006/relationships" xmlns:p="http://schemas.openxmlformats.org/presentationml/2006/main">
   <p:cSld>
     <p:spTree>
@@ -8505,7 +9820,7 @@
 </p:sld>
 </file>
 
-<file path=ppt/slides/slide15.xml><?xml version="1.0" encoding="utf-8"?>
+<file path=ppt/slides/slide17.xml><?xml version="1.0" encoding="utf-8"?>
 <p:sld xmlns:a="http://schemas.openxmlformats.org/drawingml/2006/main" xmlns:r="http://schemas.openxmlformats.org/officeDocument/2006/relationships" xmlns:p="http://schemas.openxmlformats.org/presentationml/2006/main">
   <p:cSld>
     <p:spTree>
@@ -8592,6 +9907,25 @@
           </a:p>
           <a:p>
             <a:pPr lvl="1"/>
+            <a:r>
+              <a:rPr lang="en-GB" dirty="0"/>
+              <a:t>Pooling athletes can create skew because athletes have different roles and opportunities. </a:t>
+            </a:r>
+          </a:p>
+          <a:p>
+            <a:pPr lvl="1"/>
+            <a:r>
+              <a:rPr lang="en-GB" dirty="0"/>
+              <a:t>Measurements within one athlete </a:t>
+            </a:r>
+            <a:r>
+              <a:rPr lang="en-GB" b="1" u="sng" dirty="0"/>
+              <a:t>may</a:t>
+            </a:r>
+            <a:r>
+              <a:rPr lang="en-GB" dirty="0"/>
+              <a:t> be more symmetric</a:t>
+            </a:r>
             <a:endParaRPr lang="en-US" dirty="0"/>
           </a:p>
           <a:p>
@@ -8614,15 +9948,15 @@
           <p:nvPr/>
         </p:nvPicPr>
         <p:blipFill>
-          <a:blip r:embed="rId2"/>
+          <a:blip r:embed="rId3"/>
           <a:stretch>
             <a:fillRect/>
           </a:stretch>
         </p:blipFill>
         <p:spPr>
           <a:xfrm>
-            <a:off x="3571008" y="2807678"/>
-            <a:ext cx="5049983" cy="3369285"/>
+            <a:off x="3707069" y="3305146"/>
+            <a:ext cx="4777861" cy="3187728"/>
           </a:xfrm>
           <a:prstGeom prst="rect">
             <a:avLst/>
@@ -8643,8 +9977,8 @@
         </p:nvSpPr>
         <p:spPr>
           <a:xfrm>
-            <a:off x="6972301" y="5014913"/>
-            <a:ext cx="1648690" cy="1162050"/>
+            <a:off x="7063410" y="5416062"/>
+            <a:ext cx="1421520" cy="1099239"/>
           </a:xfrm>
           <a:prstGeom prst="rect">
             <a:avLst/>
@@ -8694,7 +10028,7 @@
 </p:sld>
 </file>
 
-<file path=ppt/slides/slide16.xml><?xml version="1.0" encoding="utf-8"?>
+<file path=ppt/slides/slide18.xml><?xml version="1.0" encoding="utf-8"?>
 <p:sld xmlns:a="http://schemas.openxmlformats.org/drawingml/2006/main" xmlns:r="http://schemas.openxmlformats.org/officeDocument/2006/relationships" xmlns:p="http://schemas.openxmlformats.org/presentationml/2006/main">
   <p:cSld>
     <p:spTree>
@@ -8860,7 +10194,7 @@
 </p:sld>
 </file>
 
-<file path=ppt/slides/slide17.xml><?xml version="1.0" encoding="utf-8"?>
+<file path=ppt/slides/slide19.xml><?xml version="1.0" encoding="utf-8"?>
 <p:sld xmlns:a="http://schemas.openxmlformats.org/drawingml/2006/main" xmlns:r="http://schemas.openxmlformats.org/officeDocument/2006/relationships" xmlns:p="http://schemas.openxmlformats.org/presentationml/2006/main">
   <p:cSld>
     <p:spTree>
@@ -8907,7 +10241,7 @@
             <a:fld id="{45C00377-489B-40EC-B059-26BDDD2E89B9}" type="slidenum">
               <a:rPr lang="en-US" smtClean="0"/>
               <a:pPr/>
-              <a:t>17</a:t>
+              <a:t>19</a:t>
             </a:fld>
             <a:endParaRPr lang="en-US"/>
           </a:p>
@@ -8938,7 +10272,7 @@
           <a:p>
             <a:r>
               <a:rPr lang="en-US" dirty="0"/>
-              <a:t>Measuring center in non-normal data</a:t>
+              <a:t>Measuring the center in non-normal data</a:t>
             </a:r>
           </a:p>
         </p:txBody>
@@ -8956,7 +10290,970 @@
 </p:sld>
 </file>
 
-<file path=ppt/slides/slide18.xml><?xml version="1.0" encoding="utf-8"?>
+<file path=ppt/slides/slide2.xml><?xml version="1.0" encoding="utf-8"?>
+<p:sld xmlns:a="http://schemas.openxmlformats.org/drawingml/2006/main" xmlns:r="http://schemas.openxmlformats.org/officeDocument/2006/relationships" xmlns:p="http://schemas.openxmlformats.org/presentationml/2006/main">
+  <p:cSld>
+    <p:spTree>
+      <p:nvGrpSpPr>
+        <p:cNvPr id="1" name="">
+          <a:extLst>
+            <a:ext uri="{FF2B5EF4-FFF2-40B4-BE49-F238E27FC236}">
+              <a16:creationId xmlns:a16="http://schemas.microsoft.com/office/drawing/2014/main" id="{6E75E7F1-6F00-B722-B640-807806D80B43}"/>
+            </a:ext>
+          </a:extLst>
+        </p:cNvPr>
+        <p:cNvGrpSpPr/>
+        <p:nvPr/>
+      </p:nvGrpSpPr>
+      <p:grpSpPr>
+        <a:xfrm>
+          <a:off x="0" y="0"/>
+          <a:ext cx="0" cy="0"/>
+          <a:chOff x="0" y="0"/>
+          <a:chExt cx="0" cy="0"/>
+        </a:xfrm>
+      </p:grpSpPr>
+      <p:sp>
+        <p:nvSpPr>
+          <p:cNvPr id="2" name="Title 1">
+            <a:extLst>
+              <a:ext uri="{FF2B5EF4-FFF2-40B4-BE49-F238E27FC236}">
+                <a16:creationId xmlns:a16="http://schemas.microsoft.com/office/drawing/2014/main" id="{2880A8B1-AB71-1D8C-7777-70A489C5500A}"/>
+              </a:ext>
+            </a:extLst>
+          </p:cNvPr>
+          <p:cNvSpPr>
+            <a:spLocks noGrp="1"/>
+          </p:cNvSpPr>
+          <p:nvPr>
+            <p:ph type="title"/>
+          </p:nvPr>
+        </p:nvSpPr>
+        <p:spPr/>
+        <p:txBody>
+          <a:bodyPr/>
+          <a:lstStyle/>
+          <a:p>
+            <a:r>
+              <a:rPr lang="en-US" dirty="0"/>
+              <a:t>levels of granularity</a:t>
+            </a:r>
+          </a:p>
+        </p:txBody>
+      </p:sp>
+      <p:pic>
+        <p:nvPicPr>
+          <p:cNvPr id="4" name="Picture 3">
+            <a:extLst>
+              <a:ext uri="{FF2B5EF4-FFF2-40B4-BE49-F238E27FC236}">
+                <a16:creationId xmlns:a16="http://schemas.microsoft.com/office/drawing/2014/main" id="{88D06B48-FFB8-FEB6-A2DF-AD7F6DF6E251}"/>
+              </a:ext>
+            </a:extLst>
+          </p:cNvPr>
+          <p:cNvPicPr>
+            <a:picLocks noChangeAspect="1"/>
+          </p:cNvPicPr>
+          <p:nvPr/>
+        </p:nvPicPr>
+        <p:blipFill>
+          <a:blip r:embed="rId2"/>
+          <a:stretch>
+            <a:fillRect/>
+          </a:stretch>
+        </p:blipFill>
+        <p:spPr>
+          <a:xfrm>
+            <a:off x="811420" y="1271779"/>
+            <a:ext cx="4825784" cy="3599478"/>
+          </a:xfrm>
+          <a:prstGeom prst="rect">
+            <a:avLst/>
+          </a:prstGeom>
+        </p:spPr>
+      </p:pic>
+      <p:pic>
+        <p:nvPicPr>
+          <p:cNvPr id="5" name="Picture 4">
+            <a:extLst>
+              <a:ext uri="{FF2B5EF4-FFF2-40B4-BE49-F238E27FC236}">
+                <a16:creationId xmlns:a16="http://schemas.microsoft.com/office/drawing/2014/main" id="{1F1C5F7A-3CE5-BAAD-6ED4-8F34A389D153}"/>
+              </a:ext>
+            </a:extLst>
+          </p:cNvPr>
+          <p:cNvPicPr>
+            <a:picLocks noChangeAspect="1"/>
+          </p:cNvPicPr>
+          <p:nvPr/>
+        </p:nvPicPr>
+        <p:blipFill>
+          <a:blip r:embed="rId3"/>
+          <a:stretch>
+            <a:fillRect/>
+          </a:stretch>
+        </p:blipFill>
+        <p:spPr>
+          <a:xfrm>
+            <a:off x="7570262" y="4582281"/>
+            <a:ext cx="2743200" cy="1494168"/>
+          </a:xfrm>
+          <a:prstGeom prst="rect">
+            <a:avLst/>
+          </a:prstGeom>
+        </p:spPr>
+      </p:pic>
+      <p:pic>
+        <p:nvPicPr>
+          <p:cNvPr id="7" name="Picture 6">
+            <a:extLst>
+              <a:ext uri="{FF2B5EF4-FFF2-40B4-BE49-F238E27FC236}">
+                <a16:creationId xmlns:a16="http://schemas.microsoft.com/office/drawing/2014/main" id="{A00BE1A1-4E14-1D8E-B9B8-4FD4CFC3E47F}"/>
+              </a:ext>
+            </a:extLst>
+          </p:cNvPr>
+          <p:cNvPicPr>
+            <a:picLocks noChangeAspect="1"/>
+          </p:cNvPicPr>
+          <p:nvPr/>
+        </p:nvPicPr>
+        <p:blipFill>
+          <a:blip r:embed="rId4"/>
+          <a:stretch>
+            <a:fillRect/>
+          </a:stretch>
+        </p:blipFill>
+        <p:spPr>
+          <a:xfrm>
+            <a:off x="7570262" y="2945619"/>
+            <a:ext cx="2743200" cy="1472540"/>
+          </a:xfrm>
+          <a:prstGeom prst="rect">
+            <a:avLst/>
+          </a:prstGeom>
+        </p:spPr>
+      </p:pic>
+      <p:pic>
+        <p:nvPicPr>
+          <p:cNvPr id="8" name="Picture 7">
+            <a:extLst>
+              <a:ext uri="{FF2B5EF4-FFF2-40B4-BE49-F238E27FC236}">
+                <a16:creationId xmlns:a16="http://schemas.microsoft.com/office/drawing/2014/main" id="{0BD59E24-2FCC-3465-1022-843CB08B22FD}"/>
+              </a:ext>
+            </a:extLst>
+          </p:cNvPr>
+          <p:cNvPicPr>
+            <a:picLocks noChangeAspect="1"/>
+          </p:cNvPicPr>
+          <p:nvPr/>
+        </p:nvPicPr>
+        <p:blipFill>
+          <a:blip r:embed="rId5"/>
+          <a:stretch>
+            <a:fillRect/>
+          </a:stretch>
+        </p:blipFill>
+        <p:spPr>
+          <a:xfrm>
+            <a:off x="7570262" y="1277816"/>
+            <a:ext cx="2789515" cy="1494168"/>
+          </a:xfrm>
+          <a:prstGeom prst="rect">
+            <a:avLst/>
+          </a:prstGeom>
+        </p:spPr>
+      </p:pic>
+      <p:sp>
+        <p:nvSpPr>
+          <p:cNvPr id="9" name="Rectangle 8">
+            <a:extLst>
+              <a:ext uri="{FF2B5EF4-FFF2-40B4-BE49-F238E27FC236}">
+                <a16:creationId xmlns:a16="http://schemas.microsoft.com/office/drawing/2014/main" id="{798E73D1-CCDC-7990-EEAE-FD76CD5F5AA0}"/>
+              </a:ext>
+            </a:extLst>
+          </p:cNvPr>
+          <p:cNvSpPr/>
+          <p:nvPr/>
+        </p:nvSpPr>
+        <p:spPr>
+          <a:xfrm>
+            <a:off x="4452729" y="1389899"/>
+            <a:ext cx="182880" cy="3383280"/>
+          </a:xfrm>
+          <a:prstGeom prst="rect">
+            <a:avLst/>
+          </a:prstGeom>
+          <a:noFill/>
+          <a:ln w="38100">
+            <a:solidFill>
+              <a:srgbClr val="FF0000"/>
+            </a:solidFill>
+          </a:ln>
+        </p:spPr>
+        <p:style>
+          <a:lnRef idx="2">
+            <a:schemeClr val="accent1">
+              <a:shade val="15000"/>
+            </a:schemeClr>
+          </a:lnRef>
+          <a:fillRef idx="1">
+            <a:schemeClr val="accent1"/>
+          </a:fillRef>
+          <a:effectRef idx="0">
+            <a:schemeClr val="accent1"/>
+          </a:effectRef>
+          <a:fontRef idx="minor">
+            <a:schemeClr val="lt1"/>
+          </a:fontRef>
+        </p:style>
+        <p:txBody>
+          <a:bodyPr rtlCol="0" anchor="ctr"/>
+          <a:lstStyle/>
+          <a:p>
+            <a:pPr algn="ctr"/>
+            <a:endParaRPr lang="en-US"/>
+          </a:p>
+        </p:txBody>
+      </p:sp>
+      <p:sp>
+        <p:nvSpPr>
+          <p:cNvPr id="10" name="Rectangle 9">
+            <a:extLst>
+              <a:ext uri="{FF2B5EF4-FFF2-40B4-BE49-F238E27FC236}">
+                <a16:creationId xmlns:a16="http://schemas.microsoft.com/office/drawing/2014/main" id="{0C80B174-D9F4-46C7-05F5-40C40FD7418F}"/>
+              </a:ext>
+            </a:extLst>
+          </p:cNvPr>
+          <p:cNvSpPr/>
+          <p:nvPr/>
+        </p:nvSpPr>
+        <p:spPr>
+          <a:xfrm>
+            <a:off x="2318137" y="1389899"/>
+            <a:ext cx="182880" cy="3383280"/>
+          </a:xfrm>
+          <a:prstGeom prst="rect">
+            <a:avLst/>
+          </a:prstGeom>
+          <a:noFill/>
+          <a:ln w="38100">
+            <a:solidFill>
+              <a:srgbClr val="FF0000"/>
+            </a:solidFill>
+          </a:ln>
+        </p:spPr>
+        <p:style>
+          <a:lnRef idx="2">
+            <a:schemeClr val="accent1">
+              <a:shade val="15000"/>
+            </a:schemeClr>
+          </a:lnRef>
+          <a:fillRef idx="1">
+            <a:schemeClr val="accent1"/>
+          </a:fillRef>
+          <a:effectRef idx="0">
+            <a:schemeClr val="accent1"/>
+          </a:effectRef>
+          <a:fontRef idx="minor">
+            <a:schemeClr val="lt1"/>
+          </a:fontRef>
+        </p:style>
+        <p:txBody>
+          <a:bodyPr rtlCol="0" anchor="ctr"/>
+          <a:lstStyle/>
+          <a:p>
+            <a:pPr algn="ctr"/>
+            <a:endParaRPr lang="en-US"/>
+          </a:p>
+        </p:txBody>
+      </p:sp>
+      <p:sp>
+        <p:nvSpPr>
+          <p:cNvPr id="11" name="Rectangle 10">
+            <a:extLst>
+              <a:ext uri="{FF2B5EF4-FFF2-40B4-BE49-F238E27FC236}">
+                <a16:creationId xmlns:a16="http://schemas.microsoft.com/office/drawing/2014/main" id="{710B58B3-5AAE-2F19-03EB-1EC30558CC65}"/>
+              </a:ext>
+            </a:extLst>
+          </p:cNvPr>
+          <p:cNvSpPr/>
+          <p:nvPr/>
+        </p:nvSpPr>
+        <p:spPr>
+          <a:xfrm>
+            <a:off x="3256171" y="1389899"/>
+            <a:ext cx="182880" cy="3383280"/>
+          </a:xfrm>
+          <a:prstGeom prst="rect">
+            <a:avLst/>
+          </a:prstGeom>
+          <a:noFill/>
+          <a:ln w="38100">
+            <a:solidFill>
+              <a:srgbClr val="FF0000"/>
+            </a:solidFill>
+          </a:ln>
+        </p:spPr>
+        <p:style>
+          <a:lnRef idx="2">
+            <a:schemeClr val="accent1">
+              <a:shade val="15000"/>
+            </a:schemeClr>
+          </a:lnRef>
+          <a:fillRef idx="1">
+            <a:schemeClr val="accent1"/>
+          </a:fillRef>
+          <a:effectRef idx="0">
+            <a:schemeClr val="accent1"/>
+          </a:effectRef>
+          <a:fontRef idx="minor">
+            <a:schemeClr val="lt1"/>
+          </a:fontRef>
+        </p:style>
+        <p:txBody>
+          <a:bodyPr rtlCol="0" anchor="ctr"/>
+          <a:lstStyle/>
+          <a:p>
+            <a:pPr algn="ctr"/>
+            <a:endParaRPr lang="en-US"/>
+          </a:p>
+        </p:txBody>
+      </p:sp>
+      <p:sp>
+        <p:nvSpPr>
+          <p:cNvPr id="12" name="Rectangle 11">
+            <a:extLst>
+              <a:ext uri="{FF2B5EF4-FFF2-40B4-BE49-F238E27FC236}">
+                <a16:creationId xmlns:a16="http://schemas.microsoft.com/office/drawing/2014/main" id="{BCD4BF29-C42A-30D3-FAC5-42650E8A22C8}"/>
+              </a:ext>
+            </a:extLst>
+          </p:cNvPr>
+          <p:cNvSpPr/>
+          <p:nvPr/>
+        </p:nvSpPr>
+        <p:spPr>
+          <a:xfrm>
+            <a:off x="10045147" y="1972242"/>
+            <a:ext cx="301377" cy="214456"/>
+          </a:xfrm>
+          <a:prstGeom prst="rect">
+            <a:avLst/>
+          </a:prstGeom>
+          <a:noFill/>
+          <a:ln w="38100">
+            <a:solidFill>
+              <a:srgbClr val="FF0000"/>
+            </a:solidFill>
+          </a:ln>
+        </p:spPr>
+        <p:style>
+          <a:lnRef idx="2">
+            <a:schemeClr val="accent1">
+              <a:shade val="15000"/>
+            </a:schemeClr>
+          </a:lnRef>
+          <a:fillRef idx="1">
+            <a:schemeClr val="accent1"/>
+          </a:fillRef>
+          <a:effectRef idx="0">
+            <a:schemeClr val="accent1"/>
+          </a:effectRef>
+          <a:fontRef idx="minor">
+            <a:schemeClr val="lt1"/>
+          </a:fontRef>
+        </p:style>
+        <p:txBody>
+          <a:bodyPr rtlCol="0" anchor="ctr"/>
+          <a:lstStyle/>
+          <a:p>
+            <a:pPr algn="ctr"/>
+            <a:endParaRPr lang="en-US"/>
+          </a:p>
+        </p:txBody>
+      </p:sp>
+      <p:sp>
+        <p:nvSpPr>
+          <p:cNvPr id="13" name="Rectangle 12">
+            <a:extLst>
+              <a:ext uri="{FF2B5EF4-FFF2-40B4-BE49-F238E27FC236}">
+                <a16:creationId xmlns:a16="http://schemas.microsoft.com/office/drawing/2014/main" id="{6E767374-0EF2-5237-1EE2-1BF2DE75B21B}"/>
+              </a:ext>
+            </a:extLst>
+          </p:cNvPr>
+          <p:cNvSpPr/>
+          <p:nvPr/>
+        </p:nvSpPr>
+        <p:spPr>
+          <a:xfrm>
+            <a:off x="10045146" y="3854500"/>
+            <a:ext cx="295095" cy="231517"/>
+          </a:xfrm>
+          <a:prstGeom prst="rect">
+            <a:avLst/>
+          </a:prstGeom>
+          <a:noFill/>
+          <a:ln w="38100">
+            <a:solidFill>
+              <a:srgbClr val="FF0000"/>
+            </a:solidFill>
+          </a:ln>
+        </p:spPr>
+        <p:style>
+          <a:lnRef idx="2">
+            <a:schemeClr val="accent1">
+              <a:shade val="15000"/>
+            </a:schemeClr>
+          </a:lnRef>
+          <a:fillRef idx="1">
+            <a:schemeClr val="accent1"/>
+          </a:fillRef>
+          <a:effectRef idx="0">
+            <a:schemeClr val="accent1"/>
+          </a:effectRef>
+          <a:fontRef idx="minor">
+            <a:schemeClr val="lt1"/>
+          </a:fontRef>
+        </p:style>
+        <p:txBody>
+          <a:bodyPr rtlCol="0" anchor="ctr"/>
+          <a:lstStyle/>
+          <a:p>
+            <a:pPr algn="ctr"/>
+            <a:endParaRPr lang="en-US"/>
+          </a:p>
+        </p:txBody>
+      </p:sp>
+      <p:sp>
+        <p:nvSpPr>
+          <p:cNvPr id="14" name="Rectangle 13">
+            <a:extLst>
+              <a:ext uri="{FF2B5EF4-FFF2-40B4-BE49-F238E27FC236}">
+                <a16:creationId xmlns:a16="http://schemas.microsoft.com/office/drawing/2014/main" id="{DFBFCED9-E2B8-0E86-F934-F2AD3A40DE75}"/>
+              </a:ext>
+            </a:extLst>
+          </p:cNvPr>
+          <p:cNvSpPr/>
+          <p:nvPr/>
+        </p:nvSpPr>
+        <p:spPr>
+          <a:xfrm>
+            <a:off x="10045146" y="4763381"/>
+            <a:ext cx="295096" cy="231517"/>
+          </a:xfrm>
+          <a:prstGeom prst="rect">
+            <a:avLst/>
+          </a:prstGeom>
+          <a:noFill/>
+          <a:ln w="38100">
+            <a:solidFill>
+              <a:srgbClr val="FF0000"/>
+            </a:solidFill>
+          </a:ln>
+        </p:spPr>
+        <p:style>
+          <a:lnRef idx="2">
+            <a:schemeClr val="accent1">
+              <a:shade val="15000"/>
+            </a:schemeClr>
+          </a:lnRef>
+          <a:fillRef idx="1">
+            <a:schemeClr val="accent1"/>
+          </a:fillRef>
+          <a:effectRef idx="0">
+            <a:schemeClr val="accent1"/>
+          </a:effectRef>
+          <a:fontRef idx="minor">
+            <a:schemeClr val="lt1"/>
+          </a:fontRef>
+        </p:style>
+        <p:txBody>
+          <a:bodyPr rtlCol="0" anchor="ctr"/>
+          <a:lstStyle/>
+          <a:p>
+            <a:pPr algn="ctr"/>
+            <a:endParaRPr lang="en-US"/>
+          </a:p>
+        </p:txBody>
+      </p:sp>
+      <p:cxnSp>
+        <p:nvCxnSpPr>
+          <p:cNvPr id="16" name="Straight Arrow Connector 15">
+            <a:extLst>
+              <a:ext uri="{FF2B5EF4-FFF2-40B4-BE49-F238E27FC236}">
+                <a16:creationId xmlns:a16="http://schemas.microsoft.com/office/drawing/2014/main" id="{8DE91AA4-992F-23CF-F830-52BD3A79CD1E}"/>
+              </a:ext>
+            </a:extLst>
+          </p:cNvPr>
+          <p:cNvCxnSpPr>
+            <a:cxnSpLocks/>
+          </p:cNvCxnSpPr>
+          <p:nvPr/>
+        </p:nvCxnSpPr>
+        <p:spPr>
+          <a:xfrm flipV="1">
+            <a:off x="5919537" y="2186698"/>
+            <a:ext cx="1363579" cy="585286"/>
+          </a:xfrm>
+          <a:prstGeom prst="straightConnector1">
+            <a:avLst/>
+          </a:prstGeom>
+          <a:ln w="38100">
+            <a:solidFill>
+              <a:srgbClr val="FF0000"/>
+            </a:solidFill>
+            <a:tailEnd type="triangle"/>
+          </a:ln>
+        </p:spPr>
+        <p:style>
+          <a:lnRef idx="2">
+            <a:schemeClr val="accent1"/>
+          </a:lnRef>
+          <a:fillRef idx="0">
+            <a:schemeClr val="accent1"/>
+          </a:fillRef>
+          <a:effectRef idx="1">
+            <a:schemeClr val="accent1"/>
+          </a:effectRef>
+          <a:fontRef idx="minor">
+            <a:schemeClr val="tx1"/>
+          </a:fontRef>
+        </p:style>
+      </p:cxnSp>
+      <p:cxnSp>
+        <p:nvCxnSpPr>
+          <p:cNvPr id="17" name="Straight Arrow Connector 16">
+            <a:extLst>
+              <a:ext uri="{FF2B5EF4-FFF2-40B4-BE49-F238E27FC236}">
+                <a16:creationId xmlns:a16="http://schemas.microsoft.com/office/drawing/2014/main" id="{B2234BDD-8AF8-8D27-01CD-6EAE75E964B9}"/>
+              </a:ext>
+            </a:extLst>
+          </p:cNvPr>
+          <p:cNvCxnSpPr>
+            <a:cxnSpLocks/>
+          </p:cNvCxnSpPr>
+          <p:nvPr/>
+        </p:nvCxnSpPr>
+        <p:spPr>
+          <a:xfrm>
+            <a:off x="5919537" y="3074504"/>
+            <a:ext cx="1363579" cy="901148"/>
+          </a:xfrm>
+          <a:prstGeom prst="straightConnector1">
+            <a:avLst/>
+          </a:prstGeom>
+          <a:ln w="38100">
+            <a:solidFill>
+              <a:srgbClr val="FF0000"/>
+            </a:solidFill>
+            <a:tailEnd type="triangle"/>
+          </a:ln>
+        </p:spPr>
+        <p:style>
+          <a:lnRef idx="2">
+            <a:schemeClr val="accent1"/>
+          </a:lnRef>
+          <a:fillRef idx="0">
+            <a:schemeClr val="accent1"/>
+          </a:fillRef>
+          <a:effectRef idx="1">
+            <a:schemeClr val="accent1"/>
+          </a:effectRef>
+          <a:fontRef idx="minor">
+            <a:schemeClr val="tx1"/>
+          </a:fontRef>
+        </p:style>
+      </p:cxnSp>
+      <p:cxnSp>
+        <p:nvCxnSpPr>
+          <p:cNvPr id="18" name="Straight Arrow Connector 17">
+            <a:extLst>
+              <a:ext uri="{FF2B5EF4-FFF2-40B4-BE49-F238E27FC236}">
+                <a16:creationId xmlns:a16="http://schemas.microsoft.com/office/drawing/2014/main" id="{0C155799-8229-B82D-DDE9-8C53FDE7FB7D}"/>
+              </a:ext>
+            </a:extLst>
+          </p:cNvPr>
+          <p:cNvCxnSpPr>
+            <a:cxnSpLocks/>
+          </p:cNvCxnSpPr>
+          <p:nvPr/>
+        </p:nvCxnSpPr>
+        <p:spPr>
+          <a:xfrm>
+            <a:off x="5919537" y="3429000"/>
+            <a:ext cx="1501680" cy="1442257"/>
+          </a:xfrm>
+          <a:prstGeom prst="straightConnector1">
+            <a:avLst/>
+          </a:prstGeom>
+          <a:ln w="38100">
+            <a:solidFill>
+              <a:srgbClr val="FF0000"/>
+            </a:solidFill>
+            <a:tailEnd type="triangle"/>
+          </a:ln>
+        </p:spPr>
+        <p:style>
+          <a:lnRef idx="2">
+            <a:schemeClr val="accent1"/>
+          </a:lnRef>
+          <a:fillRef idx="0">
+            <a:schemeClr val="accent1"/>
+          </a:fillRef>
+          <a:effectRef idx="1">
+            <a:schemeClr val="accent1"/>
+          </a:effectRef>
+          <a:fontRef idx="minor">
+            <a:schemeClr val="tx1"/>
+          </a:fontRef>
+        </p:style>
+      </p:cxnSp>
+    </p:spTree>
+    <p:extLst>
+      <p:ext uri="{BB962C8B-B14F-4D97-AF65-F5344CB8AC3E}">
+        <p14:creationId xmlns:p14="http://schemas.microsoft.com/office/powerpoint/2010/main" val="140872475"/>
+      </p:ext>
+    </p:extLst>
+  </p:cSld>
+  <p:clrMapOvr>
+    <a:masterClrMapping/>
+  </p:clrMapOvr>
+  <p:timing>
+    <p:tnLst>
+      <p:par>
+        <p:cTn id="1" dur="indefinite" restart="never" nodeType="tmRoot">
+          <p:childTnLst>
+            <p:seq concurrent="1" nextAc="seek">
+              <p:cTn id="2" dur="indefinite" nodeType="mainSeq">
+                <p:childTnLst>
+                  <p:par>
+                    <p:cTn id="3" fill="hold">
+                      <p:stCondLst>
+                        <p:cond delay="indefinite"/>
+                      </p:stCondLst>
+                      <p:childTnLst>
+                        <p:par>
+                          <p:cTn id="4" fill="hold">
+                            <p:stCondLst>
+                              <p:cond delay="0"/>
+                            </p:stCondLst>
+                            <p:childTnLst>
+                              <p:par>
+                                <p:cTn id="5" presetID="1" presetClass="entr" presetSubtype="0" fill="hold" grpId="0" nodeType="clickEffect">
+                                  <p:stCondLst>
+                                    <p:cond delay="0"/>
+                                  </p:stCondLst>
+                                  <p:childTnLst>
+                                    <p:set>
+                                      <p:cBhvr>
+                                        <p:cTn id="6" dur="1" fill="hold">
+                                          <p:stCondLst>
+                                            <p:cond delay="0"/>
+                                          </p:stCondLst>
+                                        </p:cTn>
+                                        <p:tgtEl>
+                                          <p:spTgt spid="10"/>
+                                        </p:tgtEl>
+                                        <p:attrNameLst>
+                                          <p:attrName>style.visibility</p:attrName>
+                                        </p:attrNameLst>
+                                      </p:cBhvr>
+                                      <p:to>
+                                        <p:strVal val="visible"/>
+                                      </p:to>
+                                    </p:set>
+                                  </p:childTnLst>
+                                </p:cTn>
+                              </p:par>
+                              <p:par>
+                                <p:cTn id="7" presetID="1" presetClass="entr" presetSubtype="0" fill="hold" nodeType="withEffect">
+                                  <p:stCondLst>
+                                    <p:cond delay="0"/>
+                                  </p:stCondLst>
+                                  <p:childTnLst>
+                                    <p:set>
+                                      <p:cBhvr>
+                                        <p:cTn id="8" dur="1" fill="hold">
+                                          <p:stCondLst>
+                                            <p:cond delay="0"/>
+                                          </p:stCondLst>
+                                        </p:cTn>
+                                        <p:tgtEl>
+                                          <p:spTgt spid="16"/>
+                                        </p:tgtEl>
+                                        <p:attrNameLst>
+                                          <p:attrName>style.visibility</p:attrName>
+                                        </p:attrNameLst>
+                                      </p:cBhvr>
+                                      <p:to>
+                                        <p:strVal val="visible"/>
+                                      </p:to>
+                                    </p:set>
+                                  </p:childTnLst>
+                                </p:cTn>
+                              </p:par>
+                              <p:par>
+                                <p:cTn id="9" presetID="1" presetClass="entr" presetSubtype="0" fill="hold" grpId="0" nodeType="withEffect">
+                                  <p:stCondLst>
+                                    <p:cond delay="0"/>
+                                  </p:stCondLst>
+                                  <p:childTnLst>
+                                    <p:set>
+                                      <p:cBhvr>
+                                        <p:cTn id="10" dur="1" fill="hold">
+                                          <p:stCondLst>
+                                            <p:cond delay="0"/>
+                                          </p:stCondLst>
+                                        </p:cTn>
+                                        <p:tgtEl>
+                                          <p:spTgt spid="12"/>
+                                        </p:tgtEl>
+                                        <p:attrNameLst>
+                                          <p:attrName>style.visibility</p:attrName>
+                                        </p:attrNameLst>
+                                      </p:cBhvr>
+                                      <p:to>
+                                        <p:strVal val="visible"/>
+                                      </p:to>
+                                    </p:set>
+                                  </p:childTnLst>
+                                </p:cTn>
+                              </p:par>
+                            </p:childTnLst>
+                          </p:cTn>
+                        </p:par>
+                      </p:childTnLst>
+                    </p:cTn>
+                  </p:par>
+                  <p:par>
+                    <p:cTn id="11" fill="hold">
+                      <p:stCondLst>
+                        <p:cond delay="indefinite"/>
+                      </p:stCondLst>
+                      <p:childTnLst>
+                        <p:par>
+                          <p:cTn id="12" fill="hold">
+                            <p:stCondLst>
+                              <p:cond delay="0"/>
+                            </p:stCondLst>
+                            <p:childTnLst>
+                              <p:par>
+                                <p:cTn id="13" presetID="1" presetClass="entr" presetSubtype="0" fill="hold" grpId="0" nodeType="clickEffect">
+                                  <p:stCondLst>
+                                    <p:cond delay="0"/>
+                                  </p:stCondLst>
+                                  <p:childTnLst>
+                                    <p:set>
+                                      <p:cBhvr>
+                                        <p:cTn id="14" dur="1" fill="hold">
+                                          <p:stCondLst>
+                                            <p:cond delay="0"/>
+                                          </p:stCondLst>
+                                        </p:cTn>
+                                        <p:tgtEl>
+                                          <p:spTgt spid="11"/>
+                                        </p:tgtEl>
+                                        <p:attrNameLst>
+                                          <p:attrName>style.visibility</p:attrName>
+                                        </p:attrNameLst>
+                                      </p:cBhvr>
+                                      <p:to>
+                                        <p:strVal val="visible"/>
+                                      </p:to>
+                                    </p:set>
+                                  </p:childTnLst>
+                                </p:cTn>
+                              </p:par>
+                              <p:par>
+                                <p:cTn id="15" presetID="1" presetClass="entr" presetSubtype="0" fill="hold" nodeType="withEffect">
+                                  <p:stCondLst>
+                                    <p:cond delay="0"/>
+                                  </p:stCondLst>
+                                  <p:childTnLst>
+                                    <p:set>
+                                      <p:cBhvr>
+                                        <p:cTn id="16" dur="1" fill="hold">
+                                          <p:stCondLst>
+                                            <p:cond delay="0"/>
+                                          </p:stCondLst>
+                                        </p:cTn>
+                                        <p:tgtEl>
+                                          <p:spTgt spid="17"/>
+                                        </p:tgtEl>
+                                        <p:attrNameLst>
+                                          <p:attrName>style.visibility</p:attrName>
+                                        </p:attrNameLst>
+                                      </p:cBhvr>
+                                      <p:to>
+                                        <p:strVal val="visible"/>
+                                      </p:to>
+                                    </p:set>
+                                  </p:childTnLst>
+                                </p:cTn>
+                              </p:par>
+                              <p:par>
+                                <p:cTn id="17" presetID="1" presetClass="entr" presetSubtype="0" fill="hold" grpId="0" nodeType="withEffect">
+                                  <p:stCondLst>
+                                    <p:cond delay="0"/>
+                                  </p:stCondLst>
+                                  <p:childTnLst>
+                                    <p:set>
+                                      <p:cBhvr>
+                                        <p:cTn id="18" dur="1" fill="hold">
+                                          <p:stCondLst>
+                                            <p:cond delay="0"/>
+                                          </p:stCondLst>
+                                        </p:cTn>
+                                        <p:tgtEl>
+                                          <p:spTgt spid="13"/>
+                                        </p:tgtEl>
+                                        <p:attrNameLst>
+                                          <p:attrName>style.visibility</p:attrName>
+                                        </p:attrNameLst>
+                                      </p:cBhvr>
+                                      <p:to>
+                                        <p:strVal val="visible"/>
+                                      </p:to>
+                                    </p:set>
+                                  </p:childTnLst>
+                                </p:cTn>
+                              </p:par>
+                            </p:childTnLst>
+                          </p:cTn>
+                        </p:par>
+                      </p:childTnLst>
+                    </p:cTn>
+                  </p:par>
+                  <p:par>
+                    <p:cTn id="19" fill="hold">
+                      <p:stCondLst>
+                        <p:cond delay="indefinite"/>
+                      </p:stCondLst>
+                      <p:childTnLst>
+                        <p:par>
+                          <p:cTn id="20" fill="hold">
+                            <p:stCondLst>
+                              <p:cond delay="0"/>
+                            </p:stCondLst>
+                            <p:childTnLst>
+                              <p:par>
+                                <p:cTn id="21" presetID="1" presetClass="entr" presetSubtype="0" fill="hold" grpId="0" nodeType="clickEffect">
+                                  <p:stCondLst>
+                                    <p:cond delay="0"/>
+                                  </p:stCondLst>
+                                  <p:childTnLst>
+                                    <p:set>
+                                      <p:cBhvr>
+                                        <p:cTn id="22" dur="1" fill="hold">
+                                          <p:stCondLst>
+                                            <p:cond delay="0"/>
+                                          </p:stCondLst>
+                                        </p:cTn>
+                                        <p:tgtEl>
+                                          <p:spTgt spid="9"/>
+                                        </p:tgtEl>
+                                        <p:attrNameLst>
+                                          <p:attrName>style.visibility</p:attrName>
+                                        </p:attrNameLst>
+                                      </p:cBhvr>
+                                      <p:to>
+                                        <p:strVal val="visible"/>
+                                      </p:to>
+                                    </p:set>
+                                  </p:childTnLst>
+                                </p:cTn>
+                              </p:par>
+                              <p:par>
+                                <p:cTn id="23" presetID="1" presetClass="entr" presetSubtype="0" fill="hold" nodeType="withEffect">
+                                  <p:stCondLst>
+                                    <p:cond delay="0"/>
+                                  </p:stCondLst>
+                                  <p:childTnLst>
+                                    <p:set>
+                                      <p:cBhvr>
+                                        <p:cTn id="24" dur="1" fill="hold">
+                                          <p:stCondLst>
+                                            <p:cond delay="0"/>
+                                          </p:stCondLst>
+                                        </p:cTn>
+                                        <p:tgtEl>
+                                          <p:spTgt spid="18"/>
+                                        </p:tgtEl>
+                                        <p:attrNameLst>
+                                          <p:attrName>style.visibility</p:attrName>
+                                        </p:attrNameLst>
+                                      </p:cBhvr>
+                                      <p:to>
+                                        <p:strVal val="visible"/>
+                                      </p:to>
+                                    </p:set>
+                                  </p:childTnLst>
+                                </p:cTn>
+                              </p:par>
+                              <p:par>
+                                <p:cTn id="25" presetID="1" presetClass="entr" presetSubtype="0" fill="hold" grpId="0" nodeType="withEffect">
+                                  <p:stCondLst>
+                                    <p:cond delay="0"/>
+                                  </p:stCondLst>
+                                  <p:childTnLst>
+                                    <p:set>
+                                      <p:cBhvr>
+                                        <p:cTn id="26" dur="1" fill="hold">
+                                          <p:stCondLst>
+                                            <p:cond delay="0"/>
+                                          </p:stCondLst>
+                                        </p:cTn>
+                                        <p:tgtEl>
+                                          <p:spTgt spid="14"/>
+                                        </p:tgtEl>
+                                        <p:attrNameLst>
+                                          <p:attrName>style.visibility</p:attrName>
+                                        </p:attrNameLst>
+                                      </p:cBhvr>
+                                      <p:to>
+                                        <p:strVal val="visible"/>
+                                      </p:to>
+                                    </p:set>
+                                  </p:childTnLst>
+                                </p:cTn>
+                              </p:par>
+                            </p:childTnLst>
+                          </p:cTn>
+                        </p:par>
+                      </p:childTnLst>
+                    </p:cTn>
+                  </p:par>
+                </p:childTnLst>
+              </p:cTn>
+              <p:prevCondLst>
+                <p:cond evt="onPrev" delay="0">
+                  <p:tgtEl>
+                    <p:sldTgt/>
+                  </p:tgtEl>
+                </p:cond>
+              </p:prevCondLst>
+              <p:nextCondLst>
+                <p:cond evt="onNext" delay="0">
+                  <p:tgtEl>
+                    <p:sldTgt/>
+                  </p:tgtEl>
+                </p:cond>
+              </p:nextCondLst>
+            </p:seq>
+          </p:childTnLst>
+        </p:cTn>
+      </p:par>
+    </p:tnLst>
+    <p:bldLst>
+      <p:bldP spid="9" grpId="0" animBg="1"/>
+      <p:bldP spid="10" grpId="0" animBg="1"/>
+      <p:bldP spid="11" grpId="0" animBg="1"/>
+      <p:bldP spid="12" grpId="0" animBg="1"/>
+      <p:bldP spid="13" grpId="0" animBg="1"/>
+      <p:bldP spid="14" grpId="0" animBg="1"/>
+    </p:bldLst>
+  </p:timing>
+</p:sld>
+</file>
+
+<file path=ppt/slides/slide20.xml><?xml version="1.0" encoding="utf-8"?>
 <p:sld xmlns:a="http://schemas.openxmlformats.org/drawingml/2006/main" xmlns:r="http://schemas.openxmlformats.org/officeDocument/2006/relationships" xmlns:p="http://schemas.openxmlformats.org/presentationml/2006/main">
   <p:cSld>
     <p:spTree>
@@ -9025,7 +11322,7 @@
             <a:fld id="{45C00377-489B-40EC-B059-26BDDD2E89B9}" type="slidenum">
               <a:rPr lang="en-US" smtClean="0"/>
               <a:pPr/>
-              <a:t>18</a:t>
+              <a:t>20</a:t>
             </a:fld>
             <a:endParaRPr lang="en-US"/>
           </a:p>
@@ -9093,7 +11390,7 @@
 </p:sld>
 </file>
 
-<file path=ppt/slides/slide19.xml><?xml version="1.0" encoding="utf-8"?>
+<file path=ppt/slides/slide21.xml><?xml version="1.0" encoding="utf-8"?>
 <p:sld xmlns:a="http://schemas.openxmlformats.org/drawingml/2006/main" xmlns:r="http://schemas.openxmlformats.org/officeDocument/2006/relationships" xmlns:p="http://schemas.openxmlformats.org/presentationml/2006/main">
   <p:cSld>
     <p:spTree>
@@ -9168,7 +11465,7 @@
             <a:fld id="{45C00377-489B-40EC-B059-26BDDD2E89B9}" type="slidenum">
               <a:rPr lang="en-US" smtClean="0"/>
               <a:pPr/>
-              <a:t>19</a:t>
+              <a:t>21</a:t>
             </a:fld>
             <a:endParaRPr lang="en-US"/>
           </a:p>
@@ -9312,120 +11609,7 @@
 </p:sld>
 </file>
 
-<file path=ppt/slides/slide2.xml><?xml version="1.0" encoding="utf-8"?>
-<p:sld xmlns:a="http://schemas.openxmlformats.org/drawingml/2006/main" xmlns:r="http://schemas.openxmlformats.org/officeDocument/2006/relationships" xmlns:p="http://schemas.openxmlformats.org/presentationml/2006/main">
-  <p:cSld>
-    <p:spTree>
-      <p:nvGrpSpPr>
-        <p:cNvPr id="1" name=""/>
-        <p:cNvGrpSpPr/>
-        <p:nvPr/>
-      </p:nvGrpSpPr>
-      <p:grpSpPr>
-        <a:xfrm>
-          <a:off x="0" y="0"/>
-          <a:ext cx="0" cy="0"/>
-          <a:chOff x="0" y="0"/>
-          <a:chExt cx="0" cy="0"/>
-        </a:xfrm>
-      </p:grpSpPr>
-      <p:sp>
-        <p:nvSpPr>
-          <p:cNvPr id="2" name="Slide Number Placeholder 1">
-            <a:extLst>
-              <a:ext uri="{FF2B5EF4-FFF2-40B4-BE49-F238E27FC236}">
-                <a16:creationId xmlns:a16="http://schemas.microsoft.com/office/drawing/2014/main" id="{4F00E21B-1982-E0CA-1F9E-8355997AAE51}"/>
-              </a:ext>
-            </a:extLst>
-          </p:cNvPr>
-          <p:cNvSpPr>
-            <a:spLocks noGrp="1"/>
-          </p:cNvSpPr>
-          <p:nvPr>
-            <p:ph type="sldNum" sz="quarter" idx="11"/>
-          </p:nvPr>
-        </p:nvSpPr>
-        <p:spPr/>
-        <p:txBody>
-          <a:bodyPr/>
-          <a:lstStyle/>
-          <a:p>
-            <a:fld id="{45C00377-489B-40EC-B059-26BDDD2E89B9}" type="slidenum">
-              <a:rPr lang="en-US" smtClean="0"/>
-              <a:pPr/>
-              <a:t>2</a:t>
-            </a:fld>
-            <a:endParaRPr lang="en-US"/>
-          </a:p>
-        </p:txBody>
-      </p:sp>
-      <p:sp>
-        <p:nvSpPr>
-          <p:cNvPr id="3" name="Title 1">
-            <a:extLst>
-              <a:ext uri="{FF2B5EF4-FFF2-40B4-BE49-F238E27FC236}">
-                <a16:creationId xmlns:a16="http://schemas.microsoft.com/office/drawing/2014/main" id="{B2604BDD-1EB2-C9AE-AD81-128821271322}"/>
-              </a:ext>
-            </a:extLst>
-          </p:cNvPr>
-          <p:cNvSpPr txBox="1">
-            <a:spLocks/>
-          </p:cNvSpPr>
-          <p:nvPr/>
-        </p:nvSpPr>
-        <p:spPr>
-          <a:xfrm>
-            <a:off x="838200" y="3110401"/>
-            <a:ext cx="10515600" cy="637198"/>
-          </a:xfrm>
-          <a:prstGeom prst="rect">
-            <a:avLst/>
-          </a:prstGeom>
-        </p:spPr>
-        <p:txBody>
-          <a:bodyPr/>
-          <a:lstStyle>
-            <a:lvl1pPr algn="l" defTabSz="914400" rtl="0" eaLnBrk="1" latinLnBrk="0" hangingPunct="1">
-              <a:lnSpc>
-                <a:spcPct val="90000"/>
-              </a:lnSpc>
-              <a:spcBef>
-                <a:spcPct val="0"/>
-              </a:spcBef>
-              <a:buNone/>
-              <a:defRPr sz="3600" b="1" kern="1200" cap="all" baseline="0">
-                <a:solidFill>
-                  <a:schemeClr val="tx1"/>
-                </a:solidFill>
-                <a:latin typeface="+mn-lt"/>
-                <a:ea typeface="+mj-ea"/>
-                <a:cs typeface="+mj-cs"/>
-              </a:defRPr>
-            </a:lvl1pPr>
-          </a:lstStyle>
-          <a:p>
-            <a:pPr algn="ctr"/>
-            <a:r>
-              <a:rPr lang="en-US" b="0" dirty="0"/>
-              <a:t>What is “typical”?</a:t>
-            </a:r>
-          </a:p>
-        </p:txBody>
-      </p:sp>
-    </p:spTree>
-    <p:extLst>
-      <p:ext uri="{BB962C8B-B14F-4D97-AF65-F5344CB8AC3E}">
-        <p14:creationId xmlns:p14="http://schemas.microsoft.com/office/powerpoint/2010/main" val="944151257"/>
-      </p:ext>
-    </p:extLst>
-  </p:cSld>
-  <p:clrMapOvr>
-    <a:masterClrMapping/>
-  </p:clrMapOvr>
-</p:sld>
-</file>
-
-<file path=ppt/slides/slide20.xml><?xml version="1.0" encoding="utf-8"?>
+<file path=ppt/slides/slide22.xml><?xml version="1.0" encoding="utf-8"?>
 <p:sld xmlns:a="http://schemas.openxmlformats.org/drawingml/2006/main" xmlns:r="http://schemas.openxmlformats.org/officeDocument/2006/relationships" xmlns:p="http://schemas.openxmlformats.org/presentationml/2006/main">
   <p:cSld>
     <p:spTree>
@@ -9502,7 +11686,7 @@
             <a:fld id="{45C00377-489B-40EC-B059-26BDDD2E89B9}" type="slidenum">
               <a:rPr lang="en-US" smtClean="0"/>
               <a:pPr/>
-              <a:t>20</a:t>
+              <a:t>22</a:t>
             </a:fld>
             <a:endParaRPr lang="en-US"/>
           </a:p>
@@ -9557,6 +11741,45 @@
           </a:extLst>
         </p:spPr>
       </p:pic>
+      <p:sp>
+        <p:nvSpPr>
+          <p:cNvPr id="10" name="TextBox 9">
+            <a:extLst>
+              <a:ext uri="{FF2B5EF4-FFF2-40B4-BE49-F238E27FC236}">
+                <a16:creationId xmlns:a16="http://schemas.microsoft.com/office/drawing/2014/main" id="{016F27C4-5B87-D900-73E0-C9E1F2F39871}"/>
+              </a:ext>
+            </a:extLst>
+          </p:cNvPr>
+          <p:cNvSpPr txBox="1"/>
+          <p:nvPr/>
+        </p:nvSpPr>
+        <p:spPr>
+          <a:xfrm>
+            <a:off x="2237411" y="5572251"/>
+            <a:ext cx="7717177" cy="369332"/>
+          </a:xfrm>
+          <a:prstGeom prst="rect">
+            <a:avLst/>
+          </a:prstGeom>
+          <a:noFill/>
+        </p:spPr>
+        <p:txBody>
+          <a:bodyPr wrap="none" rtlCol="0">
+            <a:spAutoFit/>
+          </a:bodyPr>
+          <a:lstStyle/>
+          <a:p>
+            <a:r>
+              <a:rPr lang="en-US" dirty="0">
+                <a:solidFill>
+                  <a:srgbClr val="FF0000"/>
+                </a:solidFill>
+              </a:rPr>
+              <a:t>Would you / should you change the averaging method based on distribution?</a:t>
+            </a:r>
+          </a:p>
+        </p:txBody>
+      </p:sp>
     </p:spTree>
     <p:extLst>
       <p:ext uri="{BB962C8B-B14F-4D97-AF65-F5344CB8AC3E}">
@@ -9570,7 +11793,7 @@
 </p:sld>
 </file>
 
-<file path=ppt/slides/slide21.xml><?xml version="1.0" encoding="utf-8"?>
+<file path=ppt/slides/slide23.xml><?xml version="1.0" encoding="utf-8"?>
 <p:sld xmlns:a="http://schemas.openxmlformats.org/drawingml/2006/main" xmlns:r="http://schemas.openxmlformats.org/officeDocument/2006/relationships" xmlns:p="http://schemas.openxmlformats.org/presentationml/2006/main">
   <p:cSld>
     <p:spTree>
@@ -9617,7 +11840,7 @@
             <a:fld id="{45C00377-489B-40EC-B059-26BDDD2E89B9}" type="slidenum">
               <a:rPr lang="en-US" smtClean="0"/>
               <a:pPr/>
-              <a:t>21</a:t>
+              <a:t>23</a:t>
             </a:fld>
             <a:endParaRPr lang="en-US"/>
           </a:p>
@@ -9666,7 +11889,7 @@
 </p:sld>
 </file>
 
-<file path=ppt/slides/slide22.xml><?xml version="1.0" encoding="utf-8"?>
+<file path=ppt/slides/slide24.xml><?xml version="1.0" encoding="utf-8"?>
 <p:sld xmlns:a="http://schemas.openxmlformats.org/drawingml/2006/main" xmlns:r="http://schemas.openxmlformats.org/officeDocument/2006/relationships" xmlns:p="http://schemas.openxmlformats.org/presentationml/2006/main">
   <p:cSld>
     <p:spTree>
@@ -9759,18 +11982,15 @@
             <a:pPr lvl="1"/>
             <a:r>
               <a:rPr lang="en-US" dirty="0"/>
-              <a:t>Lumping center-backs and wingers together in soccer makes total high-speed distance look "average." </a:t>
+              <a:t>Grouping all positions may make total high-speed distance look "average." </a:t>
             </a:r>
           </a:p>
           <a:p>
             <a:pPr lvl="1"/>
             <a:r>
               <a:rPr lang="en-US" dirty="0"/>
-              <a:t>Segmenting by position reveals that wingers log massive high-speed workloads, while central defenders rely more on mechanical impacts and aerial duels.</a:t>
-            </a:r>
-          </a:p>
-          <a:p>
-            <a:endParaRPr lang="en-US" dirty="0"/>
+              <a:t>Segmenting by position may reveal that certain groups log massive high-speed workloads.</a:t>
+            </a:r>
           </a:p>
         </p:txBody>
       </p:sp>
@@ -9784,10 +12004,252 @@
   <p:clrMapOvr>
     <a:masterClrMapping/>
   </p:clrMapOvr>
+  <p:timing>
+    <p:tnLst>
+      <p:par>
+        <p:cTn id="1" dur="indefinite" restart="never" nodeType="tmRoot">
+          <p:childTnLst>
+            <p:seq concurrent="1" nextAc="seek">
+              <p:cTn id="2" dur="indefinite" nodeType="mainSeq">
+                <p:childTnLst>
+                  <p:par>
+                    <p:cTn id="3" fill="hold">
+                      <p:stCondLst>
+                        <p:cond delay="indefinite"/>
+                      </p:stCondLst>
+                      <p:childTnLst>
+                        <p:par>
+                          <p:cTn id="4" fill="hold">
+                            <p:stCondLst>
+                              <p:cond delay="0"/>
+                            </p:stCondLst>
+                            <p:childTnLst>
+                              <p:par>
+                                <p:cTn id="5" presetID="1" presetClass="entr" presetSubtype="0" fill="hold" grpId="0" nodeType="clickEffect">
+                                  <p:stCondLst>
+                                    <p:cond delay="0"/>
+                                  </p:stCondLst>
+                                  <p:childTnLst>
+                                    <p:set>
+                                      <p:cBhvr>
+                                        <p:cTn id="6" dur="1" fill="hold">
+                                          <p:stCondLst>
+                                            <p:cond delay="0"/>
+                                          </p:stCondLst>
+                                        </p:cTn>
+                                        <p:tgtEl>
+                                          <p:spTgt spid="3">
+                                            <p:txEl>
+                                              <p:pRg st="0" end="0"/>
+                                            </p:txEl>
+                                          </p:spTgt>
+                                        </p:tgtEl>
+                                        <p:attrNameLst>
+                                          <p:attrName>style.visibility</p:attrName>
+                                        </p:attrNameLst>
+                                      </p:cBhvr>
+                                      <p:to>
+                                        <p:strVal val="visible"/>
+                                      </p:to>
+                                    </p:set>
+                                  </p:childTnLst>
+                                </p:cTn>
+                              </p:par>
+                            </p:childTnLst>
+                          </p:cTn>
+                        </p:par>
+                      </p:childTnLst>
+                    </p:cTn>
+                  </p:par>
+                  <p:par>
+                    <p:cTn id="7" fill="hold">
+                      <p:stCondLst>
+                        <p:cond delay="indefinite"/>
+                      </p:stCondLst>
+                      <p:childTnLst>
+                        <p:par>
+                          <p:cTn id="8" fill="hold">
+                            <p:stCondLst>
+                              <p:cond delay="0"/>
+                            </p:stCondLst>
+                            <p:childTnLst>
+                              <p:par>
+                                <p:cTn id="9" presetID="1" presetClass="entr" presetSubtype="0" fill="hold" grpId="0" nodeType="clickEffect">
+                                  <p:stCondLst>
+                                    <p:cond delay="0"/>
+                                  </p:stCondLst>
+                                  <p:childTnLst>
+                                    <p:set>
+                                      <p:cBhvr>
+                                        <p:cTn id="10" dur="1" fill="hold">
+                                          <p:stCondLst>
+                                            <p:cond delay="0"/>
+                                          </p:stCondLst>
+                                        </p:cTn>
+                                        <p:tgtEl>
+                                          <p:spTgt spid="3">
+                                            <p:txEl>
+                                              <p:pRg st="1" end="1"/>
+                                            </p:txEl>
+                                          </p:spTgt>
+                                        </p:tgtEl>
+                                        <p:attrNameLst>
+                                          <p:attrName>style.visibility</p:attrName>
+                                        </p:attrNameLst>
+                                      </p:cBhvr>
+                                      <p:to>
+                                        <p:strVal val="visible"/>
+                                      </p:to>
+                                    </p:set>
+                                  </p:childTnLst>
+                                </p:cTn>
+                              </p:par>
+                            </p:childTnLst>
+                          </p:cTn>
+                        </p:par>
+                      </p:childTnLst>
+                    </p:cTn>
+                  </p:par>
+                  <p:par>
+                    <p:cTn id="11" fill="hold">
+                      <p:stCondLst>
+                        <p:cond delay="indefinite"/>
+                      </p:stCondLst>
+                      <p:childTnLst>
+                        <p:par>
+                          <p:cTn id="12" fill="hold">
+                            <p:stCondLst>
+                              <p:cond delay="0"/>
+                            </p:stCondLst>
+                            <p:childTnLst>
+                              <p:par>
+                                <p:cTn id="13" presetID="1" presetClass="entr" presetSubtype="0" fill="hold" grpId="0" nodeType="clickEffect">
+                                  <p:stCondLst>
+                                    <p:cond delay="0"/>
+                                  </p:stCondLst>
+                                  <p:childTnLst>
+                                    <p:set>
+                                      <p:cBhvr>
+                                        <p:cTn id="14" dur="1" fill="hold">
+                                          <p:stCondLst>
+                                            <p:cond delay="0"/>
+                                          </p:stCondLst>
+                                        </p:cTn>
+                                        <p:tgtEl>
+                                          <p:spTgt spid="3">
+                                            <p:txEl>
+                                              <p:pRg st="3" end="3"/>
+                                            </p:txEl>
+                                          </p:spTgt>
+                                        </p:tgtEl>
+                                        <p:attrNameLst>
+                                          <p:attrName>style.visibility</p:attrName>
+                                        </p:attrNameLst>
+                                      </p:cBhvr>
+                                      <p:to>
+                                        <p:strVal val="visible"/>
+                                      </p:to>
+                                    </p:set>
+                                  </p:childTnLst>
+                                </p:cTn>
+                              </p:par>
+                              <p:par>
+                                <p:cTn id="15" presetID="1" presetClass="entr" presetSubtype="0" fill="hold" grpId="0" nodeType="withEffect">
+                                  <p:stCondLst>
+                                    <p:cond delay="0"/>
+                                  </p:stCondLst>
+                                  <p:childTnLst>
+                                    <p:set>
+                                      <p:cBhvr>
+                                        <p:cTn id="16" dur="1" fill="hold">
+                                          <p:stCondLst>
+                                            <p:cond delay="0"/>
+                                          </p:stCondLst>
+                                        </p:cTn>
+                                        <p:tgtEl>
+                                          <p:spTgt spid="3">
+                                            <p:txEl>
+                                              <p:pRg st="4" end="4"/>
+                                            </p:txEl>
+                                          </p:spTgt>
+                                        </p:tgtEl>
+                                        <p:attrNameLst>
+                                          <p:attrName>style.visibility</p:attrName>
+                                        </p:attrNameLst>
+                                      </p:cBhvr>
+                                      <p:to>
+                                        <p:strVal val="visible"/>
+                                      </p:to>
+                                    </p:set>
+                                  </p:childTnLst>
+                                </p:cTn>
+                              </p:par>
+                              <p:par>
+                                <p:cTn id="17" presetID="1" presetClass="entr" presetSubtype="0" fill="hold" grpId="0" nodeType="withEffect">
+                                  <p:stCondLst>
+                                    <p:cond delay="0"/>
+                                  </p:stCondLst>
+                                  <p:childTnLst>
+                                    <p:set>
+                                      <p:cBhvr>
+                                        <p:cTn id="18" dur="1" fill="hold">
+                                          <p:stCondLst>
+                                            <p:cond delay="0"/>
+                                          </p:stCondLst>
+                                        </p:cTn>
+                                        <p:tgtEl>
+                                          <p:spTgt spid="3">
+                                            <p:txEl>
+                                              <p:pRg st="5" end="5"/>
+                                            </p:txEl>
+                                          </p:spTgt>
+                                        </p:tgtEl>
+                                        <p:attrNameLst>
+                                          <p:attrName>style.visibility</p:attrName>
+                                        </p:attrNameLst>
+                                      </p:cBhvr>
+                                      <p:to>
+                                        <p:strVal val="visible"/>
+                                      </p:to>
+                                    </p:set>
+                                  </p:childTnLst>
+                                </p:cTn>
+                              </p:par>
+                            </p:childTnLst>
+                          </p:cTn>
+                        </p:par>
+                      </p:childTnLst>
+                    </p:cTn>
+                  </p:par>
+                </p:childTnLst>
+              </p:cTn>
+              <p:prevCondLst>
+                <p:cond evt="onPrev" delay="0">
+                  <p:tgtEl>
+                    <p:sldTgt/>
+                  </p:tgtEl>
+                </p:cond>
+              </p:prevCondLst>
+              <p:nextCondLst>
+                <p:cond evt="onNext" delay="0">
+                  <p:tgtEl>
+                    <p:sldTgt/>
+                  </p:tgtEl>
+                </p:cond>
+              </p:nextCondLst>
+            </p:seq>
+          </p:childTnLst>
+        </p:cTn>
+      </p:par>
+    </p:tnLst>
+    <p:bldLst>
+      <p:bldP spid="3" grpId="0" build="p"/>
+    </p:bldLst>
+  </p:timing>
 </p:sld>
 </file>
 
-<file path=ppt/slides/slide23.xml><?xml version="1.0" encoding="utf-8"?>
+<file path=ppt/slides/slide25.xml><?xml version="1.0" encoding="utf-8"?>
 <p:sld xmlns:a="http://schemas.openxmlformats.org/drawingml/2006/main" xmlns:r="http://schemas.openxmlformats.org/officeDocument/2006/relationships" xmlns:p="http://schemas.openxmlformats.org/presentationml/2006/main">
   <p:cSld>
     <p:spTree>
@@ -9829,7 +12291,7 @@
           <a:p>
             <a:r>
               <a:rPr lang="en-US" dirty="0"/>
-              <a:t>Simpson’s paradox</a:t>
+              <a:t>Grouping can change the conclusion</a:t>
             </a:r>
           </a:p>
         </p:txBody>
@@ -9889,7 +12351,7 @@
             <a:fld id="{45C00377-489B-40EC-B059-26BDDD2E89B9}" type="slidenum">
               <a:rPr lang="en-US" smtClean="0"/>
               <a:pPr/>
-              <a:t>23</a:t>
+              <a:t>25</a:t>
             </a:fld>
             <a:endParaRPr lang="en-US"/>
           </a:p>
@@ -10599,10 +13061,85 @@
   <p:clrMapOvr>
     <a:masterClrMapping/>
   </p:clrMapOvr>
+  <p:timing>
+    <p:tnLst>
+      <p:par>
+        <p:cTn id="1" dur="indefinite" restart="never" nodeType="tmRoot">
+          <p:childTnLst>
+            <p:seq concurrent="1" nextAc="seek">
+              <p:cTn id="2" dur="indefinite" nodeType="mainSeq">
+                <p:childTnLst>
+                  <p:par>
+                    <p:cTn id="3" fill="hold">
+                      <p:stCondLst>
+                        <p:cond delay="indefinite"/>
+                      </p:stCondLst>
+                      <p:childTnLst>
+                        <p:par>
+                          <p:cTn id="4" fill="hold">
+                            <p:stCondLst>
+                              <p:cond delay="0"/>
+                            </p:stCondLst>
+                            <p:childTnLst>
+                              <p:par>
+                                <p:cTn id="5" presetID="1" presetClass="entr" presetSubtype="0" fill="hold" nodeType="clickEffect">
+                                  <p:stCondLst>
+                                    <p:cond delay="0"/>
+                                  </p:stCondLst>
+                                  <p:childTnLst>
+                                    <p:set>
+                                      <p:cBhvr>
+                                        <p:cTn id="6" dur="1" fill="hold">
+                                          <p:stCondLst>
+                                            <p:cond delay="0"/>
+                                          </p:stCondLst>
+                                        </p:cTn>
+                                        <p:tgtEl>
+                                          <p:spTgt spid="9"/>
+                                        </p:tgtEl>
+                                        <p:attrNameLst>
+                                          <p:attrName>style.visibility</p:attrName>
+                                        </p:attrNameLst>
+                                      </p:cBhvr>
+                                      <p:to>
+                                        <p:strVal val="visible"/>
+                                      </p:to>
+                                    </p:set>
+                                  </p:childTnLst>
+                                </p:cTn>
+                              </p:par>
+                            </p:childTnLst>
+                          </p:cTn>
+                        </p:par>
+                      </p:childTnLst>
+                    </p:cTn>
+                  </p:par>
+                </p:childTnLst>
+              </p:cTn>
+              <p:prevCondLst>
+                <p:cond evt="onPrev" delay="0">
+                  <p:tgtEl>
+                    <p:sldTgt/>
+                  </p:tgtEl>
+                </p:cond>
+              </p:prevCondLst>
+              <p:nextCondLst>
+                <p:cond evt="onNext" delay="0">
+                  <p:tgtEl>
+                    <p:sldTgt/>
+                  </p:tgtEl>
+                </p:cond>
+              </p:nextCondLst>
+            </p:seq>
+          </p:childTnLst>
+        </p:cTn>
+      </p:par>
+    </p:tnLst>
+  </p:timing>
 </p:sld>
 </file>
 
-<file path=ppt/slides/slide24.xml><?xml version="1.0" encoding="utf-8"?>
+<file path=ppt/slides/slide26.xml><?xml version="1.0" encoding="utf-8"?>
 <p:sld xmlns:a="http://schemas.openxmlformats.org/drawingml/2006/main" xmlns:r="http://schemas.openxmlformats.org/officeDocument/2006/relationships" xmlns:p="http://schemas.openxmlformats.org/presentationml/2006/main">
   <p:cSld>
     <p:spTree>
@@ -10650,7 +13187,7 @@
           <a:p>
             <a:r>
               <a:rPr lang="en-US" dirty="0"/>
-              <a:t>Simpson’s paradox</a:t>
+              <a:t>Different grouping can flip the conclusion</a:t>
             </a:r>
           </a:p>
         </p:txBody>
@@ -10722,7 +13259,7 @@
             <a:fld id="{45C00377-489B-40EC-B059-26BDDD2E89B9}" type="slidenum">
               <a:rPr lang="en-US" smtClean="0"/>
               <a:pPr/>
-              <a:t>24</a:t>
+              <a:t>26</a:t>
             </a:fld>
             <a:endParaRPr lang="en-US"/>
           </a:p>
@@ -10743,7 +13280,7 @@
         <p:spPr>
           <a:xfrm>
             <a:off x="5148272" y="5897325"/>
-            <a:ext cx="1895455" cy="369332"/>
+            <a:ext cx="1993046" cy="369332"/>
           </a:xfrm>
           <a:prstGeom prst="rect">
             <a:avLst/>
@@ -10757,7 +13294,11 @@
           <a:lstStyle/>
           <a:p>
             <a:r>
-              <a:rPr lang="en-US" dirty="0"/>
+              <a:rPr lang="en-US" dirty="0">
+                <a:solidFill>
+                  <a:srgbClr val="FF0000"/>
+                </a:solidFill>
+              </a:rPr>
               <a:t>How can this be??</a:t>
             </a:r>
           </a:p>
@@ -11361,10 +13902,290 @@
   <p:clrMapOvr>
     <a:masterClrMapping/>
   </p:clrMapOvr>
+  <p:timing>
+    <p:tnLst>
+      <p:par>
+        <p:cTn id="1" dur="indefinite" restart="never" nodeType="tmRoot">
+          <p:childTnLst>
+            <p:seq concurrent="1" nextAc="seek">
+              <p:cTn id="2" dur="indefinite" nodeType="mainSeq">
+                <p:childTnLst>
+                  <p:par>
+                    <p:cTn id="3" fill="hold">
+                      <p:stCondLst>
+                        <p:cond delay="indefinite"/>
+                      </p:stCondLst>
+                      <p:childTnLst>
+                        <p:par>
+                          <p:cTn id="4" fill="hold">
+                            <p:stCondLst>
+                              <p:cond delay="0"/>
+                            </p:stCondLst>
+                            <p:childTnLst>
+                              <p:par>
+                                <p:cTn id="5" presetID="1" presetClass="entr" presetSubtype="0" fill="hold" grpId="0" nodeType="clickEffect">
+                                  <p:stCondLst>
+                                    <p:cond delay="0"/>
+                                  </p:stCondLst>
+                                  <p:childTnLst>
+                                    <p:set>
+                                      <p:cBhvr>
+                                        <p:cTn id="6" dur="1" fill="hold">
+                                          <p:stCondLst>
+                                            <p:cond delay="0"/>
+                                          </p:stCondLst>
+                                        </p:cTn>
+                                        <p:tgtEl>
+                                          <p:spTgt spid="19"/>
+                                        </p:tgtEl>
+                                        <p:attrNameLst>
+                                          <p:attrName>style.visibility</p:attrName>
+                                        </p:attrNameLst>
+                                      </p:cBhvr>
+                                      <p:to>
+                                        <p:strVal val="visible"/>
+                                      </p:to>
+                                    </p:set>
+                                  </p:childTnLst>
+                                </p:cTn>
+                              </p:par>
+                              <p:par>
+                                <p:cTn id="7" presetID="1" presetClass="entr" presetSubtype="0" fill="hold" nodeType="withEffect">
+                                  <p:stCondLst>
+                                    <p:cond delay="0"/>
+                                  </p:stCondLst>
+                                  <p:childTnLst>
+                                    <p:set>
+                                      <p:cBhvr>
+                                        <p:cTn id="8" dur="1" fill="hold">
+                                          <p:stCondLst>
+                                            <p:cond delay="0"/>
+                                          </p:stCondLst>
+                                        </p:cTn>
+                                        <p:tgtEl>
+                                          <p:spTgt spid="13"/>
+                                        </p:tgtEl>
+                                        <p:attrNameLst>
+                                          <p:attrName>style.visibility</p:attrName>
+                                        </p:attrNameLst>
+                                      </p:cBhvr>
+                                      <p:to>
+                                        <p:strVal val="visible"/>
+                                      </p:to>
+                                    </p:set>
+                                  </p:childTnLst>
+                                </p:cTn>
+                              </p:par>
+                              <p:par>
+                                <p:cTn id="9" presetID="1" presetClass="entr" presetSubtype="0" fill="hold" grpId="0" nodeType="withEffect">
+                                  <p:stCondLst>
+                                    <p:cond delay="0"/>
+                                  </p:stCondLst>
+                                  <p:childTnLst>
+                                    <p:set>
+                                      <p:cBhvr>
+                                        <p:cTn id="10" dur="1" fill="hold">
+                                          <p:stCondLst>
+                                            <p:cond delay="0"/>
+                                          </p:stCondLst>
+                                        </p:cTn>
+                                        <p:tgtEl>
+                                          <p:spTgt spid="9"/>
+                                        </p:tgtEl>
+                                        <p:attrNameLst>
+                                          <p:attrName>style.visibility</p:attrName>
+                                        </p:attrNameLst>
+                                      </p:cBhvr>
+                                      <p:to>
+                                        <p:strVal val="visible"/>
+                                      </p:to>
+                                    </p:set>
+                                  </p:childTnLst>
+                                </p:cTn>
+                              </p:par>
+                            </p:childTnLst>
+                          </p:cTn>
+                        </p:par>
+                      </p:childTnLst>
+                    </p:cTn>
+                  </p:par>
+                  <p:par>
+                    <p:cTn id="11" fill="hold">
+                      <p:stCondLst>
+                        <p:cond delay="indefinite"/>
+                      </p:stCondLst>
+                      <p:childTnLst>
+                        <p:par>
+                          <p:cTn id="12" fill="hold">
+                            <p:stCondLst>
+                              <p:cond delay="0"/>
+                            </p:stCondLst>
+                            <p:childTnLst>
+                              <p:par>
+                                <p:cTn id="13" presetID="1" presetClass="entr" presetSubtype="0" fill="hold" grpId="0" nodeType="clickEffect">
+                                  <p:stCondLst>
+                                    <p:cond delay="0"/>
+                                  </p:stCondLst>
+                                  <p:childTnLst>
+                                    <p:set>
+                                      <p:cBhvr>
+                                        <p:cTn id="14" dur="1" fill="hold">
+                                          <p:stCondLst>
+                                            <p:cond delay="0"/>
+                                          </p:stCondLst>
+                                        </p:cTn>
+                                        <p:tgtEl>
+                                          <p:spTgt spid="11"/>
+                                        </p:tgtEl>
+                                        <p:attrNameLst>
+                                          <p:attrName>style.visibility</p:attrName>
+                                        </p:attrNameLst>
+                                      </p:cBhvr>
+                                      <p:to>
+                                        <p:strVal val="visible"/>
+                                      </p:to>
+                                    </p:set>
+                                  </p:childTnLst>
+                                </p:cTn>
+                              </p:par>
+                              <p:par>
+                                <p:cTn id="15" presetID="1" presetClass="entr" presetSubtype="0" fill="hold" nodeType="withEffect">
+                                  <p:stCondLst>
+                                    <p:cond delay="0"/>
+                                  </p:stCondLst>
+                                  <p:childTnLst>
+                                    <p:set>
+                                      <p:cBhvr>
+                                        <p:cTn id="16" dur="1" fill="hold">
+                                          <p:stCondLst>
+                                            <p:cond delay="0"/>
+                                          </p:stCondLst>
+                                        </p:cTn>
+                                        <p:tgtEl>
+                                          <p:spTgt spid="14"/>
+                                        </p:tgtEl>
+                                        <p:attrNameLst>
+                                          <p:attrName>style.visibility</p:attrName>
+                                        </p:attrNameLst>
+                                      </p:cBhvr>
+                                      <p:to>
+                                        <p:strVal val="visible"/>
+                                      </p:to>
+                                    </p:set>
+                                  </p:childTnLst>
+                                </p:cTn>
+                              </p:par>
+                              <p:par>
+                                <p:cTn id="17" presetID="1" presetClass="entr" presetSubtype="0" fill="hold" grpId="0" nodeType="withEffect">
+                                  <p:stCondLst>
+                                    <p:cond delay="0"/>
+                                  </p:stCondLst>
+                                  <p:childTnLst>
+                                    <p:set>
+                                      <p:cBhvr>
+                                        <p:cTn id="18" dur="1" fill="hold">
+                                          <p:stCondLst>
+                                            <p:cond delay="0"/>
+                                          </p:stCondLst>
+                                        </p:cTn>
+                                        <p:tgtEl>
+                                          <p:spTgt spid="21"/>
+                                        </p:tgtEl>
+                                        <p:attrNameLst>
+                                          <p:attrName>style.visibility</p:attrName>
+                                        </p:attrNameLst>
+                                      </p:cBhvr>
+                                      <p:to>
+                                        <p:strVal val="visible"/>
+                                      </p:to>
+                                    </p:set>
+                                  </p:childTnLst>
+                                </p:cTn>
+                              </p:par>
+                            </p:childTnLst>
+                          </p:cTn>
+                        </p:par>
+                      </p:childTnLst>
+                    </p:cTn>
+                  </p:par>
+                  <p:par>
+                    <p:cTn id="19" fill="hold">
+                      <p:stCondLst>
+                        <p:cond delay="indefinite"/>
+                      </p:stCondLst>
+                      <p:childTnLst>
+                        <p:par>
+                          <p:cTn id="20" fill="hold">
+                            <p:stCondLst>
+                              <p:cond delay="0"/>
+                            </p:stCondLst>
+                            <p:childTnLst>
+                              <p:par>
+                                <p:cTn id="21" presetID="1" presetClass="entr" presetSubtype="0" fill="hold" grpId="0" nodeType="clickEffect">
+                                  <p:stCondLst>
+                                    <p:cond delay="0"/>
+                                  </p:stCondLst>
+                                  <p:childTnLst>
+                                    <p:set>
+                                      <p:cBhvr>
+                                        <p:cTn id="22" dur="1" fill="hold">
+                                          <p:stCondLst>
+                                            <p:cond delay="0"/>
+                                          </p:stCondLst>
+                                        </p:cTn>
+                                        <p:tgtEl>
+                                          <p:spTgt spid="5"/>
+                                        </p:tgtEl>
+                                        <p:attrNameLst>
+                                          <p:attrName>style.visibility</p:attrName>
+                                        </p:attrNameLst>
+                                      </p:cBhvr>
+                                      <p:to>
+                                        <p:strVal val="visible"/>
+                                      </p:to>
+                                    </p:set>
+                                  </p:childTnLst>
+                                </p:cTn>
+                              </p:par>
+                            </p:childTnLst>
+                          </p:cTn>
+                        </p:par>
+                      </p:childTnLst>
+                    </p:cTn>
+                  </p:par>
+                </p:childTnLst>
+              </p:cTn>
+              <p:prevCondLst>
+                <p:cond evt="onPrev" delay="0">
+                  <p:tgtEl>
+                    <p:sldTgt/>
+                  </p:tgtEl>
+                </p:cond>
+              </p:prevCondLst>
+              <p:nextCondLst>
+                <p:cond evt="onNext" delay="0">
+                  <p:tgtEl>
+                    <p:sldTgt/>
+                  </p:tgtEl>
+                </p:cond>
+              </p:nextCondLst>
+            </p:seq>
+          </p:childTnLst>
+        </p:cTn>
+      </p:par>
+    </p:tnLst>
+    <p:bldLst>
+      <p:bldP spid="5" grpId="0"/>
+      <p:bldP spid="9" grpId="0" animBg="1"/>
+      <p:bldP spid="11" grpId="0" animBg="1"/>
+      <p:bldP spid="19" grpId="0"/>
+      <p:bldP spid="21" grpId="0"/>
+    </p:bldLst>
+  </p:timing>
 </p:sld>
 </file>
 
-<file path=ppt/slides/slide25.xml><?xml version="1.0" encoding="utf-8"?>
+<file path=ppt/slides/slide27.xml><?xml version="1.0" encoding="utf-8"?>
 <p:sld xmlns:a="http://schemas.openxmlformats.org/drawingml/2006/main" xmlns:r="http://schemas.openxmlformats.org/officeDocument/2006/relationships" xmlns:p="http://schemas.openxmlformats.org/presentationml/2006/main">
   <p:cSld>
     <p:spTree>
@@ -11442,9 +14263,10 @@
               <a:buNone/>
             </a:pPr>
             <a:r>
-              <a:rPr lang="en-US" dirty="0"/>
-              <a:t>Who is the better shooter?</a:t>
-            </a:r>
+              <a:rPr lang="en-GB" dirty="0"/>
+              <a:t>A pattern that appears within each group may reverse when the groups are combined, because the groups contribute different amounts to the overall result.</a:t>
+            </a:r>
+            <a:endParaRPr lang="en-US" dirty="0"/>
           </a:p>
         </p:txBody>
       </p:sp>
@@ -11472,7 +14294,7 @@
             <a:fld id="{45C00377-489B-40EC-B059-26BDDD2E89B9}" type="slidenum">
               <a:rPr lang="en-US" smtClean="0"/>
               <a:pPr/>
-              <a:t>25</a:t>
+              <a:t>27</a:t>
             </a:fld>
             <a:endParaRPr lang="en-US" dirty="0"/>
           </a:p>
@@ -11500,7 +14322,7 @@
         </p:blipFill>
         <p:spPr>
           <a:xfrm>
-            <a:off x="3433391" y="2653426"/>
+            <a:off x="6303013" y="3130504"/>
             <a:ext cx="5325218" cy="2762636"/>
           </a:xfrm>
           <a:prstGeom prst="rect">
@@ -11508,6 +14330,334 @@
           </a:prstGeom>
         </p:spPr>
       </p:pic>
+      <p:graphicFrame>
+        <p:nvGraphicFramePr>
+          <p:cNvPr id="6" name="Table 5">
+            <a:extLst>
+              <a:ext uri="{FF2B5EF4-FFF2-40B4-BE49-F238E27FC236}">
+                <a16:creationId xmlns:a16="http://schemas.microsoft.com/office/drawing/2014/main" id="{C84069BE-F43F-F298-3E95-1BE9DC6F9A58}"/>
+              </a:ext>
+            </a:extLst>
+          </p:cNvPr>
+          <p:cNvGraphicFramePr>
+            <a:graphicFrameLocks noGrp="1"/>
+          </p:cNvGraphicFramePr>
+          <p:nvPr>
+            <p:extLst>
+              <p:ext uri="{D42A27DB-BD31-4B8C-83A1-F6EECF244321}">
+                <p14:modId xmlns:p14="http://schemas.microsoft.com/office/powerpoint/2010/main" val="1084519197"/>
+              </p:ext>
+            </p:extLst>
+          </p:nvPr>
+        </p:nvGraphicFramePr>
+        <p:xfrm>
+          <a:off x="149744" y="3955562"/>
+          <a:ext cx="5739244" cy="1112520"/>
+        </p:xfrm>
+        <a:graphic>
+          <a:graphicData uri="http://schemas.openxmlformats.org/drawingml/2006/table">
+            <a:tbl>
+              <a:tblPr firstRow="1" bandRow="1">
+                <a:tableStyleId>{5C22544A-7EE6-4342-B048-85BDC9FD1C3A}</a:tableStyleId>
+              </a:tblPr>
+              <a:tblGrid>
+                <a:gridCol w="1434811">
+                  <a:extLst>
+                    <a:ext uri="{9D8B030D-6E8A-4147-A177-3AD203B41FA5}">
+                      <a16:colId xmlns:a16="http://schemas.microsoft.com/office/drawing/2014/main" val="3243521770"/>
+                    </a:ext>
+                  </a:extLst>
+                </a:gridCol>
+                <a:gridCol w="1434811">
+                  <a:extLst>
+                    <a:ext uri="{9D8B030D-6E8A-4147-A177-3AD203B41FA5}">
+                      <a16:colId xmlns:a16="http://schemas.microsoft.com/office/drawing/2014/main" val="3381938047"/>
+                    </a:ext>
+                  </a:extLst>
+                </a:gridCol>
+                <a:gridCol w="1434811">
+                  <a:extLst>
+                    <a:ext uri="{9D8B030D-6E8A-4147-A177-3AD203B41FA5}">
+                      <a16:colId xmlns:a16="http://schemas.microsoft.com/office/drawing/2014/main" val="175830463"/>
+                    </a:ext>
+                  </a:extLst>
+                </a:gridCol>
+                <a:gridCol w="1434811">
+                  <a:extLst>
+                    <a:ext uri="{9D8B030D-6E8A-4147-A177-3AD203B41FA5}">
+                      <a16:colId xmlns:a16="http://schemas.microsoft.com/office/drawing/2014/main" val="658846749"/>
+                    </a:ext>
+                  </a:extLst>
+                </a:gridCol>
+              </a:tblGrid>
+              <a:tr h="370840">
+                <a:tc>
+                  <a:txBody>
+                    <a:bodyPr/>
+                    <a:lstStyle/>
+                    <a:p>
+                      <a:endParaRPr lang="en-US" dirty="0"/>
+                    </a:p>
+                  </a:txBody>
+                  <a:tcPr/>
+                </a:tc>
+                <a:tc>
+                  <a:txBody>
+                    <a:bodyPr/>
+                    <a:lstStyle/>
+                    <a:p>
+                      <a:pPr algn="ctr" rtl="0" fontAlgn="b">
+                        <a:buNone/>
+                      </a:pPr>
+                      <a:r>
+                        <a:rPr lang="en-US" sz="1800" b="1" kern="1200" dirty="0">
+                          <a:solidFill>
+                            <a:schemeClr val="lt1"/>
+                          </a:solidFill>
+                          <a:latin typeface="+mn-lt"/>
+                          <a:ea typeface="+mn-ea"/>
+                          <a:cs typeface="+mn-cs"/>
+                        </a:rPr>
+                        <a:t>2pt%</a:t>
+                      </a:r>
+                    </a:p>
+                  </a:txBody>
+                  <a:tcPr marL="28575" marR="28575" marT="19050" marB="19050" anchor="b"/>
+                </a:tc>
+                <a:tc>
+                  <a:txBody>
+                    <a:bodyPr/>
+                    <a:lstStyle/>
+                    <a:p>
+                      <a:pPr algn="ctr" rtl="0" fontAlgn="b">
+                        <a:buNone/>
+                      </a:pPr>
+                      <a:r>
+                        <a:rPr lang="en-US" sz="1800" b="1" kern="1200" dirty="0">
+                          <a:solidFill>
+                            <a:schemeClr val="lt1"/>
+                          </a:solidFill>
+                          <a:latin typeface="+mn-lt"/>
+                          <a:ea typeface="+mn-ea"/>
+                          <a:cs typeface="+mn-cs"/>
+                        </a:rPr>
+                        <a:t>3pt%</a:t>
+                      </a:r>
+                    </a:p>
+                  </a:txBody>
+                  <a:tcPr marL="28575" marR="28575" marT="19050" marB="19050" anchor="b"/>
+                </a:tc>
+                <a:tc>
+                  <a:txBody>
+                    <a:bodyPr/>
+                    <a:lstStyle/>
+                    <a:p>
+                      <a:pPr algn="ctr" rtl="0" fontAlgn="b">
+                        <a:buNone/>
+                      </a:pPr>
+                      <a:r>
+                        <a:rPr lang="en-US" sz="1800" b="1" kern="1200" dirty="0">
+                          <a:solidFill>
+                            <a:schemeClr val="lt1"/>
+                          </a:solidFill>
+                          <a:latin typeface="+mn-lt"/>
+                          <a:ea typeface="+mn-ea"/>
+                          <a:cs typeface="+mn-cs"/>
+                        </a:rPr>
+                        <a:t>FG%</a:t>
+                      </a:r>
+                    </a:p>
+                  </a:txBody>
+                  <a:tcPr marL="28575" marR="28575" marT="19050" marB="19050" anchor="b"/>
+                </a:tc>
+                <a:extLst>
+                  <a:ext uri="{0D108BD9-81ED-4DB2-BD59-A6C34878D82A}">
+                    <a16:rowId xmlns:a16="http://schemas.microsoft.com/office/drawing/2014/main" val="1350765908"/>
+                  </a:ext>
+                </a:extLst>
+              </a:tr>
+              <a:tr h="370840">
+                <a:tc>
+                  <a:txBody>
+                    <a:bodyPr/>
+                    <a:lstStyle/>
+                    <a:p>
+                      <a:r>
+                        <a:rPr lang="en-US" dirty="0"/>
+                        <a:t>Player A</a:t>
+                      </a:r>
+                    </a:p>
+                  </a:txBody>
+                  <a:tcPr/>
+                </a:tc>
+                <a:tc>
+                  <a:txBody>
+                    <a:bodyPr/>
+                    <a:lstStyle/>
+                    <a:p>
+                      <a:pPr marL="0" algn="ctr" defTabSz="914400" rtl="0" eaLnBrk="1" fontAlgn="b" latinLnBrk="0" hangingPunct="1">
+                        <a:buNone/>
+                      </a:pPr>
+                      <a:r>
+                        <a:rPr lang="en-US" sz="1800" kern="1200" dirty="0">
+                          <a:solidFill>
+                            <a:schemeClr val="dk1"/>
+                          </a:solidFill>
+                          <a:latin typeface="+mn-lt"/>
+                          <a:ea typeface="+mn-ea"/>
+                          <a:cs typeface="+mn-cs"/>
+                        </a:rPr>
+                        <a:t>75%</a:t>
+                      </a:r>
+                    </a:p>
+                  </a:txBody>
+                  <a:tcPr marL="28575" marR="28575" marT="19050" marB="19050" anchor="b"/>
+                </a:tc>
+                <a:tc>
+                  <a:txBody>
+                    <a:bodyPr/>
+                    <a:lstStyle/>
+                    <a:p>
+                      <a:pPr marL="0" algn="ctr" defTabSz="914400" rtl="0" eaLnBrk="1" fontAlgn="b" latinLnBrk="0" hangingPunct="1">
+                        <a:buNone/>
+                      </a:pPr>
+                      <a:r>
+                        <a:rPr lang="en-US" sz="1800" kern="1200" dirty="0">
+                          <a:solidFill>
+                            <a:schemeClr val="dk1"/>
+                          </a:solidFill>
+                          <a:latin typeface="+mn-lt"/>
+                          <a:ea typeface="+mn-ea"/>
+                          <a:cs typeface="+mn-cs"/>
+                        </a:rPr>
+                        <a:t>25%</a:t>
+                      </a:r>
+                    </a:p>
+                  </a:txBody>
+                  <a:tcPr marL="28575" marR="28575" marT="19050" marB="19050" anchor="b"/>
+                </a:tc>
+                <a:tc>
+                  <a:txBody>
+                    <a:bodyPr/>
+                    <a:lstStyle/>
+                    <a:p>
+                      <a:pPr marL="0" algn="ctr" defTabSz="914400" rtl="0" eaLnBrk="1" fontAlgn="b" latinLnBrk="0" hangingPunct="1">
+                        <a:buNone/>
+                      </a:pPr>
+                      <a:r>
+                        <a:rPr lang="en-US" sz="1800" kern="1200" dirty="0">
+                          <a:solidFill>
+                            <a:schemeClr val="dk1"/>
+                          </a:solidFill>
+                          <a:latin typeface="+mn-lt"/>
+                          <a:ea typeface="+mn-ea"/>
+                          <a:cs typeface="+mn-cs"/>
+                        </a:rPr>
+                        <a:t>65%</a:t>
+                      </a:r>
+                    </a:p>
+                  </a:txBody>
+                  <a:tcPr marL="28575" marR="28575" marT="19050" marB="19050" anchor="b"/>
+                </a:tc>
+                <a:extLst>
+                  <a:ext uri="{0D108BD9-81ED-4DB2-BD59-A6C34878D82A}">
+                    <a16:rowId xmlns:a16="http://schemas.microsoft.com/office/drawing/2014/main" val="1094331597"/>
+                  </a:ext>
+                </a:extLst>
+              </a:tr>
+              <a:tr h="370840">
+                <a:tc>
+                  <a:txBody>
+                    <a:bodyPr/>
+                    <a:lstStyle/>
+                    <a:p>
+                      <a:r>
+                        <a:rPr lang="en-US" dirty="0"/>
+                        <a:t>Player B</a:t>
+                      </a:r>
+                    </a:p>
+                  </a:txBody>
+                  <a:tcPr/>
+                </a:tc>
+                <a:tc>
+                  <a:txBody>
+                    <a:bodyPr/>
+                    <a:lstStyle/>
+                    <a:p>
+                      <a:pPr marL="0" algn="ctr" defTabSz="914400" rtl="0" eaLnBrk="1" fontAlgn="b" latinLnBrk="0" hangingPunct="1">
+                        <a:buNone/>
+                      </a:pPr>
+                      <a:r>
+                        <a:rPr lang="en-US" sz="1800" kern="1200">
+                          <a:solidFill>
+                            <a:schemeClr val="dk1"/>
+                          </a:solidFill>
+                          <a:latin typeface="+mn-lt"/>
+                          <a:ea typeface="+mn-ea"/>
+                          <a:cs typeface="+mn-cs"/>
+                        </a:rPr>
+                        <a:t>100%</a:t>
+                      </a:r>
+                    </a:p>
+                  </a:txBody>
+                  <a:tcPr marL="28575" marR="28575" marT="19050" marB="19050" anchor="b"/>
+                </a:tc>
+                <a:tc>
+                  <a:txBody>
+                    <a:bodyPr/>
+                    <a:lstStyle/>
+                    <a:p>
+                      <a:pPr marL="0" algn="ctr" defTabSz="914400" rtl="0" eaLnBrk="1" fontAlgn="b" latinLnBrk="0" hangingPunct="1">
+                        <a:buNone/>
+                      </a:pPr>
+                      <a:r>
+                        <a:rPr lang="en-US" sz="1800" kern="1200" dirty="0">
+                          <a:solidFill>
+                            <a:schemeClr val="dk1"/>
+                          </a:solidFill>
+                          <a:latin typeface="+mn-lt"/>
+                          <a:ea typeface="+mn-ea"/>
+                          <a:cs typeface="+mn-cs"/>
+                        </a:rPr>
+                        <a:t>50%</a:t>
+                      </a:r>
+                    </a:p>
+                  </a:txBody>
+                  <a:tcPr marL="28575" marR="28575" marT="19050" marB="19050" anchor="b"/>
+                </a:tc>
+                <a:tc>
+                  <a:txBody>
+                    <a:bodyPr/>
+                    <a:lstStyle/>
+                    <a:p>
+                      <a:pPr marL="0" algn="ctr" defTabSz="914400" rtl="0" eaLnBrk="1" fontAlgn="b" latinLnBrk="0" hangingPunct="1">
+                        <a:buNone/>
+                      </a:pPr>
+                      <a:r>
+                        <a:rPr lang="en-US" sz="1800" kern="1200" dirty="0">
+                          <a:solidFill>
+                            <a:schemeClr val="dk1"/>
+                          </a:solidFill>
+                          <a:latin typeface="+mn-lt"/>
+                          <a:ea typeface="+mn-ea"/>
+                          <a:cs typeface="+mn-cs"/>
+                        </a:rPr>
+                        <a:t>60%</a:t>
+                      </a:r>
+                    </a:p>
+                  </a:txBody>
+                  <a:tcPr marL="28575" marR="28575" marT="19050" marB="19050" anchor="b"/>
+                </a:tc>
+                <a:extLst>
+                  <a:ext uri="{0D108BD9-81ED-4DB2-BD59-A6C34878D82A}">
+                    <a16:rowId xmlns:a16="http://schemas.microsoft.com/office/drawing/2014/main" val="512187133"/>
+                  </a:ext>
+                </a:extLst>
+              </a:tr>
+            </a:tbl>
+          </a:graphicData>
+        </a:graphic>
+      </p:graphicFrame>
     </p:spTree>
     <p:extLst>
       <p:ext uri="{BB962C8B-B14F-4D97-AF65-F5344CB8AC3E}">
@@ -11521,7 +14671,7 @@
 </p:sld>
 </file>
 
-<file path=ppt/slides/slide26.xml><?xml version="1.0" encoding="utf-8"?>
+<file path=ppt/slides/slide28.xml><?xml version="1.0" encoding="utf-8"?>
 <p:sld xmlns:a="http://schemas.openxmlformats.org/drawingml/2006/main" xmlns:r="http://schemas.openxmlformats.org/officeDocument/2006/relationships" xmlns:p="http://schemas.openxmlformats.org/presentationml/2006/main">
   <p:cSld>
     <p:spTree>
@@ -11589,28 +14739,67 @@
           <a:p>
             <a:r>
               <a:rPr lang="en-US" dirty="0"/>
-              <a:t>Beyond Summary Tables: </a:t>
-            </a:r>
-          </a:p>
-          <a:p>
-            <a:pPr lvl="1"/>
-            <a:r>
-              <a:rPr lang="en-US" dirty="0"/>
-              <a:t>Numbers like means and standard deviations tell part of the story, but visual shapes reveal the full picture.</a:t>
-            </a:r>
-          </a:p>
-          <a:p>
-            <a:pPr lvl="1"/>
-            <a:r>
-              <a:rPr lang="en-US" dirty="0"/>
-              <a:t>Bar graphs, scatter plots and line graphs can show averages and averages over time </a:t>
-            </a:r>
-          </a:p>
-          <a:p>
-            <a:pPr lvl="1"/>
-            <a:r>
-              <a:rPr lang="en-US" dirty="0"/>
-              <a:t>Histograms, density plots, and boxplots are useful for spotting positional differences and skewness.</a:t>
+              <a:t>Numbers tell part of the story, but visual shapes reveal the </a:t>
+            </a:r>
+            <a:r>
+              <a:rPr lang="en-US" b="1" dirty="0"/>
+              <a:t>full picture</a:t>
+            </a:r>
+            <a:r>
+              <a:rPr lang="en-US" dirty="0"/>
+              <a:t>.</a:t>
+            </a:r>
+          </a:p>
+          <a:p>
+            <a:r>
+              <a:rPr lang="en-US" b="1" dirty="0"/>
+              <a:t>Bar graphs</a:t>
+            </a:r>
+            <a:r>
+              <a:rPr lang="en-US" dirty="0"/>
+              <a:t>, </a:t>
+            </a:r>
+            <a:r>
+              <a:rPr lang="en-US" b="1" dirty="0"/>
+              <a:t>scatter plots </a:t>
+            </a:r>
+            <a:r>
+              <a:rPr lang="en-US" dirty="0"/>
+              <a:t>and </a:t>
+            </a:r>
+            <a:r>
+              <a:rPr lang="en-US" b="1" dirty="0"/>
+              <a:t>line graphs </a:t>
+            </a:r>
+            <a:r>
+              <a:rPr lang="en-US" dirty="0"/>
+              <a:t>can show averages and averages over time </a:t>
+            </a:r>
+          </a:p>
+          <a:p>
+            <a:r>
+              <a:rPr lang="en-US" b="1" dirty="0"/>
+              <a:t>Histograms</a:t>
+            </a:r>
+            <a:r>
+              <a:rPr lang="en-US" dirty="0"/>
+              <a:t>, </a:t>
+            </a:r>
+            <a:r>
+              <a:rPr lang="en-US" b="1" dirty="0"/>
+              <a:t>density plots</a:t>
+            </a:r>
+            <a:r>
+              <a:rPr lang="en-US" dirty="0"/>
+              <a:t>, and </a:t>
+            </a:r>
+            <a:r>
+              <a:rPr lang="en-US" b="1" dirty="0"/>
+              <a:t>boxplots </a:t>
+            </a:r>
+            <a:r>
+              <a:rPr lang="en-US" dirty="0"/>
+              <a:t>are useful for spotting positional differences and skewness.</a:t>
             </a:r>
           </a:p>
           <a:p>
@@ -11636,10 +14825,190 @@
   <p:clrMapOvr>
     <a:masterClrMapping/>
   </p:clrMapOvr>
+  <p:timing>
+    <p:tnLst>
+      <p:par>
+        <p:cTn id="1" dur="indefinite" restart="never" nodeType="tmRoot">
+          <p:childTnLst>
+            <p:seq concurrent="1" nextAc="seek">
+              <p:cTn id="2" dur="indefinite" nodeType="mainSeq">
+                <p:childTnLst>
+                  <p:par>
+                    <p:cTn id="3" fill="hold">
+                      <p:stCondLst>
+                        <p:cond delay="indefinite"/>
+                      </p:stCondLst>
+                      <p:childTnLst>
+                        <p:par>
+                          <p:cTn id="4" fill="hold">
+                            <p:stCondLst>
+                              <p:cond delay="0"/>
+                            </p:stCondLst>
+                            <p:childTnLst>
+                              <p:par>
+                                <p:cTn id="5" presetID="1" presetClass="entr" presetSubtype="0" fill="hold" grpId="0" nodeType="clickEffect">
+                                  <p:stCondLst>
+                                    <p:cond delay="0"/>
+                                  </p:stCondLst>
+                                  <p:childTnLst>
+                                    <p:set>
+                                      <p:cBhvr>
+                                        <p:cTn id="6" dur="1" fill="hold">
+                                          <p:stCondLst>
+                                            <p:cond delay="0"/>
+                                          </p:stCondLst>
+                                        </p:cTn>
+                                        <p:tgtEl>
+                                          <p:spTgt spid="3">
+                                            <p:txEl>
+                                              <p:pRg st="0" end="0"/>
+                                            </p:txEl>
+                                          </p:spTgt>
+                                        </p:tgtEl>
+                                        <p:attrNameLst>
+                                          <p:attrName>style.visibility</p:attrName>
+                                        </p:attrNameLst>
+                                      </p:cBhvr>
+                                      <p:to>
+                                        <p:strVal val="visible"/>
+                                      </p:to>
+                                    </p:set>
+                                  </p:childTnLst>
+                                </p:cTn>
+                              </p:par>
+                            </p:childTnLst>
+                          </p:cTn>
+                        </p:par>
+                      </p:childTnLst>
+                    </p:cTn>
+                  </p:par>
+                  <p:par>
+                    <p:cTn id="7" fill="hold">
+                      <p:stCondLst>
+                        <p:cond delay="indefinite"/>
+                      </p:stCondLst>
+                      <p:childTnLst>
+                        <p:par>
+                          <p:cTn id="8" fill="hold">
+                            <p:stCondLst>
+                              <p:cond delay="0"/>
+                            </p:stCondLst>
+                            <p:childTnLst>
+                              <p:par>
+                                <p:cTn id="9" presetID="1" presetClass="entr" presetSubtype="0" fill="hold" grpId="0" nodeType="clickEffect">
+                                  <p:stCondLst>
+                                    <p:cond delay="0"/>
+                                  </p:stCondLst>
+                                  <p:childTnLst>
+                                    <p:set>
+                                      <p:cBhvr>
+                                        <p:cTn id="10" dur="1" fill="hold">
+                                          <p:stCondLst>
+                                            <p:cond delay="0"/>
+                                          </p:stCondLst>
+                                        </p:cTn>
+                                        <p:tgtEl>
+                                          <p:spTgt spid="3">
+                                            <p:txEl>
+                                              <p:pRg st="1" end="1"/>
+                                            </p:txEl>
+                                          </p:spTgt>
+                                        </p:tgtEl>
+                                        <p:attrNameLst>
+                                          <p:attrName>style.visibility</p:attrName>
+                                        </p:attrNameLst>
+                                      </p:cBhvr>
+                                      <p:to>
+                                        <p:strVal val="visible"/>
+                                      </p:to>
+                                    </p:set>
+                                  </p:childTnLst>
+                                </p:cTn>
+                              </p:par>
+                            </p:childTnLst>
+                          </p:cTn>
+                        </p:par>
+                      </p:childTnLst>
+                    </p:cTn>
+                  </p:par>
+                  <p:par>
+                    <p:cTn id="11" fill="hold">
+                      <p:stCondLst>
+                        <p:cond delay="indefinite"/>
+                      </p:stCondLst>
+                      <p:childTnLst>
+                        <p:par>
+                          <p:cTn id="12" fill="hold">
+                            <p:stCondLst>
+                              <p:cond delay="0"/>
+                            </p:stCondLst>
+                            <p:childTnLst>
+                              <p:par>
+                                <p:cTn id="13" presetID="1" presetClass="entr" presetSubtype="0" fill="hold" grpId="0" nodeType="clickEffect">
+                                  <p:stCondLst>
+                                    <p:cond delay="0"/>
+                                  </p:stCondLst>
+                                  <p:childTnLst>
+                                    <p:set>
+                                      <p:cBhvr>
+                                        <p:cTn id="14" dur="1" fill="hold">
+                                          <p:stCondLst>
+                                            <p:cond delay="0"/>
+                                          </p:stCondLst>
+                                        </p:cTn>
+                                        <p:tgtEl>
+                                          <p:spTgt spid="3">
+                                            <p:txEl>
+                                              <p:pRg st="2" end="2"/>
+                                            </p:txEl>
+                                          </p:spTgt>
+                                        </p:tgtEl>
+                                        <p:attrNameLst>
+                                          <p:attrName>style.visibility</p:attrName>
+                                        </p:attrNameLst>
+                                      </p:cBhvr>
+                                      <p:to>
+                                        <p:strVal val="visible"/>
+                                      </p:to>
+                                    </p:set>
+                                  </p:childTnLst>
+                                </p:cTn>
+                              </p:par>
+                            </p:childTnLst>
+                          </p:cTn>
+                        </p:par>
+                      </p:childTnLst>
+                    </p:cTn>
+                  </p:par>
+                </p:childTnLst>
+              </p:cTn>
+              <p:prevCondLst>
+                <p:cond evt="onPrev" delay="0">
+                  <p:tgtEl>
+                    <p:sldTgt/>
+                  </p:tgtEl>
+                </p:cond>
+              </p:prevCondLst>
+              <p:nextCondLst>
+                <p:cond evt="onNext" delay="0">
+                  <p:tgtEl>
+                    <p:sldTgt/>
+                  </p:tgtEl>
+                </p:cond>
+              </p:nextCondLst>
+            </p:seq>
+          </p:childTnLst>
+        </p:cTn>
+      </p:par>
+    </p:tnLst>
+    <p:bldLst>
+      <p:bldP spid="3" grpId="0" uiExpand="1" build="p"/>
+    </p:bldLst>
+  </p:timing>
 </p:sld>
 </file>
 
-<file path=ppt/slides/slide27.xml><?xml version="1.0" encoding="utf-8"?>
+<file path=ppt/slides/slide29.xml><?xml version="1.0" encoding="utf-8"?>
 <p:sld xmlns:a="http://schemas.openxmlformats.org/drawingml/2006/main" xmlns:r="http://schemas.openxmlformats.org/officeDocument/2006/relationships" xmlns:p="http://schemas.openxmlformats.org/presentationml/2006/main">
   <p:cSld>
     <p:spTree>
@@ -11685,7 +15054,7 @@
           <a:p>
             <a:r>
               <a:rPr lang="en-US" dirty="0"/>
-              <a:t>Anscombe’s quartet</a:t>
+              <a:t>Summary statistics cuts out nuance</a:t>
             </a:r>
           </a:p>
         </p:txBody>
@@ -11746,7 +15115,7 @@
             <a:fld id="{45C00377-489B-40EC-B059-26BDDD2E89B9}" type="slidenum">
               <a:rPr lang="en-US" smtClean="0"/>
               <a:pPr/>
-              <a:t>27</a:t>
+              <a:t>29</a:t>
             </a:fld>
             <a:endParaRPr lang="en-US"/>
           </a:p>
@@ -11974,7 +15343,428 @@
 </p:sld>
 </file>
 
-<file path=ppt/slides/slide28.xml><?xml version="1.0" encoding="utf-8"?>
+<file path=ppt/slides/slide3.xml><?xml version="1.0" encoding="utf-8"?>
+<p:sld xmlns:a="http://schemas.openxmlformats.org/drawingml/2006/main" xmlns:r="http://schemas.openxmlformats.org/officeDocument/2006/relationships" xmlns:p="http://schemas.openxmlformats.org/presentationml/2006/main">
+  <p:cSld>
+    <p:spTree>
+      <p:nvGrpSpPr>
+        <p:cNvPr id="1" name=""/>
+        <p:cNvGrpSpPr/>
+        <p:nvPr/>
+      </p:nvGrpSpPr>
+      <p:grpSpPr>
+        <a:xfrm>
+          <a:off x="0" y="0"/>
+          <a:ext cx="0" cy="0"/>
+          <a:chOff x="0" y="0"/>
+          <a:chExt cx="0" cy="0"/>
+        </a:xfrm>
+      </p:grpSpPr>
+      <p:sp>
+        <p:nvSpPr>
+          <p:cNvPr id="2" name="Title 1">
+            <a:extLst>
+              <a:ext uri="{FF2B5EF4-FFF2-40B4-BE49-F238E27FC236}">
+                <a16:creationId xmlns:a16="http://schemas.microsoft.com/office/drawing/2014/main" id="{853A69EA-9357-FEFF-8BA9-92D09596807E}"/>
+              </a:ext>
+            </a:extLst>
+          </p:cNvPr>
+          <p:cNvSpPr>
+            <a:spLocks noGrp="1"/>
+          </p:cNvSpPr>
+          <p:nvPr>
+            <p:ph type="title"/>
+          </p:nvPr>
+        </p:nvSpPr>
+        <p:spPr/>
+        <p:txBody>
+          <a:bodyPr/>
+          <a:lstStyle/>
+          <a:p>
+            <a:r>
+              <a:rPr lang="en-US" dirty="0"/>
+              <a:t>Summarizing your data</a:t>
+            </a:r>
+          </a:p>
+        </p:txBody>
+      </p:sp>
+      <p:sp>
+        <p:nvSpPr>
+          <p:cNvPr id="3" name="Content Placeholder 2">
+            <a:extLst>
+              <a:ext uri="{FF2B5EF4-FFF2-40B4-BE49-F238E27FC236}">
+                <a16:creationId xmlns:a16="http://schemas.microsoft.com/office/drawing/2014/main" id="{52C6A547-4297-8050-2D3C-A9ABA2E9C4DE}"/>
+              </a:ext>
+            </a:extLst>
+          </p:cNvPr>
+          <p:cNvSpPr>
+            <a:spLocks noGrp="1"/>
+          </p:cNvSpPr>
+          <p:nvPr>
+            <p:ph idx="1"/>
+          </p:nvPr>
+        </p:nvSpPr>
+        <p:spPr/>
+        <p:txBody>
+          <a:bodyPr/>
+          <a:lstStyle/>
+          <a:p>
+            <a:pPr lvl="0"/>
+            <a:r>
+              <a:rPr lang="en-GB" dirty="0"/>
+              <a:t>A single number can answer different questions:</a:t>
+            </a:r>
+            <a:endParaRPr lang="en-US" dirty="0"/>
+          </a:p>
+        </p:txBody>
+      </p:sp>
+      <p:graphicFrame>
+        <p:nvGraphicFramePr>
+          <p:cNvPr id="4" name="Table 3">
+            <a:extLst>
+              <a:ext uri="{FF2B5EF4-FFF2-40B4-BE49-F238E27FC236}">
+                <a16:creationId xmlns:a16="http://schemas.microsoft.com/office/drawing/2014/main" id="{CB727180-4864-B6DB-8F0D-9B3D110D220F}"/>
+              </a:ext>
+            </a:extLst>
+          </p:cNvPr>
+          <p:cNvGraphicFramePr>
+            <a:graphicFrameLocks noGrp="1"/>
+          </p:cNvGraphicFramePr>
+          <p:nvPr>
+            <p:extLst>
+              <p:ext uri="{D42A27DB-BD31-4B8C-83A1-F6EECF244321}">
+                <p14:modId xmlns:p14="http://schemas.microsoft.com/office/powerpoint/2010/main" val="1335827930"/>
+              </p:ext>
+            </p:extLst>
+          </p:nvPr>
+        </p:nvGraphicFramePr>
+        <p:xfrm>
+          <a:off x="838200" y="2894806"/>
+          <a:ext cx="10515600" cy="1828800"/>
+        </p:xfrm>
+        <a:graphic>
+          <a:graphicData uri="http://schemas.openxmlformats.org/drawingml/2006/table">
+            <a:tbl>
+              <a:tblPr firstRow="1">
+                <a:tableStyleId>{5C22544A-7EE6-4342-B048-85BDC9FD1C3A}</a:tableStyleId>
+              </a:tblPr>
+              <a:tblGrid>
+                <a:gridCol w="3505200">
+                  <a:extLst>
+                    <a:ext uri="{9D8B030D-6E8A-4147-A177-3AD203B41FA5}">
+                      <a16:colId xmlns:a16="http://schemas.microsoft.com/office/drawing/2014/main" val="684497730"/>
+                    </a:ext>
+                  </a:extLst>
+                </a:gridCol>
+                <a:gridCol w="3505200">
+                  <a:extLst>
+                    <a:ext uri="{9D8B030D-6E8A-4147-A177-3AD203B41FA5}">
+                      <a16:colId xmlns:a16="http://schemas.microsoft.com/office/drawing/2014/main" val="839638803"/>
+                    </a:ext>
+                  </a:extLst>
+                </a:gridCol>
+                <a:gridCol w="3505200">
+                  <a:extLst>
+                    <a:ext uri="{9D8B030D-6E8A-4147-A177-3AD203B41FA5}">
+                      <a16:colId xmlns:a16="http://schemas.microsoft.com/office/drawing/2014/main" val="4114828517"/>
+                    </a:ext>
+                  </a:extLst>
+                </a:gridCol>
+              </a:tblGrid>
+              <a:tr h="0">
+                <a:tc>
+                  <a:txBody>
+                    <a:bodyPr/>
+                    <a:lstStyle/>
+                    <a:p>
+                      <a:pPr>
+                        <a:buNone/>
+                      </a:pPr>
+                      <a:r>
+                        <a:rPr lang="en-GB" dirty="0"/>
+                        <a:t>Question</a:t>
+                      </a:r>
+                    </a:p>
+                  </a:txBody>
+                  <a:tcPr anchor="ctr"/>
+                </a:tc>
+                <a:tc>
+                  <a:txBody>
+                    <a:bodyPr/>
+                    <a:lstStyle/>
+                    <a:p>
+                      <a:pPr>
+                        <a:buNone/>
+                      </a:pPr>
+                      <a:r>
+                        <a:rPr lang="en-GB" dirty="0"/>
+                        <a:t>Method</a:t>
+                      </a:r>
+                    </a:p>
+                  </a:txBody>
+                  <a:tcPr anchor="ctr"/>
+                </a:tc>
+                <a:tc>
+                  <a:txBody>
+                    <a:bodyPr/>
+                    <a:lstStyle/>
+                    <a:p>
+                      <a:pPr>
+                        <a:buNone/>
+                      </a:pPr>
+                      <a:r>
+                        <a:rPr lang="en-GB" dirty="0"/>
+                        <a:t>Example</a:t>
+                      </a:r>
+                    </a:p>
+                  </a:txBody>
+                  <a:tcPr anchor="ctr"/>
+                </a:tc>
+                <a:extLst>
+                  <a:ext uri="{0D108BD9-81ED-4DB2-BD59-A6C34878D82A}">
+                    <a16:rowId xmlns:a16="http://schemas.microsoft.com/office/drawing/2014/main" val="4036436087"/>
+                  </a:ext>
+                </a:extLst>
+              </a:tr>
+              <a:tr h="0">
+                <a:tc>
+                  <a:txBody>
+                    <a:bodyPr/>
+                    <a:lstStyle/>
+                    <a:p>
+                      <a:pPr>
+                        <a:buNone/>
+                      </a:pPr>
+                      <a:r>
+                        <a:rPr lang="en-GB"/>
+                        <a:t>How much happened?</a:t>
+                      </a:r>
+                    </a:p>
+                  </a:txBody>
+                  <a:tcPr anchor="ctr"/>
+                </a:tc>
+                <a:tc>
+                  <a:txBody>
+                    <a:bodyPr/>
+                    <a:lstStyle/>
+                    <a:p>
+                      <a:pPr>
+                        <a:buNone/>
+                      </a:pPr>
+                      <a:r>
+                        <a:rPr lang="en-GB" dirty="0"/>
+                        <a:t>Sum</a:t>
+                      </a:r>
+                    </a:p>
+                  </a:txBody>
+                  <a:tcPr anchor="ctr"/>
+                </a:tc>
+                <a:tc>
+                  <a:txBody>
+                    <a:bodyPr/>
+                    <a:lstStyle/>
+                    <a:p>
+                      <a:pPr>
+                        <a:buNone/>
+                      </a:pPr>
+                      <a:r>
+                        <a:rPr lang="en-GB"/>
+                        <a:t>Total points scored</a:t>
+                      </a:r>
+                    </a:p>
+                  </a:txBody>
+                  <a:tcPr anchor="ctr"/>
+                </a:tc>
+                <a:extLst>
+                  <a:ext uri="{0D108BD9-81ED-4DB2-BD59-A6C34878D82A}">
+                    <a16:rowId xmlns:a16="http://schemas.microsoft.com/office/drawing/2014/main" val="153217137"/>
+                  </a:ext>
+                </a:extLst>
+              </a:tr>
+              <a:tr h="0">
+                <a:tc>
+                  <a:txBody>
+                    <a:bodyPr/>
+                    <a:lstStyle/>
+                    <a:p>
+                      <a:pPr>
+                        <a:buNone/>
+                      </a:pPr>
+                      <a:r>
+                        <a:rPr lang="en-GB"/>
+                        <a:t>How much per game?</a:t>
+                      </a:r>
+                    </a:p>
+                  </a:txBody>
+                  <a:tcPr anchor="ctr"/>
+                </a:tc>
+                <a:tc>
+                  <a:txBody>
+                    <a:bodyPr/>
+                    <a:lstStyle/>
+                    <a:p>
+                      <a:pPr>
+                        <a:buNone/>
+                      </a:pPr>
+                      <a:r>
+                        <a:rPr lang="en-GB" dirty="0"/>
+                        <a:t>Rate</a:t>
+                      </a:r>
+                    </a:p>
+                  </a:txBody>
+                  <a:tcPr anchor="ctr"/>
+                </a:tc>
+                <a:tc>
+                  <a:txBody>
+                    <a:bodyPr/>
+                    <a:lstStyle/>
+                    <a:p>
+                      <a:pPr>
+                        <a:buNone/>
+                      </a:pPr>
+                      <a:r>
+                        <a:rPr lang="en-GB"/>
+                        <a:t>Points per game</a:t>
+                      </a:r>
+                    </a:p>
+                  </a:txBody>
+                  <a:tcPr anchor="ctr"/>
+                </a:tc>
+                <a:extLst>
+                  <a:ext uri="{0D108BD9-81ED-4DB2-BD59-A6C34878D82A}">
+                    <a16:rowId xmlns:a16="http://schemas.microsoft.com/office/drawing/2014/main" val="3775018292"/>
+                  </a:ext>
+                </a:extLst>
+              </a:tr>
+              <a:tr h="0">
+                <a:tc>
+                  <a:txBody>
+                    <a:bodyPr/>
+                    <a:lstStyle/>
+                    <a:p>
+                      <a:pPr>
+                        <a:buNone/>
+                      </a:pPr>
+                      <a:r>
+                        <a:rPr lang="en-GB"/>
+                        <a:t>What is typical?</a:t>
+                      </a:r>
+                    </a:p>
+                  </a:txBody>
+                  <a:tcPr anchor="ctr"/>
+                </a:tc>
+                <a:tc>
+                  <a:txBody>
+                    <a:bodyPr/>
+                    <a:lstStyle/>
+                    <a:p>
+                      <a:pPr>
+                        <a:buNone/>
+                      </a:pPr>
+                      <a:r>
+                        <a:rPr lang="en-GB" dirty="0" err="1"/>
+                        <a:t>Center</a:t>
+                      </a:r>
+                      <a:endParaRPr lang="en-GB" dirty="0"/>
+                    </a:p>
+                  </a:txBody>
+                  <a:tcPr anchor="ctr"/>
+                </a:tc>
+                <a:tc>
+                  <a:txBody>
+                    <a:bodyPr/>
+                    <a:lstStyle/>
+                    <a:p>
+                      <a:pPr>
+                        <a:buNone/>
+                      </a:pPr>
+                      <a:r>
+                        <a:rPr lang="en-GB"/>
+                        <a:t>Mean or median points in a game</a:t>
+                      </a:r>
+                    </a:p>
+                  </a:txBody>
+                  <a:tcPr anchor="ctr"/>
+                </a:tc>
+                <a:extLst>
+                  <a:ext uri="{0D108BD9-81ED-4DB2-BD59-A6C34878D82A}">
+                    <a16:rowId xmlns:a16="http://schemas.microsoft.com/office/drawing/2014/main" val="3264308777"/>
+                  </a:ext>
+                </a:extLst>
+              </a:tr>
+              <a:tr h="0">
+                <a:tc>
+                  <a:txBody>
+                    <a:bodyPr/>
+                    <a:lstStyle/>
+                    <a:p>
+                      <a:pPr>
+                        <a:buNone/>
+                      </a:pPr>
+                      <a:r>
+                        <a:rPr lang="en-GB"/>
+                        <a:t>How much does it vary?</a:t>
+                      </a:r>
+                    </a:p>
+                  </a:txBody>
+                  <a:tcPr anchor="ctr"/>
+                </a:tc>
+                <a:tc>
+                  <a:txBody>
+                    <a:bodyPr/>
+                    <a:lstStyle/>
+                    <a:p>
+                      <a:pPr>
+                        <a:buNone/>
+                      </a:pPr>
+                      <a:r>
+                        <a:rPr lang="en-GB" dirty="0"/>
+                        <a:t>Spread</a:t>
+                      </a:r>
+                    </a:p>
+                  </a:txBody>
+                  <a:tcPr anchor="ctr"/>
+                </a:tc>
+                <a:tc>
+                  <a:txBody>
+                    <a:bodyPr/>
+                    <a:lstStyle/>
+                    <a:p>
+                      <a:pPr>
+                        <a:buNone/>
+                      </a:pPr>
+                      <a:r>
+                        <a:rPr lang="en-GB" dirty="0"/>
+                        <a:t>Range or standard deviation</a:t>
+                      </a:r>
+                    </a:p>
+                  </a:txBody>
+                  <a:tcPr anchor="ctr"/>
+                </a:tc>
+                <a:extLst>
+                  <a:ext uri="{0D108BD9-81ED-4DB2-BD59-A6C34878D82A}">
+                    <a16:rowId xmlns:a16="http://schemas.microsoft.com/office/drawing/2014/main" val="4096049664"/>
+                  </a:ext>
+                </a:extLst>
+              </a:tr>
+            </a:tbl>
+          </a:graphicData>
+        </a:graphic>
+      </p:graphicFrame>
+    </p:spTree>
+    <p:extLst>
+      <p:ext uri="{BB962C8B-B14F-4D97-AF65-F5344CB8AC3E}">
+        <p14:creationId xmlns:p14="http://schemas.microsoft.com/office/powerpoint/2010/main" val="3281068649"/>
+      </p:ext>
+    </p:extLst>
+  </p:cSld>
+  <p:clrMapOvr>
+    <a:masterClrMapping/>
+  </p:clrMapOvr>
+</p:sld>
+</file>
+
+<file path=ppt/slides/slide30.xml><?xml version="1.0" encoding="utf-8"?>
 <p:sld xmlns:a="http://schemas.openxmlformats.org/drawingml/2006/main" xmlns:r="http://schemas.openxmlformats.org/officeDocument/2006/relationships" xmlns:p="http://schemas.openxmlformats.org/presentationml/2006/main">
   <p:cSld>
     <p:spTree>
@@ -12020,7 +15810,7 @@
           <a:p>
             <a:r>
               <a:rPr lang="en-US" dirty="0"/>
-              <a:t>Anscombe’s quartet</a:t>
+              <a:t>Visuals show the details </a:t>
             </a:r>
           </a:p>
         </p:txBody>
@@ -12049,7 +15839,7 @@
             <a:fld id="{45C00377-489B-40EC-B059-26BDDD2E89B9}" type="slidenum">
               <a:rPr lang="en-US" smtClean="0"/>
               <a:pPr/>
-              <a:t>28</a:t>
+              <a:t>30</a:t>
             </a:fld>
             <a:endParaRPr lang="en-US"/>
           </a:p>
@@ -12403,7 +16193,7 @@
 </p:sld>
 </file>
 
-<file path=ppt/slides/slide29.xml><?xml version="1.0" encoding="utf-8"?>
+<file path=ppt/slides/slide31.xml><?xml version="1.0" encoding="utf-8"?>
 <p:sld xmlns:a="http://schemas.openxmlformats.org/drawingml/2006/main" xmlns:r="http://schemas.openxmlformats.org/officeDocument/2006/relationships" xmlns:p="http://schemas.openxmlformats.org/presentationml/2006/main">
   <p:cSld>
     <p:spTree>
@@ -12478,7 +16268,7 @@
             <a:fld id="{45C00377-489B-40EC-B059-26BDDD2E89B9}" type="slidenum">
               <a:rPr lang="en-US" smtClean="0"/>
               <a:pPr/>
-              <a:t>29</a:t>
+              <a:t>31</a:t>
             </a:fld>
             <a:endParaRPr lang="en-US"/>
           </a:p>
@@ -12527,180 +16317,7 @@
 </p:sld>
 </file>
 
-<file path=ppt/slides/slide3.xml><?xml version="1.0" encoding="utf-8"?>
-<p:sld xmlns:a="http://schemas.openxmlformats.org/drawingml/2006/main" xmlns:r="http://schemas.openxmlformats.org/officeDocument/2006/relationships" xmlns:p="http://schemas.openxmlformats.org/presentationml/2006/main">
-  <p:cSld>
-    <p:spTree>
-      <p:nvGrpSpPr>
-        <p:cNvPr id="1" name=""/>
-        <p:cNvGrpSpPr/>
-        <p:nvPr/>
-      </p:nvGrpSpPr>
-      <p:grpSpPr>
-        <a:xfrm>
-          <a:off x="0" y="0"/>
-          <a:ext cx="0" cy="0"/>
-          <a:chOff x="0" y="0"/>
-          <a:chExt cx="0" cy="0"/>
-        </a:xfrm>
-      </p:grpSpPr>
-      <p:sp>
-        <p:nvSpPr>
-          <p:cNvPr id="3" name="Content Placeholder 2">
-            <a:extLst>
-              <a:ext uri="{FF2B5EF4-FFF2-40B4-BE49-F238E27FC236}">
-                <a16:creationId xmlns:a16="http://schemas.microsoft.com/office/drawing/2014/main" id="{1E7EFF20-7721-22CF-0B9C-0225448146B6}"/>
-              </a:ext>
-            </a:extLst>
-          </p:cNvPr>
-          <p:cNvSpPr>
-            <a:spLocks noGrp="1"/>
-          </p:cNvSpPr>
-          <p:nvPr>
-            <p:ph idx="1"/>
-          </p:nvPr>
-        </p:nvSpPr>
-        <p:spPr/>
-        <p:txBody>
-          <a:bodyPr>
-            <a:normAutofit/>
-          </a:bodyPr>
-          <a:lstStyle/>
-          <a:p>
-            <a:r>
-              <a:rPr lang="en-US" dirty="0"/>
-              <a:t>A method of describing a data set with a single figure</a:t>
-            </a:r>
-          </a:p>
-          <a:p>
-            <a:pPr lvl="1"/>
-            <a:endParaRPr lang="en-US" dirty="0"/>
-          </a:p>
-          <a:p>
-            <a:r>
-              <a:rPr lang="en-US" dirty="0"/>
-              <a:t>Main methods:</a:t>
-            </a:r>
-          </a:p>
-          <a:p>
-            <a:pPr lvl="1"/>
-            <a:r>
-              <a:rPr lang="en-US" dirty="0"/>
-              <a:t>Mean</a:t>
-            </a:r>
-          </a:p>
-          <a:p>
-            <a:pPr lvl="1"/>
-            <a:r>
-              <a:rPr lang="en-US" dirty="0"/>
-              <a:t>Median</a:t>
-            </a:r>
-          </a:p>
-          <a:p>
-            <a:pPr lvl="1"/>
-            <a:r>
-              <a:rPr lang="en-US" dirty="0"/>
-              <a:t>Mode </a:t>
-            </a:r>
-          </a:p>
-          <a:p>
-            <a:pPr lvl="1"/>
-            <a:endParaRPr lang="en-US" dirty="0"/>
-          </a:p>
-          <a:p>
-            <a:r>
-              <a:rPr lang="en-US" dirty="0"/>
-              <a:t>Most appropriate method depends on the data and question</a:t>
-            </a:r>
-          </a:p>
-          <a:p>
-            <a:pPr lvl="1"/>
-            <a:r>
-              <a:rPr lang="en-US" dirty="0"/>
-              <a:t>Scale of measurement</a:t>
-            </a:r>
-          </a:p>
-          <a:p>
-            <a:pPr lvl="1"/>
-            <a:r>
-              <a:rPr lang="en-US" dirty="0"/>
-              <a:t>Outliers and data distribution</a:t>
-            </a:r>
-          </a:p>
-        </p:txBody>
-      </p:sp>
-      <p:sp>
-        <p:nvSpPr>
-          <p:cNvPr id="4" name="Slide Number Placeholder 3">
-            <a:extLst>
-              <a:ext uri="{FF2B5EF4-FFF2-40B4-BE49-F238E27FC236}">
-                <a16:creationId xmlns:a16="http://schemas.microsoft.com/office/drawing/2014/main" id="{320425CF-433B-BA64-63C0-A6A6E36B0490}"/>
-              </a:ext>
-            </a:extLst>
-          </p:cNvPr>
-          <p:cNvSpPr>
-            <a:spLocks noGrp="1"/>
-          </p:cNvSpPr>
-          <p:nvPr>
-            <p:ph type="sldNum" sz="quarter" idx="12"/>
-          </p:nvPr>
-        </p:nvSpPr>
-        <p:spPr/>
-        <p:txBody>
-          <a:bodyPr/>
-          <a:lstStyle/>
-          <a:p>
-            <a:fld id="{45C00377-489B-40EC-B059-26BDDD2E89B9}" type="slidenum">
-              <a:rPr lang="en-US" smtClean="0"/>
-              <a:pPr/>
-              <a:t>3</a:t>
-            </a:fld>
-            <a:endParaRPr lang="en-US"/>
-          </a:p>
-        </p:txBody>
-      </p:sp>
-      <p:sp>
-        <p:nvSpPr>
-          <p:cNvPr id="2" name="Title 1">
-            <a:extLst>
-              <a:ext uri="{FF2B5EF4-FFF2-40B4-BE49-F238E27FC236}">
-                <a16:creationId xmlns:a16="http://schemas.microsoft.com/office/drawing/2014/main" id="{537E157F-E6F6-FE34-3C0A-A701E167D090}"/>
-              </a:ext>
-            </a:extLst>
-          </p:cNvPr>
-          <p:cNvSpPr>
-            <a:spLocks noGrp="1"/>
-          </p:cNvSpPr>
-          <p:nvPr>
-            <p:ph type="title"/>
-          </p:nvPr>
-        </p:nvSpPr>
-        <p:spPr/>
-        <p:txBody>
-          <a:bodyPr/>
-          <a:lstStyle/>
-          <a:p>
-            <a:r>
-              <a:rPr lang="en-US" dirty="0"/>
-              <a:t>Measures of central tendency</a:t>
-            </a:r>
-          </a:p>
-        </p:txBody>
-      </p:sp>
-    </p:spTree>
-    <p:extLst>
-      <p:ext uri="{BB962C8B-B14F-4D97-AF65-F5344CB8AC3E}">
-        <p14:creationId xmlns:p14="http://schemas.microsoft.com/office/powerpoint/2010/main" val="2698741083"/>
-      </p:ext>
-    </p:extLst>
-  </p:cSld>
-  <p:clrMapOvr>
-    <a:masterClrMapping/>
-  </p:clrMapOvr>
-</p:sld>
-</file>
-
-<file path=ppt/slides/slide30.xml><?xml version="1.0" encoding="utf-8"?>
+<file path=ppt/slides/slide32.xml><?xml version="1.0" encoding="utf-8"?>
 <p:sld xmlns:a="http://schemas.openxmlformats.org/drawingml/2006/main" xmlns:r="http://schemas.openxmlformats.org/officeDocument/2006/relationships" xmlns:p="http://schemas.openxmlformats.org/presentationml/2006/main">
   <p:cSld>
     <p:spTree>
@@ -12747,7 +16364,7 @@
             <a:fld id="{45C00377-489B-40EC-B059-26BDDD2E89B9}" type="slidenum">
               <a:rPr lang="en-US" smtClean="0"/>
               <a:pPr/>
-              <a:t>30</a:t>
+              <a:t>32</a:t>
             </a:fld>
             <a:endParaRPr lang="en-US"/>
           </a:p>
@@ -12787,294 +16404,6 @@
     <p:extLst>
       <p:ext uri="{BB962C8B-B14F-4D97-AF65-F5344CB8AC3E}">
         <p14:creationId xmlns:p14="http://schemas.microsoft.com/office/powerpoint/2010/main" val="3432585367"/>
-      </p:ext>
-    </p:extLst>
-  </p:cSld>
-  <p:clrMapOvr>
-    <a:masterClrMapping/>
-  </p:clrMapOvr>
-</p:sld>
-</file>
-
-<file path=ppt/slides/slide31.xml><?xml version="1.0" encoding="utf-8"?>
-<p:sld xmlns:a="http://schemas.openxmlformats.org/drawingml/2006/main" xmlns:r="http://schemas.openxmlformats.org/officeDocument/2006/relationships" xmlns:p="http://schemas.openxmlformats.org/presentationml/2006/main">
-  <p:cSld>
-    <p:spTree>
-      <p:nvGrpSpPr>
-        <p:cNvPr id="1" name=""/>
-        <p:cNvGrpSpPr/>
-        <p:nvPr/>
-      </p:nvGrpSpPr>
-      <p:grpSpPr>
-        <a:xfrm>
-          <a:off x="0" y="0"/>
-          <a:ext cx="0" cy="0"/>
-          <a:chOff x="0" y="0"/>
-          <a:chExt cx="0" cy="0"/>
-        </a:xfrm>
-      </p:grpSpPr>
-      <p:sp>
-        <p:nvSpPr>
-          <p:cNvPr id="2" name="Title 1">
-            <a:extLst>
-              <a:ext uri="{FF2B5EF4-FFF2-40B4-BE49-F238E27FC236}">
-                <a16:creationId xmlns:a16="http://schemas.microsoft.com/office/drawing/2014/main" id="{598F22AF-1CEB-4358-AE02-ACE12300E025}"/>
-              </a:ext>
-            </a:extLst>
-          </p:cNvPr>
-          <p:cNvSpPr>
-            <a:spLocks noGrp="1"/>
-          </p:cNvSpPr>
-          <p:nvPr>
-            <p:ph type="title"/>
-          </p:nvPr>
-        </p:nvSpPr>
-        <p:spPr/>
-        <p:txBody>
-          <a:bodyPr>
-            <a:normAutofit/>
-          </a:bodyPr>
-          <a:lstStyle/>
-          <a:p>
-            <a:r>
-              <a:rPr lang="en-US" dirty="0"/>
-              <a:t>In-Class Case Study</a:t>
-            </a:r>
-          </a:p>
-        </p:txBody>
-      </p:sp>
-      <p:sp>
-        <p:nvSpPr>
-          <p:cNvPr id="4" name="Slide Number Placeholder 3">
-            <a:extLst>
-              <a:ext uri="{FF2B5EF4-FFF2-40B4-BE49-F238E27FC236}">
-                <a16:creationId xmlns:a16="http://schemas.microsoft.com/office/drawing/2014/main" id="{A2A0E682-D3F6-11F1-EDAC-1B4AB62D5A53}"/>
-              </a:ext>
-            </a:extLst>
-          </p:cNvPr>
-          <p:cNvSpPr>
-            <a:spLocks noGrp="1"/>
-          </p:cNvSpPr>
-          <p:nvPr>
-            <p:ph type="sldNum" sz="quarter" idx="12"/>
-          </p:nvPr>
-        </p:nvSpPr>
-        <p:spPr/>
-        <p:txBody>
-          <a:bodyPr/>
-          <a:lstStyle/>
-          <a:p>
-            <a:fld id="{45C00377-489B-40EC-B059-26BDDD2E89B9}" type="slidenum">
-              <a:rPr lang="en-US" smtClean="0"/>
-              <a:pPr/>
-              <a:t>31</a:t>
-            </a:fld>
-            <a:endParaRPr lang="en-US"/>
-          </a:p>
-        </p:txBody>
-      </p:sp>
-      <p:sp>
-        <p:nvSpPr>
-          <p:cNvPr id="6" name="Content Placeholder 5">
-            <a:extLst>
-              <a:ext uri="{FF2B5EF4-FFF2-40B4-BE49-F238E27FC236}">
-                <a16:creationId xmlns:a16="http://schemas.microsoft.com/office/drawing/2014/main" id="{AD6FB6CF-0C73-AA1A-2E6E-93AAE6CA5D9F}"/>
-              </a:ext>
-            </a:extLst>
-          </p:cNvPr>
-          <p:cNvSpPr>
-            <a:spLocks noGrp="1"/>
-          </p:cNvSpPr>
-          <p:nvPr>
-            <p:ph idx="1"/>
-          </p:nvPr>
-        </p:nvSpPr>
-        <p:spPr/>
-        <p:txBody>
-          <a:bodyPr/>
-          <a:lstStyle/>
-          <a:p>
-            <a:r>
-              <a:rPr lang="en-US" dirty="0"/>
-              <a:t>Before conducting analysis, it is good to find out what your data actually looks like. In this activity, you will describe one important numeric variable using measures of center, spread, and distribution.</a:t>
-            </a:r>
-          </a:p>
-          <a:p>
-            <a:endParaRPr lang="en-US" dirty="0"/>
-          </a:p>
-        </p:txBody>
-      </p:sp>
-    </p:spTree>
-    <p:extLst>
-      <p:ext uri="{BB962C8B-B14F-4D97-AF65-F5344CB8AC3E}">
-        <p14:creationId xmlns:p14="http://schemas.microsoft.com/office/powerpoint/2010/main" val="3949845190"/>
-      </p:ext>
-    </p:extLst>
-  </p:cSld>
-  <p:clrMapOvr>
-    <a:masterClrMapping/>
-  </p:clrMapOvr>
-</p:sld>
-</file>
-
-<file path=ppt/slides/slide32.xml><?xml version="1.0" encoding="utf-8"?>
-<p:sld xmlns:a="http://schemas.openxmlformats.org/drawingml/2006/main" xmlns:r="http://schemas.openxmlformats.org/officeDocument/2006/relationships" xmlns:p="http://schemas.openxmlformats.org/presentationml/2006/main">
-  <p:cSld>
-    <p:spTree>
-      <p:nvGrpSpPr>
-        <p:cNvPr id="1" name="">
-          <a:extLst>
-            <a:ext uri="{FF2B5EF4-FFF2-40B4-BE49-F238E27FC236}">
-              <a16:creationId xmlns:a16="http://schemas.microsoft.com/office/drawing/2014/main" id="{C3E42084-E35B-C8A9-81F3-CFD97127A2BE}"/>
-            </a:ext>
-          </a:extLst>
-        </p:cNvPr>
-        <p:cNvGrpSpPr/>
-        <p:nvPr/>
-      </p:nvGrpSpPr>
-      <p:grpSpPr>
-        <a:xfrm>
-          <a:off x="0" y="0"/>
-          <a:ext cx="0" cy="0"/>
-          <a:chOff x="0" y="0"/>
-          <a:chExt cx="0" cy="0"/>
-        </a:xfrm>
-      </p:grpSpPr>
-      <p:sp>
-        <p:nvSpPr>
-          <p:cNvPr id="2" name="Title 1">
-            <a:extLst>
-              <a:ext uri="{FF2B5EF4-FFF2-40B4-BE49-F238E27FC236}">
-                <a16:creationId xmlns:a16="http://schemas.microsoft.com/office/drawing/2014/main" id="{1637C26A-2352-AEE0-6F8B-BDF0EF18EB9E}"/>
-              </a:ext>
-            </a:extLst>
-          </p:cNvPr>
-          <p:cNvSpPr>
-            <a:spLocks noGrp="1"/>
-          </p:cNvSpPr>
-          <p:nvPr>
-            <p:ph type="title"/>
-          </p:nvPr>
-        </p:nvSpPr>
-        <p:spPr/>
-        <p:txBody>
-          <a:bodyPr>
-            <a:normAutofit/>
-          </a:bodyPr>
-          <a:lstStyle/>
-          <a:p>
-            <a:r>
-              <a:rPr lang="en-US" dirty="0"/>
-              <a:t>In-Class Case Study</a:t>
-            </a:r>
-          </a:p>
-        </p:txBody>
-      </p:sp>
-      <p:sp>
-        <p:nvSpPr>
-          <p:cNvPr id="4" name="Slide Number Placeholder 3">
-            <a:extLst>
-              <a:ext uri="{FF2B5EF4-FFF2-40B4-BE49-F238E27FC236}">
-                <a16:creationId xmlns:a16="http://schemas.microsoft.com/office/drawing/2014/main" id="{4A5BBC1B-A8A9-8371-D6EB-8865A458B962}"/>
-              </a:ext>
-            </a:extLst>
-          </p:cNvPr>
-          <p:cNvSpPr>
-            <a:spLocks noGrp="1"/>
-          </p:cNvSpPr>
-          <p:nvPr>
-            <p:ph type="sldNum" sz="quarter" idx="12"/>
-          </p:nvPr>
-        </p:nvSpPr>
-        <p:spPr/>
-        <p:txBody>
-          <a:bodyPr/>
-          <a:lstStyle/>
-          <a:p>
-            <a:fld id="{45C00377-489B-40EC-B059-26BDDD2E89B9}" type="slidenum">
-              <a:rPr lang="en-US" smtClean="0"/>
-              <a:pPr/>
-              <a:t>32</a:t>
-            </a:fld>
-            <a:endParaRPr lang="en-US"/>
-          </a:p>
-        </p:txBody>
-      </p:sp>
-      <p:sp>
-        <p:nvSpPr>
-          <p:cNvPr id="6" name="Content Placeholder 5">
-            <a:extLst>
-              <a:ext uri="{FF2B5EF4-FFF2-40B4-BE49-F238E27FC236}">
-                <a16:creationId xmlns:a16="http://schemas.microsoft.com/office/drawing/2014/main" id="{EA425A5A-9D9C-9569-BBA9-675BC106A949}"/>
-              </a:ext>
-            </a:extLst>
-          </p:cNvPr>
-          <p:cNvSpPr>
-            <a:spLocks noGrp="1"/>
-          </p:cNvSpPr>
-          <p:nvPr>
-            <p:ph idx="1"/>
-          </p:nvPr>
-        </p:nvSpPr>
-        <p:spPr/>
-        <p:txBody>
-          <a:bodyPr/>
-          <a:lstStyle/>
-          <a:p>
-            <a:pPr marL="0" indent="0">
-              <a:buNone/>
-            </a:pPr>
-            <a:r>
-              <a:rPr lang="en-US" b="1" dirty="0"/>
-              <a:t>Part 1: Choose what to describe</a:t>
-            </a:r>
-          </a:p>
-          <a:p>
-            <a:pPr lvl="0"/>
-            <a:r>
-              <a:rPr lang="en-US" dirty="0"/>
-              <a:t>Identify what </a:t>
-            </a:r>
-            <a:r>
-              <a:rPr lang="en-US" b="1" dirty="0"/>
-              <a:t>one row</a:t>
-            </a:r>
-            <a:r>
-              <a:rPr lang="en-US" dirty="0"/>
-              <a:t> of your dataset represents: a player, a player-game, a team-game, a training session, or something else.</a:t>
-            </a:r>
-          </a:p>
-          <a:p>
-            <a:r>
-              <a:rPr lang="en-US" dirty="0"/>
-              <a:t>Choose one numeric variable that matters. </a:t>
-            </a:r>
-          </a:p>
-          <a:p>
-            <a:pPr lvl="0"/>
-            <a:r>
-              <a:rPr lang="en-US" dirty="0"/>
-              <a:t>Record the variable’s units and the number of observations with a usable value.</a:t>
-            </a:r>
-          </a:p>
-          <a:p>
-            <a:endParaRPr lang="en-US" dirty="0"/>
-          </a:p>
-          <a:p>
-            <a:pPr marL="0" indent="0">
-              <a:buNone/>
-            </a:pPr>
-            <a:r>
-              <a:rPr lang="en-US" dirty="0"/>
-              <a:t>If you do not have data, use a provided class dataset and complete the same steps. Note which dataset you used.</a:t>
-            </a:r>
-          </a:p>
-        </p:txBody>
-      </p:sp>
-    </p:spTree>
-    <p:extLst>
-      <p:ext uri="{BB962C8B-B14F-4D97-AF65-F5344CB8AC3E}">
-        <p14:creationId xmlns:p14="http://schemas.microsoft.com/office/powerpoint/2010/main" val="1377703460"/>
       </p:ext>
     </p:extLst>
   </p:cSld>
@@ -13106,6 +16435,294 @@
           <p:cNvPr id="2" name="Title 1">
             <a:extLst>
               <a:ext uri="{FF2B5EF4-FFF2-40B4-BE49-F238E27FC236}">
+                <a16:creationId xmlns:a16="http://schemas.microsoft.com/office/drawing/2014/main" id="{598F22AF-1CEB-4358-AE02-ACE12300E025}"/>
+              </a:ext>
+            </a:extLst>
+          </p:cNvPr>
+          <p:cNvSpPr>
+            <a:spLocks noGrp="1"/>
+          </p:cNvSpPr>
+          <p:nvPr>
+            <p:ph type="title"/>
+          </p:nvPr>
+        </p:nvSpPr>
+        <p:spPr/>
+        <p:txBody>
+          <a:bodyPr>
+            <a:normAutofit/>
+          </a:bodyPr>
+          <a:lstStyle/>
+          <a:p>
+            <a:r>
+              <a:rPr lang="en-US" dirty="0"/>
+              <a:t>In-Class Case Study</a:t>
+            </a:r>
+          </a:p>
+        </p:txBody>
+      </p:sp>
+      <p:sp>
+        <p:nvSpPr>
+          <p:cNvPr id="4" name="Slide Number Placeholder 3">
+            <a:extLst>
+              <a:ext uri="{FF2B5EF4-FFF2-40B4-BE49-F238E27FC236}">
+                <a16:creationId xmlns:a16="http://schemas.microsoft.com/office/drawing/2014/main" id="{A2A0E682-D3F6-11F1-EDAC-1B4AB62D5A53}"/>
+              </a:ext>
+            </a:extLst>
+          </p:cNvPr>
+          <p:cNvSpPr>
+            <a:spLocks noGrp="1"/>
+          </p:cNvSpPr>
+          <p:nvPr>
+            <p:ph type="sldNum" sz="quarter" idx="12"/>
+          </p:nvPr>
+        </p:nvSpPr>
+        <p:spPr/>
+        <p:txBody>
+          <a:bodyPr/>
+          <a:lstStyle/>
+          <a:p>
+            <a:fld id="{45C00377-489B-40EC-B059-26BDDD2E89B9}" type="slidenum">
+              <a:rPr lang="en-US" smtClean="0"/>
+              <a:pPr/>
+              <a:t>33</a:t>
+            </a:fld>
+            <a:endParaRPr lang="en-US"/>
+          </a:p>
+        </p:txBody>
+      </p:sp>
+      <p:sp>
+        <p:nvSpPr>
+          <p:cNvPr id="6" name="Content Placeholder 5">
+            <a:extLst>
+              <a:ext uri="{FF2B5EF4-FFF2-40B4-BE49-F238E27FC236}">
+                <a16:creationId xmlns:a16="http://schemas.microsoft.com/office/drawing/2014/main" id="{AD6FB6CF-0C73-AA1A-2E6E-93AAE6CA5D9F}"/>
+              </a:ext>
+            </a:extLst>
+          </p:cNvPr>
+          <p:cNvSpPr>
+            <a:spLocks noGrp="1"/>
+          </p:cNvSpPr>
+          <p:nvPr>
+            <p:ph idx="1"/>
+          </p:nvPr>
+        </p:nvSpPr>
+        <p:spPr/>
+        <p:txBody>
+          <a:bodyPr/>
+          <a:lstStyle/>
+          <a:p>
+            <a:r>
+              <a:rPr lang="en-US" dirty="0"/>
+              <a:t>Before conducting analysis, it is good to find out what your data actually looks like. In this activity, you will describe one important numeric variable using measures of center, spread, and distribution.</a:t>
+            </a:r>
+          </a:p>
+          <a:p>
+            <a:endParaRPr lang="en-US" dirty="0"/>
+          </a:p>
+        </p:txBody>
+      </p:sp>
+    </p:spTree>
+    <p:extLst>
+      <p:ext uri="{BB962C8B-B14F-4D97-AF65-F5344CB8AC3E}">
+        <p14:creationId xmlns:p14="http://schemas.microsoft.com/office/powerpoint/2010/main" val="3949845190"/>
+      </p:ext>
+    </p:extLst>
+  </p:cSld>
+  <p:clrMapOvr>
+    <a:masterClrMapping/>
+  </p:clrMapOvr>
+</p:sld>
+</file>
+
+<file path=ppt/slides/slide34.xml><?xml version="1.0" encoding="utf-8"?>
+<p:sld xmlns:a="http://schemas.openxmlformats.org/drawingml/2006/main" xmlns:r="http://schemas.openxmlformats.org/officeDocument/2006/relationships" xmlns:p="http://schemas.openxmlformats.org/presentationml/2006/main">
+  <p:cSld>
+    <p:spTree>
+      <p:nvGrpSpPr>
+        <p:cNvPr id="1" name="">
+          <a:extLst>
+            <a:ext uri="{FF2B5EF4-FFF2-40B4-BE49-F238E27FC236}">
+              <a16:creationId xmlns:a16="http://schemas.microsoft.com/office/drawing/2014/main" id="{C3E42084-E35B-C8A9-81F3-CFD97127A2BE}"/>
+            </a:ext>
+          </a:extLst>
+        </p:cNvPr>
+        <p:cNvGrpSpPr/>
+        <p:nvPr/>
+      </p:nvGrpSpPr>
+      <p:grpSpPr>
+        <a:xfrm>
+          <a:off x="0" y="0"/>
+          <a:ext cx="0" cy="0"/>
+          <a:chOff x="0" y="0"/>
+          <a:chExt cx="0" cy="0"/>
+        </a:xfrm>
+      </p:grpSpPr>
+      <p:sp>
+        <p:nvSpPr>
+          <p:cNvPr id="2" name="Title 1">
+            <a:extLst>
+              <a:ext uri="{FF2B5EF4-FFF2-40B4-BE49-F238E27FC236}">
+                <a16:creationId xmlns:a16="http://schemas.microsoft.com/office/drawing/2014/main" id="{1637C26A-2352-AEE0-6F8B-BDF0EF18EB9E}"/>
+              </a:ext>
+            </a:extLst>
+          </p:cNvPr>
+          <p:cNvSpPr>
+            <a:spLocks noGrp="1"/>
+          </p:cNvSpPr>
+          <p:nvPr>
+            <p:ph type="title"/>
+          </p:nvPr>
+        </p:nvSpPr>
+        <p:spPr/>
+        <p:txBody>
+          <a:bodyPr>
+            <a:normAutofit/>
+          </a:bodyPr>
+          <a:lstStyle/>
+          <a:p>
+            <a:r>
+              <a:rPr lang="en-US" dirty="0"/>
+              <a:t>In-Class Case Study</a:t>
+            </a:r>
+          </a:p>
+        </p:txBody>
+      </p:sp>
+      <p:sp>
+        <p:nvSpPr>
+          <p:cNvPr id="4" name="Slide Number Placeholder 3">
+            <a:extLst>
+              <a:ext uri="{FF2B5EF4-FFF2-40B4-BE49-F238E27FC236}">
+                <a16:creationId xmlns:a16="http://schemas.microsoft.com/office/drawing/2014/main" id="{4A5BBC1B-A8A9-8371-D6EB-8865A458B962}"/>
+              </a:ext>
+            </a:extLst>
+          </p:cNvPr>
+          <p:cNvSpPr>
+            <a:spLocks noGrp="1"/>
+          </p:cNvSpPr>
+          <p:nvPr>
+            <p:ph type="sldNum" sz="quarter" idx="12"/>
+          </p:nvPr>
+        </p:nvSpPr>
+        <p:spPr/>
+        <p:txBody>
+          <a:bodyPr/>
+          <a:lstStyle/>
+          <a:p>
+            <a:fld id="{45C00377-489B-40EC-B059-26BDDD2E89B9}" type="slidenum">
+              <a:rPr lang="en-US" smtClean="0"/>
+              <a:pPr/>
+              <a:t>34</a:t>
+            </a:fld>
+            <a:endParaRPr lang="en-US"/>
+          </a:p>
+        </p:txBody>
+      </p:sp>
+      <p:sp>
+        <p:nvSpPr>
+          <p:cNvPr id="6" name="Content Placeholder 5">
+            <a:extLst>
+              <a:ext uri="{FF2B5EF4-FFF2-40B4-BE49-F238E27FC236}">
+                <a16:creationId xmlns:a16="http://schemas.microsoft.com/office/drawing/2014/main" id="{EA425A5A-9D9C-9569-BBA9-675BC106A949}"/>
+              </a:ext>
+            </a:extLst>
+          </p:cNvPr>
+          <p:cNvSpPr>
+            <a:spLocks noGrp="1"/>
+          </p:cNvSpPr>
+          <p:nvPr>
+            <p:ph idx="1"/>
+          </p:nvPr>
+        </p:nvSpPr>
+        <p:spPr/>
+        <p:txBody>
+          <a:bodyPr/>
+          <a:lstStyle/>
+          <a:p>
+            <a:pPr marL="0" indent="0">
+              <a:buNone/>
+            </a:pPr>
+            <a:r>
+              <a:rPr lang="en-US" b="1" dirty="0"/>
+              <a:t>Part 1: Choose what to describe</a:t>
+            </a:r>
+          </a:p>
+          <a:p>
+            <a:pPr lvl="0"/>
+            <a:r>
+              <a:rPr lang="en-US" dirty="0"/>
+              <a:t>Identify what </a:t>
+            </a:r>
+            <a:r>
+              <a:rPr lang="en-US" b="1" dirty="0"/>
+              <a:t>one row</a:t>
+            </a:r>
+            <a:r>
+              <a:rPr lang="en-US" dirty="0"/>
+              <a:t> of your dataset represents: a player, a player-game, a team-game, a training session, or something else.</a:t>
+            </a:r>
+          </a:p>
+          <a:p>
+            <a:r>
+              <a:rPr lang="en-US" dirty="0"/>
+              <a:t>Choose one numeric variable that matters. </a:t>
+            </a:r>
+          </a:p>
+          <a:p>
+            <a:pPr lvl="0"/>
+            <a:r>
+              <a:rPr lang="en-US" dirty="0"/>
+              <a:t>Record the variable’s units and the number of observations with a usable value.</a:t>
+            </a:r>
+          </a:p>
+          <a:p>
+            <a:endParaRPr lang="en-US" dirty="0"/>
+          </a:p>
+          <a:p>
+            <a:pPr marL="0" indent="0">
+              <a:buNone/>
+            </a:pPr>
+            <a:r>
+              <a:rPr lang="en-US" dirty="0"/>
+              <a:t>If you do not have data, use a provided class dataset and complete the same steps. Note which dataset you used.</a:t>
+            </a:r>
+          </a:p>
+        </p:txBody>
+      </p:sp>
+    </p:spTree>
+    <p:extLst>
+      <p:ext uri="{BB962C8B-B14F-4D97-AF65-F5344CB8AC3E}">
+        <p14:creationId xmlns:p14="http://schemas.microsoft.com/office/powerpoint/2010/main" val="1377703460"/>
+      </p:ext>
+    </p:extLst>
+  </p:cSld>
+  <p:clrMapOvr>
+    <a:masterClrMapping/>
+  </p:clrMapOvr>
+</p:sld>
+</file>
+
+<file path=ppt/slides/slide35.xml><?xml version="1.0" encoding="utf-8"?>
+<p:sld xmlns:a="http://schemas.openxmlformats.org/drawingml/2006/main" xmlns:r="http://schemas.openxmlformats.org/officeDocument/2006/relationships" xmlns:p="http://schemas.openxmlformats.org/presentationml/2006/main">
+  <p:cSld>
+    <p:spTree>
+      <p:nvGrpSpPr>
+        <p:cNvPr id="1" name=""/>
+        <p:cNvGrpSpPr/>
+        <p:nvPr/>
+      </p:nvGrpSpPr>
+      <p:grpSpPr>
+        <a:xfrm>
+          <a:off x="0" y="0"/>
+          <a:ext cx="0" cy="0"/>
+          <a:chOff x="0" y="0"/>
+          <a:chExt cx="0" cy="0"/>
+        </a:xfrm>
+      </p:grpSpPr>
+      <p:sp>
+        <p:nvSpPr>
+          <p:cNvPr id="2" name="Title 1">
+            <a:extLst>
+              <a:ext uri="{FF2B5EF4-FFF2-40B4-BE49-F238E27FC236}">
                 <a16:creationId xmlns:a16="http://schemas.microsoft.com/office/drawing/2014/main" id="{BC42575F-F300-2894-BC27-EF842D6543F9}"/>
               </a:ext>
             </a:extLst>
@@ -13216,7 +16833,7 @@
 </p:sld>
 </file>
 
-<file path=ppt/slides/slide34.xml><?xml version="1.0" encoding="utf-8"?>
+<file path=ppt/slides/slide36.xml><?xml version="1.0" encoding="utf-8"?>
 <p:sld xmlns:a="http://schemas.openxmlformats.org/drawingml/2006/main" xmlns:r="http://schemas.openxmlformats.org/officeDocument/2006/relationships" xmlns:p="http://schemas.openxmlformats.org/presentationml/2006/main">
   <p:cSld>
     <p:spTree>
@@ -13358,7 +16975,7 @@
 </p:sld>
 </file>
 
-<file path=ppt/slides/slide35.xml><?xml version="1.0" encoding="utf-8"?>
+<file path=ppt/slides/slide37.xml><?xml version="1.0" encoding="utf-8"?>
 <p:sld xmlns:a="http://schemas.openxmlformats.org/drawingml/2006/main" xmlns:r="http://schemas.openxmlformats.org/officeDocument/2006/relationships" xmlns:p="http://schemas.openxmlformats.org/presentationml/2006/main">
   <p:cSld>
     <p:spTree>
@@ -13484,6 +17101,627 @@
   <p:cSld>
     <p:spTree>
       <p:nvGrpSpPr>
+        <p:cNvPr id="1" name=""/>
+        <p:cNvGrpSpPr/>
+        <p:nvPr/>
+      </p:nvGrpSpPr>
+      <p:grpSpPr>
+        <a:xfrm>
+          <a:off x="0" y="0"/>
+          <a:ext cx="0" cy="0"/>
+          <a:chOff x="0" y="0"/>
+          <a:chExt cx="0" cy="0"/>
+        </a:xfrm>
+      </p:grpSpPr>
+      <p:sp>
+        <p:nvSpPr>
+          <p:cNvPr id="2" name="Slide Number Placeholder 1">
+            <a:extLst>
+              <a:ext uri="{FF2B5EF4-FFF2-40B4-BE49-F238E27FC236}">
+                <a16:creationId xmlns:a16="http://schemas.microsoft.com/office/drawing/2014/main" id="{4F00E21B-1982-E0CA-1F9E-8355997AAE51}"/>
+              </a:ext>
+            </a:extLst>
+          </p:cNvPr>
+          <p:cNvSpPr>
+            <a:spLocks noGrp="1"/>
+          </p:cNvSpPr>
+          <p:nvPr>
+            <p:ph type="sldNum" sz="quarter" idx="11"/>
+          </p:nvPr>
+        </p:nvSpPr>
+        <p:spPr/>
+        <p:txBody>
+          <a:bodyPr/>
+          <a:lstStyle/>
+          <a:p>
+            <a:fld id="{45C00377-489B-40EC-B059-26BDDD2E89B9}" type="slidenum">
+              <a:rPr lang="en-US" smtClean="0"/>
+              <a:pPr/>
+              <a:t>4</a:t>
+            </a:fld>
+            <a:endParaRPr lang="en-US"/>
+          </a:p>
+        </p:txBody>
+      </p:sp>
+      <p:sp>
+        <p:nvSpPr>
+          <p:cNvPr id="3" name="Title 1">
+            <a:extLst>
+              <a:ext uri="{FF2B5EF4-FFF2-40B4-BE49-F238E27FC236}">
+                <a16:creationId xmlns:a16="http://schemas.microsoft.com/office/drawing/2014/main" id="{B2604BDD-1EB2-C9AE-AD81-128821271322}"/>
+              </a:ext>
+            </a:extLst>
+          </p:cNvPr>
+          <p:cNvSpPr txBox="1">
+            <a:spLocks/>
+          </p:cNvSpPr>
+          <p:nvPr/>
+        </p:nvSpPr>
+        <p:spPr>
+          <a:xfrm>
+            <a:off x="838200" y="3110401"/>
+            <a:ext cx="10515600" cy="637198"/>
+          </a:xfrm>
+          <a:prstGeom prst="rect">
+            <a:avLst/>
+          </a:prstGeom>
+        </p:spPr>
+        <p:txBody>
+          <a:bodyPr/>
+          <a:lstStyle>
+            <a:lvl1pPr algn="l" defTabSz="914400" rtl="0" eaLnBrk="1" latinLnBrk="0" hangingPunct="1">
+              <a:lnSpc>
+                <a:spcPct val="90000"/>
+              </a:lnSpc>
+              <a:spcBef>
+                <a:spcPct val="0"/>
+              </a:spcBef>
+              <a:buNone/>
+              <a:defRPr sz="3600" b="1" kern="1200" cap="all" baseline="0">
+                <a:solidFill>
+                  <a:schemeClr val="tx1"/>
+                </a:solidFill>
+                <a:latin typeface="+mn-lt"/>
+                <a:ea typeface="+mj-ea"/>
+                <a:cs typeface="+mj-cs"/>
+              </a:defRPr>
+            </a:lvl1pPr>
+          </a:lstStyle>
+          <a:p>
+            <a:pPr algn="ctr"/>
+            <a:r>
+              <a:rPr lang="en-US" b="0" dirty="0"/>
+              <a:t>What is “typical”?</a:t>
+            </a:r>
+          </a:p>
+        </p:txBody>
+      </p:sp>
+    </p:spTree>
+    <p:extLst>
+      <p:ext uri="{BB962C8B-B14F-4D97-AF65-F5344CB8AC3E}">
+        <p14:creationId xmlns:p14="http://schemas.microsoft.com/office/powerpoint/2010/main" val="944151257"/>
+      </p:ext>
+    </p:extLst>
+  </p:cSld>
+  <p:clrMapOvr>
+    <a:masterClrMapping/>
+  </p:clrMapOvr>
+</p:sld>
+</file>
+
+<file path=ppt/slides/slide5.xml><?xml version="1.0" encoding="utf-8"?>
+<p:sld xmlns:a="http://schemas.openxmlformats.org/drawingml/2006/main" xmlns:r="http://schemas.openxmlformats.org/officeDocument/2006/relationships" xmlns:p="http://schemas.openxmlformats.org/presentationml/2006/main">
+  <p:cSld>
+    <p:spTree>
+      <p:nvGrpSpPr>
+        <p:cNvPr id="1" name=""/>
+        <p:cNvGrpSpPr/>
+        <p:nvPr/>
+      </p:nvGrpSpPr>
+      <p:grpSpPr>
+        <a:xfrm>
+          <a:off x="0" y="0"/>
+          <a:ext cx="0" cy="0"/>
+          <a:chOff x="0" y="0"/>
+          <a:chExt cx="0" cy="0"/>
+        </a:xfrm>
+      </p:grpSpPr>
+      <p:sp>
+        <p:nvSpPr>
+          <p:cNvPr id="3" name="Content Placeholder 2">
+            <a:extLst>
+              <a:ext uri="{FF2B5EF4-FFF2-40B4-BE49-F238E27FC236}">
+                <a16:creationId xmlns:a16="http://schemas.microsoft.com/office/drawing/2014/main" id="{1E7EFF20-7721-22CF-0B9C-0225448146B6}"/>
+              </a:ext>
+            </a:extLst>
+          </p:cNvPr>
+          <p:cNvSpPr>
+            <a:spLocks noGrp="1"/>
+          </p:cNvSpPr>
+          <p:nvPr>
+            <p:ph idx="1"/>
+          </p:nvPr>
+        </p:nvSpPr>
+        <p:spPr/>
+        <p:txBody>
+          <a:bodyPr>
+            <a:normAutofit/>
+          </a:bodyPr>
+          <a:lstStyle/>
+          <a:p>
+            <a:r>
+              <a:rPr lang="en-US" dirty="0"/>
+              <a:t>A method of describing a data set with a single figure</a:t>
+            </a:r>
+          </a:p>
+          <a:p>
+            <a:pPr lvl="1"/>
+            <a:endParaRPr lang="en-US" dirty="0"/>
+          </a:p>
+          <a:p>
+            <a:r>
+              <a:rPr lang="en-US" dirty="0"/>
+              <a:t>Main methods:</a:t>
+            </a:r>
+          </a:p>
+          <a:p>
+            <a:pPr lvl="1"/>
+            <a:r>
+              <a:rPr lang="en-US" dirty="0"/>
+              <a:t>Mean</a:t>
+            </a:r>
+          </a:p>
+          <a:p>
+            <a:pPr lvl="1"/>
+            <a:r>
+              <a:rPr lang="en-US" dirty="0"/>
+              <a:t>Median</a:t>
+            </a:r>
+          </a:p>
+          <a:p>
+            <a:pPr lvl="1"/>
+            <a:r>
+              <a:rPr lang="en-US" dirty="0"/>
+              <a:t>Mode </a:t>
+            </a:r>
+          </a:p>
+          <a:p>
+            <a:pPr lvl="1"/>
+            <a:endParaRPr lang="en-US" dirty="0"/>
+          </a:p>
+          <a:p>
+            <a:r>
+              <a:rPr lang="en-US" dirty="0"/>
+              <a:t>Most appropriate method depends on the data and question</a:t>
+            </a:r>
+          </a:p>
+          <a:p>
+            <a:pPr lvl="1"/>
+            <a:r>
+              <a:rPr lang="en-US" dirty="0"/>
+              <a:t>Scale of measurement</a:t>
+            </a:r>
+          </a:p>
+          <a:p>
+            <a:pPr lvl="1"/>
+            <a:r>
+              <a:rPr lang="en-US" dirty="0"/>
+              <a:t>Outliers and data distribution</a:t>
+            </a:r>
+          </a:p>
+        </p:txBody>
+      </p:sp>
+      <p:sp>
+        <p:nvSpPr>
+          <p:cNvPr id="4" name="Slide Number Placeholder 3">
+            <a:extLst>
+              <a:ext uri="{FF2B5EF4-FFF2-40B4-BE49-F238E27FC236}">
+                <a16:creationId xmlns:a16="http://schemas.microsoft.com/office/drawing/2014/main" id="{320425CF-433B-BA64-63C0-A6A6E36B0490}"/>
+              </a:ext>
+            </a:extLst>
+          </p:cNvPr>
+          <p:cNvSpPr>
+            <a:spLocks noGrp="1"/>
+          </p:cNvSpPr>
+          <p:nvPr>
+            <p:ph type="sldNum" sz="quarter" idx="12"/>
+          </p:nvPr>
+        </p:nvSpPr>
+        <p:spPr/>
+        <p:txBody>
+          <a:bodyPr/>
+          <a:lstStyle/>
+          <a:p>
+            <a:fld id="{45C00377-489B-40EC-B059-26BDDD2E89B9}" type="slidenum">
+              <a:rPr lang="en-US" smtClean="0"/>
+              <a:pPr/>
+              <a:t>5</a:t>
+            </a:fld>
+            <a:endParaRPr lang="en-US"/>
+          </a:p>
+        </p:txBody>
+      </p:sp>
+      <p:sp>
+        <p:nvSpPr>
+          <p:cNvPr id="2" name="Title 1">
+            <a:extLst>
+              <a:ext uri="{FF2B5EF4-FFF2-40B4-BE49-F238E27FC236}">
+                <a16:creationId xmlns:a16="http://schemas.microsoft.com/office/drawing/2014/main" id="{537E157F-E6F6-FE34-3C0A-A701E167D090}"/>
+              </a:ext>
+            </a:extLst>
+          </p:cNvPr>
+          <p:cNvSpPr>
+            <a:spLocks noGrp="1"/>
+          </p:cNvSpPr>
+          <p:nvPr>
+            <p:ph type="title"/>
+          </p:nvPr>
+        </p:nvSpPr>
+        <p:spPr/>
+        <p:txBody>
+          <a:bodyPr/>
+          <a:lstStyle/>
+          <a:p>
+            <a:r>
+              <a:rPr lang="en-US" dirty="0"/>
+              <a:t>Measures of central tendency</a:t>
+            </a:r>
+          </a:p>
+        </p:txBody>
+      </p:sp>
+    </p:spTree>
+    <p:extLst>
+      <p:ext uri="{BB962C8B-B14F-4D97-AF65-F5344CB8AC3E}">
+        <p14:creationId xmlns:p14="http://schemas.microsoft.com/office/powerpoint/2010/main" val="2698741083"/>
+      </p:ext>
+    </p:extLst>
+  </p:cSld>
+  <p:clrMapOvr>
+    <a:masterClrMapping/>
+  </p:clrMapOvr>
+  <p:timing>
+    <p:tnLst>
+      <p:par>
+        <p:cTn id="1" dur="indefinite" restart="never" nodeType="tmRoot">
+          <p:childTnLst>
+            <p:seq concurrent="1" nextAc="seek">
+              <p:cTn id="2" dur="indefinite" nodeType="mainSeq">
+                <p:childTnLst>
+                  <p:par>
+                    <p:cTn id="3" fill="hold">
+                      <p:stCondLst>
+                        <p:cond delay="indefinite"/>
+                      </p:stCondLst>
+                      <p:childTnLst>
+                        <p:par>
+                          <p:cTn id="4" fill="hold">
+                            <p:stCondLst>
+                              <p:cond delay="0"/>
+                            </p:stCondLst>
+                            <p:childTnLst>
+                              <p:par>
+                                <p:cTn id="5" presetID="1" presetClass="entr" presetSubtype="0" fill="hold" grpId="0" nodeType="clickEffect">
+                                  <p:stCondLst>
+                                    <p:cond delay="0"/>
+                                  </p:stCondLst>
+                                  <p:childTnLst>
+                                    <p:set>
+                                      <p:cBhvr>
+                                        <p:cTn id="6" dur="1" fill="hold">
+                                          <p:stCondLst>
+                                            <p:cond delay="0"/>
+                                          </p:stCondLst>
+                                        </p:cTn>
+                                        <p:tgtEl>
+                                          <p:spTgt spid="3">
+                                            <p:txEl>
+                                              <p:pRg st="0" end="0"/>
+                                            </p:txEl>
+                                          </p:spTgt>
+                                        </p:tgtEl>
+                                        <p:attrNameLst>
+                                          <p:attrName>style.visibility</p:attrName>
+                                        </p:attrNameLst>
+                                      </p:cBhvr>
+                                      <p:to>
+                                        <p:strVal val="visible"/>
+                                      </p:to>
+                                    </p:set>
+                                  </p:childTnLst>
+                                </p:cTn>
+                              </p:par>
+                            </p:childTnLst>
+                          </p:cTn>
+                        </p:par>
+                      </p:childTnLst>
+                    </p:cTn>
+                  </p:par>
+                  <p:par>
+                    <p:cTn id="7" fill="hold">
+                      <p:stCondLst>
+                        <p:cond delay="indefinite"/>
+                      </p:stCondLst>
+                      <p:childTnLst>
+                        <p:par>
+                          <p:cTn id="8" fill="hold">
+                            <p:stCondLst>
+                              <p:cond delay="0"/>
+                            </p:stCondLst>
+                            <p:childTnLst>
+                              <p:par>
+                                <p:cTn id="9" presetID="1" presetClass="entr" presetSubtype="0" fill="hold" grpId="0" nodeType="clickEffect">
+                                  <p:stCondLst>
+                                    <p:cond delay="0"/>
+                                  </p:stCondLst>
+                                  <p:childTnLst>
+                                    <p:set>
+                                      <p:cBhvr>
+                                        <p:cTn id="10" dur="1" fill="hold">
+                                          <p:stCondLst>
+                                            <p:cond delay="0"/>
+                                          </p:stCondLst>
+                                        </p:cTn>
+                                        <p:tgtEl>
+                                          <p:spTgt spid="3">
+                                            <p:txEl>
+                                              <p:pRg st="2" end="2"/>
+                                            </p:txEl>
+                                          </p:spTgt>
+                                        </p:tgtEl>
+                                        <p:attrNameLst>
+                                          <p:attrName>style.visibility</p:attrName>
+                                        </p:attrNameLst>
+                                      </p:cBhvr>
+                                      <p:to>
+                                        <p:strVal val="visible"/>
+                                      </p:to>
+                                    </p:set>
+                                  </p:childTnLst>
+                                </p:cTn>
+                              </p:par>
+                              <p:par>
+                                <p:cTn id="11" presetID="1" presetClass="entr" presetSubtype="0" fill="hold" grpId="0" nodeType="withEffect">
+                                  <p:stCondLst>
+                                    <p:cond delay="0"/>
+                                  </p:stCondLst>
+                                  <p:childTnLst>
+                                    <p:set>
+                                      <p:cBhvr>
+                                        <p:cTn id="12" dur="1" fill="hold">
+                                          <p:stCondLst>
+                                            <p:cond delay="0"/>
+                                          </p:stCondLst>
+                                        </p:cTn>
+                                        <p:tgtEl>
+                                          <p:spTgt spid="3">
+                                            <p:txEl>
+                                              <p:pRg st="3" end="3"/>
+                                            </p:txEl>
+                                          </p:spTgt>
+                                        </p:tgtEl>
+                                        <p:attrNameLst>
+                                          <p:attrName>style.visibility</p:attrName>
+                                        </p:attrNameLst>
+                                      </p:cBhvr>
+                                      <p:to>
+                                        <p:strVal val="visible"/>
+                                      </p:to>
+                                    </p:set>
+                                  </p:childTnLst>
+                                </p:cTn>
+                              </p:par>
+                              <p:par>
+                                <p:cTn id="13" presetID="1" presetClass="entr" presetSubtype="0" fill="hold" grpId="0" nodeType="withEffect">
+                                  <p:stCondLst>
+                                    <p:cond delay="0"/>
+                                  </p:stCondLst>
+                                  <p:childTnLst>
+                                    <p:set>
+                                      <p:cBhvr>
+                                        <p:cTn id="14" dur="1" fill="hold">
+                                          <p:stCondLst>
+                                            <p:cond delay="0"/>
+                                          </p:stCondLst>
+                                        </p:cTn>
+                                        <p:tgtEl>
+                                          <p:spTgt spid="3">
+                                            <p:txEl>
+                                              <p:pRg st="4" end="4"/>
+                                            </p:txEl>
+                                          </p:spTgt>
+                                        </p:tgtEl>
+                                        <p:attrNameLst>
+                                          <p:attrName>style.visibility</p:attrName>
+                                        </p:attrNameLst>
+                                      </p:cBhvr>
+                                      <p:to>
+                                        <p:strVal val="visible"/>
+                                      </p:to>
+                                    </p:set>
+                                  </p:childTnLst>
+                                </p:cTn>
+                              </p:par>
+                              <p:par>
+                                <p:cTn id="15" presetID="1" presetClass="entr" presetSubtype="0" fill="hold" grpId="0" nodeType="withEffect">
+                                  <p:stCondLst>
+                                    <p:cond delay="0"/>
+                                  </p:stCondLst>
+                                  <p:childTnLst>
+                                    <p:set>
+                                      <p:cBhvr>
+                                        <p:cTn id="16" dur="1" fill="hold">
+                                          <p:stCondLst>
+                                            <p:cond delay="0"/>
+                                          </p:stCondLst>
+                                        </p:cTn>
+                                        <p:tgtEl>
+                                          <p:spTgt spid="3">
+                                            <p:txEl>
+                                              <p:pRg st="5" end="5"/>
+                                            </p:txEl>
+                                          </p:spTgt>
+                                        </p:tgtEl>
+                                        <p:attrNameLst>
+                                          <p:attrName>style.visibility</p:attrName>
+                                        </p:attrNameLst>
+                                      </p:cBhvr>
+                                      <p:to>
+                                        <p:strVal val="visible"/>
+                                      </p:to>
+                                    </p:set>
+                                  </p:childTnLst>
+                                </p:cTn>
+                              </p:par>
+                            </p:childTnLst>
+                          </p:cTn>
+                        </p:par>
+                      </p:childTnLst>
+                    </p:cTn>
+                  </p:par>
+                  <p:par>
+                    <p:cTn id="17" fill="hold">
+                      <p:stCondLst>
+                        <p:cond delay="indefinite"/>
+                      </p:stCondLst>
+                      <p:childTnLst>
+                        <p:par>
+                          <p:cTn id="18" fill="hold">
+                            <p:stCondLst>
+                              <p:cond delay="0"/>
+                            </p:stCondLst>
+                            <p:childTnLst>
+                              <p:par>
+                                <p:cTn id="19" presetID="1" presetClass="entr" presetSubtype="0" fill="hold" grpId="0" nodeType="clickEffect">
+                                  <p:stCondLst>
+                                    <p:cond delay="0"/>
+                                  </p:stCondLst>
+                                  <p:childTnLst>
+                                    <p:set>
+                                      <p:cBhvr>
+                                        <p:cTn id="20" dur="1" fill="hold">
+                                          <p:stCondLst>
+                                            <p:cond delay="0"/>
+                                          </p:stCondLst>
+                                        </p:cTn>
+                                        <p:tgtEl>
+                                          <p:spTgt spid="3">
+                                            <p:txEl>
+                                              <p:pRg st="7" end="7"/>
+                                            </p:txEl>
+                                          </p:spTgt>
+                                        </p:tgtEl>
+                                        <p:attrNameLst>
+                                          <p:attrName>style.visibility</p:attrName>
+                                        </p:attrNameLst>
+                                      </p:cBhvr>
+                                      <p:to>
+                                        <p:strVal val="visible"/>
+                                      </p:to>
+                                    </p:set>
+                                  </p:childTnLst>
+                                </p:cTn>
+                              </p:par>
+                              <p:par>
+                                <p:cTn id="21" presetID="1" presetClass="entr" presetSubtype="0" fill="hold" grpId="0" nodeType="withEffect">
+                                  <p:stCondLst>
+                                    <p:cond delay="0"/>
+                                  </p:stCondLst>
+                                  <p:childTnLst>
+                                    <p:set>
+                                      <p:cBhvr>
+                                        <p:cTn id="22" dur="1" fill="hold">
+                                          <p:stCondLst>
+                                            <p:cond delay="0"/>
+                                          </p:stCondLst>
+                                        </p:cTn>
+                                        <p:tgtEl>
+                                          <p:spTgt spid="3">
+                                            <p:txEl>
+                                              <p:pRg st="8" end="8"/>
+                                            </p:txEl>
+                                          </p:spTgt>
+                                        </p:tgtEl>
+                                        <p:attrNameLst>
+                                          <p:attrName>style.visibility</p:attrName>
+                                        </p:attrNameLst>
+                                      </p:cBhvr>
+                                      <p:to>
+                                        <p:strVal val="visible"/>
+                                      </p:to>
+                                    </p:set>
+                                  </p:childTnLst>
+                                </p:cTn>
+                              </p:par>
+                              <p:par>
+                                <p:cTn id="23" presetID="1" presetClass="entr" presetSubtype="0" fill="hold" grpId="0" nodeType="withEffect">
+                                  <p:stCondLst>
+                                    <p:cond delay="0"/>
+                                  </p:stCondLst>
+                                  <p:childTnLst>
+                                    <p:set>
+                                      <p:cBhvr>
+                                        <p:cTn id="24" dur="1" fill="hold">
+                                          <p:stCondLst>
+                                            <p:cond delay="0"/>
+                                          </p:stCondLst>
+                                        </p:cTn>
+                                        <p:tgtEl>
+                                          <p:spTgt spid="3">
+                                            <p:txEl>
+                                              <p:pRg st="9" end="9"/>
+                                            </p:txEl>
+                                          </p:spTgt>
+                                        </p:tgtEl>
+                                        <p:attrNameLst>
+                                          <p:attrName>style.visibility</p:attrName>
+                                        </p:attrNameLst>
+                                      </p:cBhvr>
+                                      <p:to>
+                                        <p:strVal val="visible"/>
+                                      </p:to>
+                                    </p:set>
+                                  </p:childTnLst>
+                                </p:cTn>
+                              </p:par>
+                            </p:childTnLst>
+                          </p:cTn>
+                        </p:par>
+                      </p:childTnLst>
+                    </p:cTn>
+                  </p:par>
+                </p:childTnLst>
+              </p:cTn>
+              <p:prevCondLst>
+                <p:cond evt="onPrev" delay="0">
+                  <p:tgtEl>
+                    <p:sldTgt/>
+                  </p:tgtEl>
+                </p:cond>
+              </p:prevCondLst>
+              <p:nextCondLst>
+                <p:cond evt="onNext" delay="0">
+                  <p:tgtEl>
+                    <p:sldTgt/>
+                  </p:tgtEl>
+                </p:cond>
+              </p:nextCondLst>
+            </p:seq>
+          </p:childTnLst>
+        </p:cTn>
+      </p:par>
+    </p:tnLst>
+    <p:bldLst>
+      <p:bldP spid="3" grpId="0" build="p"/>
+    </p:bldLst>
+  </p:timing>
+</p:sld>
+</file>
+
+<file path=ppt/slides/slide6.xml><?xml version="1.0" encoding="utf-8"?>
+<p:sld xmlns:a="http://schemas.openxmlformats.org/drawingml/2006/main" xmlns:r="http://schemas.openxmlformats.org/officeDocument/2006/relationships" xmlns:p="http://schemas.openxmlformats.org/presentationml/2006/main">
+  <p:cSld>
+    <p:spTree>
+      <p:nvGrpSpPr>
         <p:cNvPr id="1" name="">
           <a:extLst>
             <a:ext uri="{FF2B5EF4-FFF2-40B4-BE49-F238E27FC236}">
@@ -13637,7 +17875,7 @@
             <a:fld id="{45C00377-489B-40EC-B059-26BDDD2E89B9}" type="slidenum">
               <a:rPr lang="en-US" smtClean="0"/>
               <a:pPr/>
-              <a:t>4</a:t>
+              <a:t>6</a:t>
             </a:fld>
             <a:endParaRPr lang="en-US"/>
           </a:p>
@@ -13653,10 +17891,345 @@
   <p:clrMapOvr>
     <a:masterClrMapping/>
   </p:clrMapOvr>
+  <p:timing>
+    <p:tnLst>
+      <p:par>
+        <p:cTn id="1" dur="indefinite" restart="never" nodeType="tmRoot">
+          <p:childTnLst>
+            <p:seq concurrent="1" nextAc="seek">
+              <p:cTn id="2" dur="indefinite" nodeType="mainSeq">
+                <p:childTnLst>
+                  <p:par>
+                    <p:cTn id="3" fill="hold">
+                      <p:stCondLst>
+                        <p:cond delay="indefinite"/>
+                      </p:stCondLst>
+                      <p:childTnLst>
+                        <p:par>
+                          <p:cTn id="4" fill="hold">
+                            <p:stCondLst>
+                              <p:cond delay="0"/>
+                            </p:stCondLst>
+                            <p:childTnLst>
+                              <p:par>
+                                <p:cTn id="5" presetID="1" presetClass="entr" presetSubtype="0" fill="hold" grpId="0" nodeType="clickEffect">
+                                  <p:stCondLst>
+                                    <p:cond delay="0"/>
+                                  </p:stCondLst>
+                                  <p:childTnLst>
+                                    <p:set>
+                                      <p:cBhvr>
+                                        <p:cTn id="6" dur="1" fill="hold">
+                                          <p:stCondLst>
+                                            <p:cond delay="0"/>
+                                          </p:stCondLst>
+                                        </p:cTn>
+                                        <p:tgtEl>
+                                          <p:spTgt spid="3">
+                                            <p:txEl>
+                                              <p:pRg st="0" end="0"/>
+                                            </p:txEl>
+                                          </p:spTgt>
+                                        </p:tgtEl>
+                                        <p:attrNameLst>
+                                          <p:attrName>style.visibility</p:attrName>
+                                        </p:attrNameLst>
+                                      </p:cBhvr>
+                                      <p:to>
+                                        <p:strVal val="visible"/>
+                                      </p:to>
+                                    </p:set>
+                                  </p:childTnLst>
+                                </p:cTn>
+                              </p:par>
+                              <p:par>
+                                <p:cTn id="7" presetID="1" presetClass="entr" presetSubtype="0" fill="hold" grpId="0" nodeType="withEffect">
+                                  <p:stCondLst>
+                                    <p:cond delay="0"/>
+                                  </p:stCondLst>
+                                  <p:childTnLst>
+                                    <p:set>
+                                      <p:cBhvr>
+                                        <p:cTn id="8" dur="1" fill="hold">
+                                          <p:stCondLst>
+                                            <p:cond delay="0"/>
+                                          </p:stCondLst>
+                                        </p:cTn>
+                                        <p:tgtEl>
+                                          <p:spTgt spid="3">
+                                            <p:txEl>
+                                              <p:pRg st="1" end="1"/>
+                                            </p:txEl>
+                                          </p:spTgt>
+                                        </p:tgtEl>
+                                        <p:attrNameLst>
+                                          <p:attrName>style.visibility</p:attrName>
+                                        </p:attrNameLst>
+                                      </p:cBhvr>
+                                      <p:to>
+                                        <p:strVal val="visible"/>
+                                      </p:to>
+                                    </p:set>
+                                  </p:childTnLst>
+                                </p:cTn>
+                              </p:par>
+                              <p:par>
+                                <p:cTn id="9" presetID="1" presetClass="entr" presetSubtype="0" fill="hold" grpId="0" nodeType="withEffect">
+                                  <p:stCondLst>
+                                    <p:cond delay="0"/>
+                                  </p:stCondLst>
+                                  <p:childTnLst>
+                                    <p:set>
+                                      <p:cBhvr>
+                                        <p:cTn id="10" dur="1" fill="hold">
+                                          <p:stCondLst>
+                                            <p:cond delay="0"/>
+                                          </p:stCondLst>
+                                        </p:cTn>
+                                        <p:tgtEl>
+                                          <p:spTgt spid="3">
+                                            <p:txEl>
+                                              <p:pRg st="2" end="2"/>
+                                            </p:txEl>
+                                          </p:spTgt>
+                                        </p:tgtEl>
+                                        <p:attrNameLst>
+                                          <p:attrName>style.visibility</p:attrName>
+                                        </p:attrNameLst>
+                                      </p:cBhvr>
+                                      <p:to>
+                                        <p:strVal val="visible"/>
+                                      </p:to>
+                                    </p:set>
+                                  </p:childTnLst>
+                                </p:cTn>
+                              </p:par>
+                            </p:childTnLst>
+                          </p:cTn>
+                        </p:par>
+                      </p:childTnLst>
+                    </p:cTn>
+                  </p:par>
+                  <p:par>
+                    <p:cTn id="11" fill="hold">
+                      <p:stCondLst>
+                        <p:cond delay="indefinite"/>
+                      </p:stCondLst>
+                      <p:childTnLst>
+                        <p:par>
+                          <p:cTn id="12" fill="hold">
+                            <p:stCondLst>
+                              <p:cond delay="0"/>
+                            </p:stCondLst>
+                            <p:childTnLst>
+                              <p:par>
+                                <p:cTn id="13" presetID="1" presetClass="entr" presetSubtype="0" fill="hold" grpId="0" nodeType="clickEffect">
+                                  <p:stCondLst>
+                                    <p:cond delay="0"/>
+                                  </p:stCondLst>
+                                  <p:childTnLst>
+                                    <p:set>
+                                      <p:cBhvr>
+                                        <p:cTn id="14" dur="1" fill="hold">
+                                          <p:stCondLst>
+                                            <p:cond delay="0"/>
+                                          </p:stCondLst>
+                                        </p:cTn>
+                                        <p:tgtEl>
+                                          <p:spTgt spid="3">
+                                            <p:txEl>
+                                              <p:pRg st="4" end="4"/>
+                                            </p:txEl>
+                                          </p:spTgt>
+                                        </p:tgtEl>
+                                        <p:attrNameLst>
+                                          <p:attrName>style.visibility</p:attrName>
+                                        </p:attrNameLst>
+                                      </p:cBhvr>
+                                      <p:to>
+                                        <p:strVal val="visible"/>
+                                      </p:to>
+                                    </p:set>
+                                  </p:childTnLst>
+                                </p:cTn>
+                              </p:par>
+                              <p:par>
+                                <p:cTn id="15" presetID="1" presetClass="entr" presetSubtype="0" fill="hold" grpId="0" nodeType="withEffect">
+                                  <p:stCondLst>
+                                    <p:cond delay="0"/>
+                                  </p:stCondLst>
+                                  <p:childTnLst>
+                                    <p:set>
+                                      <p:cBhvr>
+                                        <p:cTn id="16" dur="1" fill="hold">
+                                          <p:stCondLst>
+                                            <p:cond delay="0"/>
+                                          </p:stCondLst>
+                                        </p:cTn>
+                                        <p:tgtEl>
+                                          <p:spTgt spid="3">
+                                            <p:txEl>
+                                              <p:pRg st="5" end="5"/>
+                                            </p:txEl>
+                                          </p:spTgt>
+                                        </p:tgtEl>
+                                        <p:attrNameLst>
+                                          <p:attrName>style.visibility</p:attrName>
+                                        </p:attrNameLst>
+                                      </p:cBhvr>
+                                      <p:to>
+                                        <p:strVal val="visible"/>
+                                      </p:to>
+                                    </p:set>
+                                  </p:childTnLst>
+                                </p:cTn>
+                              </p:par>
+                              <p:par>
+                                <p:cTn id="17" presetID="1" presetClass="entr" presetSubtype="0" fill="hold" grpId="0" nodeType="withEffect">
+                                  <p:stCondLst>
+                                    <p:cond delay="0"/>
+                                  </p:stCondLst>
+                                  <p:childTnLst>
+                                    <p:set>
+                                      <p:cBhvr>
+                                        <p:cTn id="18" dur="1" fill="hold">
+                                          <p:stCondLst>
+                                            <p:cond delay="0"/>
+                                          </p:stCondLst>
+                                        </p:cTn>
+                                        <p:tgtEl>
+                                          <p:spTgt spid="3">
+                                            <p:txEl>
+                                              <p:pRg st="6" end="6"/>
+                                            </p:txEl>
+                                          </p:spTgt>
+                                        </p:tgtEl>
+                                        <p:attrNameLst>
+                                          <p:attrName>style.visibility</p:attrName>
+                                        </p:attrNameLst>
+                                      </p:cBhvr>
+                                      <p:to>
+                                        <p:strVal val="visible"/>
+                                      </p:to>
+                                    </p:set>
+                                  </p:childTnLst>
+                                </p:cTn>
+                              </p:par>
+                            </p:childTnLst>
+                          </p:cTn>
+                        </p:par>
+                      </p:childTnLst>
+                    </p:cTn>
+                  </p:par>
+                  <p:par>
+                    <p:cTn id="19" fill="hold">
+                      <p:stCondLst>
+                        <p:cond delay="indefinite"/>
+                      </p:stCondLst>
+                      <p:childTnLst>
+                        <p:par>
+                          <p:cTn id="20" fill="hold">
+                            <p:stCondLst>
+                              <p:cond delay="0"/>
+                            </p:stCondLst>
+                            <p:childTnLst>
+                              <p:par>
+                                <p:cTn id="21" presetID="1" presetClass="entr" presetSubtype="0" fill="hold" grpId="0" nodeType="clickEffect">
+                                  <p:stCondLst>
+                                    <p:cond delay="0"/>
+                                  </p:stCondLst>
+                                  <p:childTnLst>
+                                    <p:set>
+                                      <p:cBhvr>
+                                        <p:cTn id="22" dur="1" fill="hold">
+                                          <p:stCondLst>
+                                            <p:cond delay="0"/>
+                                          </p:stCondLst>
+                                        </p:cTn>
+                                        <p:tgtEl>
+                                          <p:spTgt spid="3">
+                                            <p:txEl>
+                                              <p:pRg st="8" end="8"/>
+                                            </p:txEl>
+                                          </p:spTgt>
+                                        </p:tgtEl>
+                                        <p:attrNameLst>
+                                          <p:attrName>style.visibility</p:attrName>
+                                        </p:attrNameLst>
+                                      </p:cBhvr>
+                                      <p:to>
+                                        <p:strVal val="visible"/>
+                                      </p:to>
+                                    </p:set>
+                                  </p:childTnLst>
+                                </p:cTn>
+                              </p:par>
+                              <p:par>
+                                <p:cTn id="23" presetID="1" presetClass="entr" presetSubtype="0" fill="hold" grpId="0" nodeType="withEffect">
+                                  <p:stCondLst>
+                                    <p:cond delay="0"/>
+                                  </p:stCondLst>
+                                  <p:childTnLst>
+                                    <p:set>
+                                      <p:cBhvr>
+                                        <p:cTn id="24" dur="1" fill="hold">
+                                          <p:stCondLst>
+                                            <p:cond delay="0"/>
+                                          </p:stCondLst>
+                                        </p:cTn>
+                                        <p:tgtEl>
+                                          <p:spTgt spid="3">
+                                            <p:txEl>
+                                              <p:pRg st="9" end="9"/>
+                                            </p:txEl>
+                                          </p:spTgt>
+                                        </p:tgtEl>
+                                        <p:attrNameLst>
+                                          <p:attrName>style.visibility</p:attrName>
+                                        </p:attrNameLst>
+                                      </p:cBhvr>
+                                      <p:to>
+                                        <p:strVal val="visible"/>
+                                      </p:to>
+                                    </p:set>
+                                  </p:childTnLst>
+                                </p:cTn>
+                              </p:par>
+                            </p:childTnLst>
+                          </p:cTn>
+                        </p:par>
+                      </p:childTnLst>
+                    </p:cTn>
+                  </p:par>
+                </p:childTnLst>
+              </p:cTn>
+              <p:prevCondLst>
+                <p:cond evt="onPrev" delay="0">
+                  <p:tgtEl>
+                    <p:sldTgt/>
+                  </p:tgtEl>
+                </p:cond>
+              </p:prevCondLst>
+              <p:nextCondLst>
+                <p:cond evt="onNext" delay="0">
+                  <p:tgtEl>
+                    <p:sldTgt/>
+                  </p:tgtEl>
+                </p:cond>
+              </p:nextCondLst>
+            </p:seq>
+          </p:childTnLst>
+        </p:cTn>
+      </p:par>
+    </p:tnLst>
+    <p:bldLst>
+      <p:bldP spid="3" grpId="0" build="p"/>
+    </p:bldLst>
+  </p:timing>
 </p:sld>
 </file>
 
-<file path=ppt/slides/slide5.xml><?xml version="1.0" encoding="utf-8"?>
+<file path=ppt/slides/slide7.xml><?xml version="1.0" encoding="utf-8"?>
 <p:sld xmlns:a="http://schemas.openxmlformats.org/drawingml/2006/main" xmlns:r="http://schemas.openxmlformats.org/officeDocument/2006/relationships" xmlns:p="http://schemas.openxmlformats.org/presentationml/2006/main">
   <p:cSld>
     <p:spTree>
@@ -13801,7 +18374,7 @@
             <a:fld id="{45C00377-489B-40EC-B059-26BDDD2E89B9}" type="slidenum">
               <a:rPr lang="en-US" smtClean="0"/>
               <a:pPr/>
-              <a:t>5</a:t>
+              <a:t>7</a:t>
             </a:fld>
             <a:endParaRPr lang="en-US"/>
           </a:p>
@@ -13811,260 +18384,6 @@
     <p:extLst>
       <p:ext uri="{BB962C8B-B14F-4D97-AF65-F5344CB8AC3E}">
         <p14:creationId xmlns:p14="http://schemas.microsoft.com/office/powerpoint/2010/main" val="538422726"/>
-      </p:ext>
-    </p:extLst>
-  </p:cSld>
-  <p:clrMapOvr>
-    <a:masterClrMapping/>
-  </p:clrMapOvr>
-</p:sld>
-</file>
-
-<file path=ppt/slides/slide6.xml><?xml version="1.0" encoding="utf-8"?>
-<p:sld xmlns:a="http://schemas.openxmlformats.org/drawingml/2006/main" xmlns:r="http://schemas.openxmlformats.org/officeDocument/2006/relationships" xmlns:p="http://schemas.openxmlformats.org/presentationml/2006/main">
-  <p:cSld>
-    <p:spTree>
-      <p:nvGrpSpPr>
-        <p:cNvPr id="1" name=""/>
-        <p:cNvGrpSpPr/>
-        <p:nvPr/>
-      </p:nvGrpSpPr>
-      <p:grpSpPr>
-        <a:xfrm>
-          <a:off x="0" y="0"/>
-          <a:ext cx="0" cy="0"/>
-          <a:chOff x="0" y="0"/>
-          <a:chExt cx="0" cy="0"/>
-        </a:xfrm>
-      </p:grpSpPr>
-      <p:sp>
-        <p:nvSpPr>
-          <p:cNvPr id="4" name="Slide Number Placeholder 3">
-            <a:extLst>
-              <a:ext uri="{FF2B5EF4-FFF2-40B4-BE49-F238E27FC236}">
-                <a16:creationId xmlns:a16="http://schemas.microsoft.com/office/drawing/2014/main" id="{C4ED73F4-D104-466A-88A1-7E877D73A09E}"/>
-              </a:ext>
-            </a:extLst>
-          </p:cNvPr>
-          <p:cNvSpPr>
-            <a:spLocks noGrp="1"/>
-          </p:cNvSpPr>
-          <p:nvPr>
-            <p:ph type="sldNum" sz="quarter" idx="11"/>
-          </p:nvPr>
-        </p:nvSpPr>
-        <p:spPr/>
-        <p:txBody>
-          <a:bodyPr/>
-          <a:lstStyle/>
-          <a:p>
-            <a:fld id="{45C00377-489B-40EC-B059-26BDDD2E89B9}" type="slidenum">
-              <a:rPr lang="en-US" smtClean="0"/>
-              <a:pPr/>
-              <a:t>6</a:t>
-            </a:fld>
-            <a:endParaRPr lang="en-US"/>
-          </a:p>
-        </p:txBody>
-      </p:sp>
-      <p:sp>
-        <p:nvSpPr>
-          <p:cNvPr id="2" name="Title 1">
-            <a:extLst>
-              <a:ext uri="{FF2B5EF4-FFF2-40B4-BE49-F238E27FC236}">
-                <a16:creationId xmlns:a16="http://schemas.microsoft.com/office/drawing/2014/main" id="{1727BF50-FD66-6235-C76B-2B50EB662B38}"/>
-              </a:ext>
-            </a:extLst>
-          </p:cNvPr>
-          <p:cNvSpPr>
-            <a:spLocks noGrp="1"/>
-          </p:cNvSpPr>
-          <p:nvPr>
-            <p:ph type="title"/>
-          </p:nvPr>
-        </p:nvSpPr>
-        <p:spPr/>
-        <p:txBody>
-          <a:bodyPr>
-            <a:normAutofit fontScale="90000"/>
-          </a:bodyPr>
-          <a:lstStyle/>
-          <a:p>
-            <a:r>
-              <a:rPr lang="en-US" dirty="0"/>
-              <a:t>Variation and distribution </a:t>
-            </a:r>
-          </a:p>
-        </p:txBody>
-      </p:sp>
-    </p:spTree>
-    <p:extLst>
-      <p:ext uri="{BB962C8B-B14F-4D97-AF65-F5344CB8AC3E}">
-        <p14:creationId xmlns:p14="http://schemas.microsoft.com/office/powerpoint/2010/main" val="1868022990"/>
-      </p:ext>
-    </p:extLst>
-  </p:cSld>
-  <p:clrMapOvr>
-    <a:masterClrMapping/>
-  </p:clrMapOvr>
-</p:sld>
-</file>
-
-<file path=ppt/slides/slide7.xml><?xml version="1.0" encoding="utf-8"?>
-<p:sld xmlns:a="http://schemas.openxmlformats.org/drawingml/2006/main" xmlns:r="http://schemas.openxmlformats.org/officeDocument/2006/relationships" xmlns:p="http://schemas.openxmlformats.org/presentationml/2006/main">
-  <p:cSld>
-    <p:spTree>
-      <p:nvGrpSpPr>
-        <p:cNvPr id="1" name=""/>
-        <p:cNvGrpSpPr/>
-        <p:nvPr/>
-      </p:nvGrpSpPr>
-      <p:grpSpPr>
-        <a:xfrm>
-          <a:off x="0" y="0"/>
-          <a:ext cx="0" cy="0"/>
-          <a:chOff x="0" y="0"/>
-          <a:chExt cx="0" cy="0"/>
-        </a:xfrm>
-      </p:grpSpPr>
-      <p:sp>
-        <p:nvSpPr>
-          <p:cNvPr id="2" name="Title 1">
-            <a:extLst>
-              <a:ext uri="{FF2B5EF4-FFF2-40B4-BE49-F238E27FC236}">
-                <a16:creationId xmlns:a16="http://schemas.microsoft.com/office/drawing/2014/main" id="{0306C600-AB03-A85B-A5F6-526034814841}"/>
-              </a:ext>
-            </a:extLst>
-          </p:cNvPr>
-          <p:cNvSpPr>
-            <a:spLocks noGrp="1"/>
-          </p:cNvSpPr>
-          <p:nvPr>
-            <p:ph type="title"/>
-          </p:nvPr>
-        </p:nvSpPr>
-        <p:spPr/>
-        <p:txBody>
-          <a:bodyPr/>
-          <a:lstStyle/>
-          <a:p>
-            <a:r>
-              <a:rPr lang="en-US" dirty="0"/>
-              <a:t>Measures of variability</a:t>
-            </a:r>
-          </a:p>
-        </p:txBody>
-      </p:sp>
-      <p:sp>
-        <p:nvSpPr>
-          <p:cNvPr id="3" name="Content Placeholder 2">
-            <a:extLst>
-              <a:ext uri="{FF2B5EF4-FFF2-40B4-BE49-F238E27FC236}">
-                <a16:creationId xmlns:a16="http://schemas.microsoft.com/office/drawing/2014/main" id="{2CF9311E-CBE6-3DD5-8A4F-B5CD2086BC0A}"/>
-              </a:ext>
-            </a:extLst>
-          </p:cNvPr>
-          <p:cNvSpPr>
-            <a:spLocks noGrp="1"/>
-          </p:cNvSpPr>
-          <p:nvPr>
-            <p:ph idx="1"/>
-          </p:nvPr>
-        </p:nvSpPr>
-        <p:spPr/>
-        <p:txBody>
-          <a:bodyPr/>
-          <a:lstStyle/>
-          <a:p>
-            <a:r>
-              <a:rPr lang="en-US" dirty="0"/>
-              <a:t>The degree of spread or distribution of the data.	</a:t>
-            </a:r>
-          </a:p>
-          <a:p>
-            <a:pPr lvl="1"/>
-            <a:endParaRPr lang="en-US" dirty="0"/>
-          </a:p>
-          <a:p>
-            <a:r>
-              <a:rPr lang="en-US" dirty="0"/>
-              <a:t>Can be used to show consistency or meaningful differences.</a:t>
-            </a:r>
-          </a:p>
-          <a:p>
-            <a:pPr lvl="1"/>
-            <a:endParaRPr lang="en-US" dirty="0"/>
-          </a:p>
-          <a:p>
-            <a:r>
-              <a:rPr lang="en-US" dirty="0"/>
-              <a:t>Methods:</a:t>
-            </a:r>
-          </a:p>
-          <a:p>
-            <a:pPr lvl="1"/>
-            <a:r>
-              <a:rPr lang="en-US" dirty="0"/>
-              <a:t>Range</a:t>
-            </a:r>
-          </a:p>
-          <a:p>
-            <a:pPr lvl="1"/>
-            <a:r>
-              <a:rPr lang="en-US" dirty="0"/>
-              <a:t>IQR</a:t>
-            </a:r>
-          </a:p>
-          <a:p>
-            <a:pPr lvl="1"/>
-            <a:r>
-              <a:rPr lang="en-US" dirty="0"/>
-              <a:t>Variance</a:t>
-            </a:r>
-          </a:p>
-          <a:p>
-            <a:pPr lvl="1"/>
-            <a:r>
-              <a:rPr lang="en-US" dirty="0"/>
-              <a:t>Standard Deviation</a:t>
-            </a:r>
-          </a:p>
-        </p:txBody>
-      </p:sp>
-      <p:sp>
-        <p:nvSpPr>
-          <p:cNvPr id="4" name="Slide Number Placeholder 3">
-            <a:extLst>
-              <a:ext uri="{FF2B5EF4-FFF2-40B4-BE49-F238E27FC236}">
-                <a16:creationId xmlns:a16="http://schemas.microsoft.com/office/drawing/2014/main" id="{473CEEB2-1A75-D5E1-B376-ADB7F27AA3C7}"/>
-              </a:ext>
-            </a:extLst>
-          </p:cNvPr>
-          <p:cNvSpPr>
-            <a:spLocks noGrp="1"/>
-          </p:cNvSpPr>
-          <p:nvPr>
-            <p:ph type="sldNum" sz="quarter" idx="12"/>
-          </p:nvPr>
-        </p:nvSpPr>
-        <p:spPr/>
-        <p:txBody>
-          <a:bodyPr/>
-          <a:lstStyle/>
-          <a:p>
-            <a:fld id="{45C00377-489B-40EC-B059-26BDDD2E89B9}" type="slidenum">
-              <a:rPr lang="en-US" smtClean="0"/>
-              <a:pPr/>
-              <a:t>7</a:t>
-            </a:fld>
-            <a:endParaRPr lang="en-US"/>
-          </a:p>
-        </p:txBody>
-      </p:sp>
-    </p:spTree>
-    <p:extLst>
-      <p:ext uri="{BB962C8B-B14F-4D97-AF65-F5344CB8AC3E}">
-        <p14:creationId xmlns:p14="http://schemas.microsoft.com/office/powerpoint/2010/main" val="3421327094"/>
       </p:ext>
     </p:extLst>
   </p:cSld>
@@ -14093,145 +18412,18 @@
       </p:grpSpPr>
       <p:sp>
         <p:nvSpPr>
-          <p:cNvPr id="2" name="Title 1">
-            <a:extLst>
-              <a:ext uri="{FF2B5EF4-FFF2-40B4-BE49-F238E27FC236}">
-                <a16:creationId xmlns:a16="http://schemas.microsoft.com/office/drawing/2014/main" id="{08CA7D61-3432-671B-3EFC-43F846227E36}"/>
-              </a:ext>
-            </a:extLst>
-          </p:cNvPr>
-          <p:cNvSpPr>
-            <a:spLocks noGrp="1"/>
-          </p:cNvSpPr>
-          <p:nvPr>
-            <p:ph type="title"/>
-          </p:nvPr>
-        </p:nvSpPr>
-        <p:spPr/>
-        <p:txBody>
-          <a:bodyPr/>
-          <a:lstStyle/>
-          <a:p>
-            <a:r>
-              <a:rPr lang="en-US" dirty="0"/>
-              <a:t>Range</a:t>
-            </a:r>
-          </a:p>
-        </p:txBody>
-      </p:sp>
-      <p:sp>
-        <p:nvSpPr>
-          <p:cNvPr id="3" name="Content Placeholder 2">
-            <a:extLst>
-              <a:ext uri="{FF2B5EF4-FFF2-40B4-BE49-F238E27FC236}">
-                <a16:creationId xmlns:a16="http://schemas.microsoft.com/office/drawing/2014/main" id="{4BFE3BC2-A03B-D6FE-A07F-A2B5C66A40B1}"/>
-              </a:ext>
-            </a:extLst>
-          </p:cNvPr>
-          <p:cNvSpPr>
-            <a:spLocks noGrp="1"/>
-          </p:cNvSpPr>
-          <p:nvPr>
-            <p:ph idx="1"/>
-          </p:nvPr>
-        </p:nvSpPr>
-        <p:spPr/>
-        <p:txBody>
-          <a:bodyPr>
-            <a:normAutofit/>
-          </a:bodyPr>
-          <a:lstStyle/>
-          <a:p>
-            <a:r>
-              <a:rPr lang="en-US" dirty="0"/>
-              <a:t>Range: distance between the smallest and largest values.</a:t>
-            </a:r>
-          </a:p>
-          <a:p>
-            <a:pPr lvl="1"/>
-            <a:r>
-              <a:rPr lang="en-US" dirty="0"/>
-              <a:t>Sensitive to outliers</a:t>
-            </a:r>
-          </a:p>
-          <a:p>
-            <a:pPr lvl="1"/>
-            <a:endParaRPr lang="en-US" dirty="0"/>
-          </a:p>
-          <a:p>
-            <a:r>
-              <a:rPr lang="en-US" dirty="0"/>
-              <a:t>IQR: spread of the middle 50% of the data.</a:t>
-            </a:r>
-          </a:p>
-          <a:p>
-            <a:pPr lvl="1"/>
-            <a:r>
-              <a:rPr lang="en-US" dirty="0"/>
-              <a:t>Less sensitive to outliers</a:t>
-            </a:r>
-          </a:p>
-          <a:p>
-            <a:pPr lvl="1"/>
-            <a:endParaRPr lang="en-US" dirty="0"/>
-          </a:p>
-          <a:p>
-            <a:r>
-              <a:rPr lang="en-US" dirty="0">
-                <a:solidFill>
-                  <a:schemeClr val="bg2">
-                    <a:lumMod val="75000"/>
-                  </a:schemeClr>
-                </a:solidFill>
-              </a:rPr>
-              <a:t>Standard Deviation: square root of variance</a:t>
-            </a:r>
-          </a:p>
-          <a:p>
-            <a:pPr lvl="1"/>
-            <a:r>
-              <a:rPr lang="en-US" dirty="0">
-                <a:solidFill>
-                  <a:schemeClr val="bg2">
-                    <a:lumMod val="75000"/>
-                  </a:schemeClr>
-                </a:solidFill>
-              </a:rPr>
-              <a:t>Typical deviation from the mean </a:t>
-            </a:r>
-          </a:p>
-          <a:p>
-            <a:pPr lvl="1"/>
-            <a:r>
-              <a:rPr lang="en-US" dirty="0">
-                <a:solidFill>
-                  <a:schemeClr val="bg2">
-                    <a:lumMod val="75000"/>
-                  </a:schemeClr>
-                </a:solidFill>
-              </a:rPr>
-              <a:t>Same units as the data</a:t>
-            </a:r>
-          </a:p>
-          <a:p>
-            <a:endParaRPr lang="en-US" dirty="0"/>
-          </a:p>
-        </p:txBody>
-      </p:sp>
-      <p:sp>
-        <p:nvSpPr>
           <p:cNvPr id="4" name="Slide Number Placeholder 3">
             <a:extLst>
               <a:ext uri="{FF2B5EF4-FFF2-40B4-BE49-F238E27FC236}">
-                <a16:creationId xmlns:a16="http://schemas.microsoft.com/office/drawing/2014/main" id="{F61C70DC-37FB-87E0-5D03-00D92FDD6D3C}"/>
-              </a:ext>
-            </a:extLst>
-          </p:cNvPr>
-          <p:cNvSpPr>
-            <a:spLocks noGrp="1"/>
-          </p:cNvSpPr>
-          <p:nvPr>
-            <p:ph type="sldNum" sz="quarter" idx="12"/>
+                <a16:creationId xmlns:a16="http://schemas.microsoft.com/office/drawing/2014/main" id="{C4ED73F4-D104-466A-88A1-7E877D73A09E}"/>
+              </a:ext>
+            </a:extLst>
+          </p:cNvPr>
+          <p:cNvSpPr>
+            <a:spLocks noGrp="1"/>
+          </p:cNvSpPr>
+          <p:nvPr>
+            <p:ph type="sldNum" sz="quarter" idx="11"/>
           </p:nvPr>
         </p:nvSpPr>
         <p:spPr/>
@@ -14244,14 +18436,44 @@
               <a:pPr/>
               <a:t>8</a:t>
             </a:fld>
-            <a:endParaRPr lang="en-US" dirty="0"/>
+            <a:endParaRPr lang="en-US"/>
+          </a:p>
+        </p:txBody>
+      </p:sp>
+      <p:sp>
+        <p:nvSpPr>
+          <p:cNvPr id="2" name="Title 1">
+            <a:extLst>
+              <a:ext uri="{FF2B5EF4-FFF2-40B4-BE49-F238E27FC236}">
+                <a16:creationId xmlns:a16="http://schemas.microsoft.com/office/drawing/2014/main" id="{1727BF50-FD66-6235-C76B-2B50EB662B38}"/>
+              </a:ext>
+            </a:extLst>
+          </p:cNvPr>
+          <p:cNvSpPr>
+            <a:spLocks noGrp="1"/>
+          </p:cNvSpPr>
+          <p:nvPr>
+            <p:ph type="title"/>
+          </p:nvPr>
+        </p:nvSpPr>
+        <p:spPr/>
+        <p:txBody>
+          <a:bodyPr>
+            <a:normAutofit fontScale="90000"/>
+          </a:bodyPr>
+          <a:lstStyle/>
+          <a:p>
+            <a:r>
+              <a:rPr lang="en-US" dirty="0"/>
+              <a:t>How much does it vary?</a:t>
+            </a:r>
           </a:p>
         </p:txBody>
       </p:sp>
     </p:spTree>
     <p:extLst>
       <p:ext uri="{BB962C8B-B14F-4D97-AF65-F5344CB8AC3E}">
-        <p14:creationId xmlns:p14="http://schemas.microsoft.com/office/powerpoint/2010/main" val="4206175980"/>
+        <p14:creationId xmlns:p14="http://schemas.microsoft.com/office/powerpoint/2010/main" val="1868022990"/>
       </p:ext>
     </p:extLst>
   </p:cSld>
@@ -14266,13 +18488,7 @@
   <p:cSld>
     <p:spTree>
       <p:nvGrpSpPr>
-        <p:cNvPr id="1" name="">
-          <a:extLst>
-            <a:ext uri="{FF2B5EF4-FFF2-40B4-BE49-F238E27FC236}">
-              <a16:creationId xmlns:a16="http://schemas.microsoft.com/office/drawing/2014/main" id="{8AAAEA5E-7577-2AE3-0E8B-A2EACB10EEDF}"/>
-            </a:ext>
-          </a:extLst>
-        </p:cNvPr>
+        <p:cNvPr id="1" name=""/>
         <p:cNvGrpSpPr/>
         <p:nvPr/>
       </p:nvGrpSpPr>
@@ -14289,7 +18505,7 @@
           <p:cNvPr id="2" name="Title 1">
             <a:extLst>
               <a:ext uri="{FF2B5EF4-FFF2-40B4-BE49-F238E27FC236}">
-                <a16:creationId xmlns:a16="http://schemas.microsoft.com/office/drawing/2014/main" id="{3CBFB0CF-2A71-D3A2-2FF0-1B2A0CE00118}"/>
+                <a16:creationId xmlns:a16="http://schemas.microsoft.com/office/drawing/2014/main" id="{0306C600-AB03-A85B-A5F6-526034814841}"/>
               </a:ext>
             </a:extLst>
           </p:cNvPr>
@@ -14307,7 +18523,83 @@
           <a:p>
             <a:r>
               <a:rPr lang="en-US" dirty="0"/>
-              <a:t>Range and IQR</a:t>
+              <a:t>Measures of variability</a:t>
+            </a:r>
+          </a:p>
+        </p:txBody>
+      </p:sp>
+      <p:sp>
+        <p:nvSpPr>
+          <p:cNvPr id="3" name="Content Placeholder 2">
+            <a:extLst>
+              <a:ext uri="{FF2B5EF4-FFF2-40B4-BE49-F238E27FC236}">
+                <a16:creationId xmlns:a16="http://schemas.microsoft.com/office/drawing/2014/main" id="{2CF9311E-CBE6-3DD5-8A4F-B5CD2086BC0A}"/>
+              </a:ext>
+            </a:extLst>
+          </p:cNvPr>
+          <p:cNvSpPr>
+            <a:spLocks noGrp="1"/>
+          </p:cNvSpPr>
+          <p:nvPr>
+            <p:ph idx="1"/>
+          </p:nvPr>
+        </p:nvSpPr>
+        <p:spPr/>
+        <p:txBody>
+          <a:bodyPr/>
+          <a:lstStyle/>
+          <a:p>
+            <a:r>
+              <a:rPr lang="en-US" dirty="0"/>
+              <a:t>The degree of spread or distribution of the data.	</a:t>
+            </a:r>
+          </a:p>
+          <a:p>
+            <a:pPr lvl="1"/>
+            <a:endParaRPr lang="en-US" dirty="0"/>
+          </a:p>
+          <a:p>
+            <a:r>
+              <a:rPr lang="en-US" dirty="0"/>
+              <a:t>Can be used to show consistency or meaningful differences.</a:t>
+            </a:r>
+          </a:p>
+          <a:p>
+            <a:pPr lvl="1"/>
+            <a:endParaRPr lang="en-US" dirty="0"/>
+          </a:p>
+          <a:p>
+            <a:r>
+              <a:rPr lang="en-US" dirty="0"/>
+              <a:t>Methods:</a:t>
+            </a:r>
+          </a:p>
+          <a:p>
+            <a:pPr lvl="1"/>
+            <a:r>
+              <a:rPr lang="en-US" dirty="0"/>
+              <a:t>Range</a:t>
+            </a:r>
+          </a:p>
+          <a:p>
+            <a:pPr lvl="1"/>
+            <a:r>
+              <a:rPr lang="en-US" dirty="0"/>
+              <a:t>IQR</a:t>
+            </a:r>
+          </a:p>
+          <a:p>
+            <a:pPr lvl="1"/>
+            <a:r>
+              <a:rPr lang="en-US" dirty="0"/>
+              <a:t>Variance</a:t>
+            </a:r>
+          </a:p>
+          <a:p>
+            <a:pPr lvl="1"/>
+            <a:r>
+              <a:rPr lang="en-US" dirty="0"/>
+              <a:t>Standard Deviation</a:t>
             </a:r>
           </a:p>
         </p:txBody>
@@ -14317,7 +18609,7 @@
           <p:cNvPr id="4" name="Slide Number Placeholder 3">
             <a:extLst>
               <a:ext uri="{FF2B5EF4-FFF2-40B4-BE49-F238E27FC236}">
-                <a16:creationId xmlns:a16="http://schemas.microsoft.com/office/drawing/2014/main" id="{FDD9E4FB-2395-2EC7-0828-BDF71DCE4A66}"/>
+                <a16:creationId xmlns:a16="http://schemas.microsoft.com/office/drawing/2014/main" id="{473CEEB2-1A75-D5E1-B376-ADB7F27AA3C7}"/>
               </a:ext>
             </a:extLst>
           </p:cNvPr>
@@ -14342,205 +18634,320 @@
           </a:p>
         </p:txBody>
       </p:sp>
-      <p:pic>
-        <p:nvPicPr>
-          <p:cNvPr id="9" name="Picture 8">
-            <a:extLst>
-              <a:ext uri="{FF2B5EF4-FFF2-40B4-BE49-F238E27FC236}">
-                <a16:creationId xmlns:a16="http://schemas.microsoft.com/office/drawing/2014/main" id="{870C3C5B-B049-1768-3B29-0B864DB2D1B2}"/>
-              </a:ext>
-            </a:extLst>
-          </p:cNvPr>
-          <p:cNvPicPr>
-            <a:picLocks noChangeAspect="1"/>
-          </p:cNvPicPr>
-          <p:nvPr/>
-        </p:nvPicPr>
-        <p:blipFill>
-          <a:blip r:embed="rId3"/>
-          <a:stretch>
-            <a:fillRect/>
-          </a:stretch>
-        </p:blipFill>
-        <p:spPr>
-          <a:xfrm>
-            <a:off x="3810000" y="2446866"/>
-            <a:ext cx="4876800" cy="2767013"/>
-          </a:xfrm>
-          <a:prstGeom prst="rect">
-            <a:avLst/>
-          </a:prstGeom>
-        </p:spPr>
-      </p:pic>
-      <p:cxnSp>
-        <p:nvCxnSpPr>
-          <p:cNvPr id="11" name="Straight Arrow Connector 10">
-            <a:extLst>
-              <a:ext uri="{FF2B5EF4-FFF2-40B4-BE49-F238E27FC236}">
-                <a16:creationId xmlns:a16="http://schemas.microsoft.com/office/drawing/2014/main" id="{4251B779-5782-62AB-EF5A-1689D42E8607}"/>
-              </a:ext>
-            </a:extLst>
-          </p:cNvPr>
-          <p:cNvCxnSpPr/>
-          <p:nvPr/>
-        </p:nvCxnSpPr>
-        <p:spPr>
-          <a:xfrm>
-            <a:off x="5283200" y="4741333"/>
-            <a:ext cx="1930400" cy="0"/>
-          </a:xfrm>
-          <a:prstGeom prst="straightConnector1">
-            <a:avLst/>
-          </a:prstGeom>
-          <a:ln w="28575">
-            <a:headEnd type="triangle"/>
-            <a:tailEnd type="triangle"/>
-          </a:ln>
-        </p:spPr>
-        <p:style>
-          <a:lnRef idx="1">
-            <a:schemeClr val="accent1"/>
-          </a:lnRef>
-          <a:fillRef idx="0">
-            <a:schemeClr val="accent1"/>
-          </a:fillRef>
-          <a:effectRef idx="0">
-            <a:schemeClr val="accent1"/>
-          </a:effectRef>
-          <a:fontRef idx="minor">
-            <a:schemeClr val="tx1"/>
-          </a:fontRef>
-        </p:style>
-      </p:cxnSp>
-      <p:cxnSp>
-        <p:nvCxnSpPr>
-          <p:cNvPr id="12" name="Straight Arrow Connector 11">
-            <a:extLst>
-              <a:ext uri="{FF2B5EF4-FFF2-40B4-BE49-F238E27FC236}">
-                <a16:creationId xmlns:a16="http://schemas.microsoft.com/office/drawing/2014/main" id="{99A5919D-D89C-D771-B49D-57D20C3EA9D6}"/>
-              </a:ext>
-            </a:extLst>
-          </p:cNvPr>
-          <p:cNvCxnSpPr>
-            <a:cxnSpLocks/>
-          </p:cNvCxnSpPr>
-          <p:nvPr/>
-        </p:nvCxnSpPr>
-        <p:spPr>
-          <a:xfrm>
-            <a:off x="4267201" y="2946399"/>
-            <a:ext cx="3962399" cy="0"/>
-          </a:xfrm>
-          <a:prstGeom prst="straightConnector1">
-            <a:avLst/>
-          </a:prstGeom>
-          <a:ln w="28575">
-            <a:headEnd type="triangle"/>
-            <a:tailEnd type="triangle"/>
-          </a:ln>
-        </p:spPr>
-        <p:style>
-          <a:lnRef idx="1">
-            <a:schemeClr val="accent1"/>
-          </a:lnRef>
-          <a:fillRef idx="0">
-            <a:schemeClr val="accent1"/>
-          </a:fillRef>
-          <a:effectRef idx="0">
-            <a:schemeClr val="accent1"/>
-          </a:effectRef>
-          <a:fontRef idx="minor">
-            <a:schemeClr val="tx1"/>
-          </a:fontRef>
-        </p:style>
-      </p:cxnSp>
-      <p:sp>
-        <p:nvSpPr>
-          <p:cNvPr id="14" name="TextBox 13">
-            <a:extLst>
-              <a:ext uri="{FF2B5EF4-FFF2-40B4-BE49-F238E27FC236}">
-                <a16:creationId xmlns:a16="http://schemas.microsoft.com/office/drawing/2014/main" id="{DC05E2EB-CC66-E792-FE91-C7F6FF66FEB0}"/>
-              </a:ext>
-            </a:extLst>
-          </p:cNvPr>
-          <p:cNvSpPr txBox="1"/>
-          <p:nvPr/>
-        </p:nvSpPr>
-        <p:spPr>
-          <a:xfrm>
-            <a:off x="5890898" y="2473854"/>
-            <a:ext cx="715004" cy="369332"/>
-          </a:xfrm>
-          <a:prstGeom prst="rect">
-            <a:avLst/>
-          </a:prstGeom>
-          <a:noFill/>
-        </p:spPr>
-        <p:txBody>
-          <a:bodyPr wrap="none" rtlCol="0">
-            <a:spAutoFit/>
-          </a:bodyPr>
-          <a:lstStyle/>
-          <a:p>
-            <a:r>
-              <a:rPr lang="en-US" dirty="0"/>
-              <a:t>range</a:t>
-            </a:r>
-          </a:p>
-        </p:txBody>
-      </p:sp>
-      <p:sp>
-        <p:nvSpPr>
-          <p:cNvPr id="15" name="TextBox 14">
-            <a:extLst>
-              <a:ext uri="{FF2B5EF4-FFF2-40B4-BE49-F238E27FC236}">
-                <a16:creationId xmlns:a16="http://schemas.microsoft.com/office/drawing/2014/main" id="{427B8F54-2B58-134B-0684-97B1817A1CD3}"/>
-              </a:ext>
-            </a:extLst>
-          </p:cNvPr>
-          <p:cNvSpPr txBox="1"/>
-          <p:nvPr/>
-        </p:nvSpPr>
-        <p:spPr>
-          <a:xfrm>
-            <a:off x="5570041" y="4741333"/>
-            <a:ext cx="1356718" cy="646331"/>
-          </a:xfrm>
-          <a:prstGeom prst="rect">
-            <a:avLst/>
-          </a:prstGeom>
-          <a:noFill/>
-        </p:spPr>
-        <p:txBody>
-          <a:bodyPr wrap="none" rtlCol="0">
-            <a:spAutoFit/>
-          </a:bodyPr>
-          <a:lstStyle/>
-          <a:p>
-            <a:r>
-              <a:rPr lang="en-US" dirty="0"/>
-              <a:t>Interquartile</a:t>
-            </a:r>
-          </a:p>
-          <a:p>
-            <a:pPr algn="ctr"/>
-            <a:r>
-              <a:rPr lang="en-US" dirty="0"/>
-              <a:t>range</a:t>
-            </a:r>
-          </a:p>
-        </p:txBody>
-      </p:sp>
     </p:spTree>
     <p:extLst>
       <p:ext uri="{BB962C8B-B14F-4D97-AF65-F5344CB8AC3E}">
-        <p14:creationId xmlns:p14="http://schemas.microsoft.com/office/powerpoint/2010/main" val="3410868396"/>
+        <p14:creationId xmlns:p14="http://schemas.microsoft.com/office/powerpoint/2010/main" val="3421327094"/>
       </p:ext>
     </p:extLst>
   </p:cSld>
   <p:clrMapOvr>
     <a:masterClrMapping/>
   </p:clrMapOvr>
+  <p:timing>
+    <p:tnLst>
+      <p:par>
+        <p:cTn id="1" dur="indefinite" restart="never" nodeType="tmRoot">
+          <p:childTnLst>
+            <p:seq concurrent="1" nextAc="seek">
+              <p:cTn id="2" dur="indefinite" nodeType="mainSeq">
+                <p:childTnLst>
+                  <p:par>
+                    <p:cTn id="3" fill="hold">
+                      <p:stCondLst>
+                        <p:cond delay="indefinite"/>
+                      </p:stCondLst>
+                      <p:childTnLst>
+                        <p:par>
+                          <p:cTn id="4" fill="hold">
+                            <p:stCondLst>
+                              <p:cond delay="0"/>
+                            </p:stCondLst>
+                            <p:childTnLst>
+                              <p:par>
+                                <p:cTn id="5" presetID="1" presetClass="entr" presetSubtype="0" fill="hold" grpId="0" nodeType="clickEffect">
+                                  <p:stCondLst>
+                                    <p:cond delay="0"/>
+                                  </p:stCondLst>
+                                  <p:childTnLst>
+                                    <p:set>
+                                      <p:cBhvr>
+                                        <p:cTn id="6" dur="1" fill="hold">
+                                          <p:stCondLst>
+                                            <p:cond delay="0"/>
+                                          </p:stCondLst>
+                                        </p:cTn>
+                                        <p:tgtEl>
+                                          <p:spTgt spid="3">
+                                            <p:txEl>
+                                              <p:pRg st="0" end="0"/>
+                                            </p:txEl>
+                                          </p:spTgt>
+                                        </p:tgtEl>
+                                        <p:attrNameLst>
+                                          <p:attrName>style.visibility</p:attrName>
+                                        </p:attrNameLst>
+                                      </p:cBhvr>
+                                      <p:to>
+                                        <p:strVal val="visible"/>
+                                      </p:to>
+                                    </p:set>
+                                  </p:childTnLst>
+                                </p:cTn>
+                              </p:par>
+                            </p:childTnLst>
+                          </p:cTn>
+                        </p:par>
+                      </p:childTnLst>
+                    </p:cTn>
+                  </p:par>
+                  <p:par>
+                    <p:cTn id="7" fill="hold">
+                      <p:stCondLst>
+                        <p:cond delay="indefinite"/>
+                      </p:stCondLst>
+                      <p:childTnLst>
+                        <p:par>
+                          <p:cTn id="8" fill="hold">
+                            <p:stCondLst>
+                              <p:cond delay="0"/>
+                            </p:stCondLst>
+                            <p:childTnLst>
+                              <p:par>
+                                <p:cTn id="9" presetID="1" presetClass="entr" presetSubtype="0" fill="hold" grpId="0" nodeType="clickEffect">
+                                  <p:stCondLst>
+                                    <p:cond delay="0"/>
+                                  </p:stCondLst>
+                                  <p:childTnLst>
+                                    <p:set>
+                                      <p:cBhvr>
+                                        <p:cTn id="10" dur="1" fill="hold">
+                                          <p:stCondLst>
+                                            <p:cond delay="0"/>
+                                          </p:stCondLst>
+                                        </p:cTn>
+                                        <p:tgtEl>
+                                          <p:spTgt spid="3">
+                                            <p:txEl>
+                                              <p:pRg st="2" end="2"/>
+                                            </p:txEl>
+                                          </p:spTgt>
+                                        </p:tgtEl>
+                                        <p:attrNameLst>
+                                          <p:attrName>style.visibility</p:attrName>
+                                        </p:attrNameLst>
+                                      </p:cBhvr>
+                                      <p:to>
+                                        <p:strVal val="visible"/>
+                                      </p:to>
+                                    </p:set>
+                                  </p:childTnLst>
+                                </p:cTn>
+                              </p:par>
+                            </p:childTnLst>
+                          </p:cTn>
+                        </p:par>
+                      </p:childTnLst>
+                    </p:cTn>
+                  </p:par>
+                  <p:par>
+                    <p:cTn id="11" fill="hold">
+                      <p:stCondLst>
+                        <p:cond delay="indefinite"/>
+                      </p:stCondLst>
+                      <p:childTnLst>
+                        <p:par>
+                          <p:cTn id="12" fill="hold">
+                            <p:stCondLst>
+                              <p:cond delay="0"/>
+                            </p:stCondLst>
+                            <p:childTnLst>
+                              <p:par>
+                                <p:cTn id="13" presetID="1" presetClass="entr" presetSubtype="0" fill="hold" grpId="0" nodeType="clickEffect">
+                                  <p:stCondLst>
+                                    <p:cond delay="0"/>
+                                  </p:stCondLst>
+                                  <p:childTnLst>
+                                    <p:set>
+                                      <p:cBhvr>
+                                        <p:cTn id="14" dur="1" fill="hold">
+                                          <p:stCondLst>
+                                            <p:cond delay="0"/>
+                                          </p:stCondLst>
+                                        </p:cTn>
+                                        <p:tgtEl>
+                                          <p:spTgt spid="3">
+                                            <p:txEl>
+                                              <p:pRg st="4" end="4"/>
+                                            </p:txEl>
+                                          </p:spTgt>
+                                        </p:tgtEl>
+                                        <p:attrNameLst>
+                                          <p:attrName>style.visibility</p:attrName>
+                                        </p:attrNameLst>
+                                      </p:cBhvr>
+                                      <p:to>
+                                        <p:strVal val="visible"/>
+                                      </p:to>
+                                    </p:set>
+                                  </p:childTnLst>
+                                </p:cTn>
+                              </p:par>
+                              <p:par>
+                                <p:cTn id="15" presetID="1" presetClass="entr" presetSubtype="0" fill="hold" grpId="0" nodeType="withEffect">
+                                  <p:stCondLst>
+                                    <p:cond delay="0"/>
+                                  </p:stCondLst>
+                                  <p:childTnLst>
+                                    <p:set>
+                                      <p:cBhvr>
+                                        <p:cTn id="16" dur="1" fill="hold">
+                                          <p:stCondLst>
+                                            <p:cond delay="0"/>
+                                          </p:stCondLst>
+                                        </p:cTn>
+                                        <p:tgtEl>
+                                          <p:spTgt spid="3">
+                                            <p:txEl>
+                                              <p:pRg st="5" end="5"/>
+                                            </p:txEl>
+                                          </p:spTgt>
+                                        </p:tgtEl>
+                                        <p:attrNameLst>
+                                          <p:attrName>style.visibility</p:attrName>
+                                        </p:attrNameLst>
+                                      </p:cBhvr>
+                                      <p:to>
+                                        <p:strVal val="visible"/>
+                                      </p:to>
+                                    </p:set>
+                                  </p:childTnLst>
+                                </p:cTn>
+                              </p:par>
+                              <p:par>
+                                <p:cTn id="17" presetID="1" presetClass="entr" presetSubtype="0" fill="hold" grpId="0" nodeType="withEffect">
+                                  <p:stCondLst>
+                                    <p:cond delay="0"/>
+                                  </p:stCondLst>
+                                  <p:childTnLst>
+                                    <p:set>
+                                      <p:cBhvr>
+                                        <p:cTn id="18" dur="1" fill="hold">
+                                          <p:stCondLst>
+                                            <p:cond delay="0"/>
+                                          </p:stCondLst>
+                                        </p:cTn>
+                                        <p:tgtEl>
+                                          <p:spTgt spid="3">
+                                            <p:txEl>
+                                              <p:pRg st="6" end="6"/>
+                                            </p:txEl>
+                                          </p:spTgt>
+                                        </p:tgtEl>
+                                        <p:attrNameLst>
+                                          <p:attrName>style.visibility</p:attrName>
+                                        </p:attrNameLst>
+                                      </p:cBhvr>
+                                      <p:to>
+                                        <p:strVal val="visible"/>
+                                      </p:to>
+                                    </p:set>
+                                  </p:childTnLst>
+                                </p:cTn>
+                              </p:par>
+                              <p:par>
+                                <p:cTn id="19" presetID="1" presetClass="entr" presetSubtype="0" fill="hold" grpId="0" nodeType="withEffect">
+                                  <p:stCondLst>
+                                    <p:cond delay="0"/>
+                                  </p:stCondLst>
+                                  <p:childTnLst>
+                                    <p:set>
+                                      <p:cBhvr>
+                                        <p:cTn id="20" dur="1" fill="hold">
+                                          <p:stCondLst>
+                                            <p:cond delay="0"/>
+                                          </p:stCondLst>
+                                        </p:cTn>
+                                        <p:tgtEl>
+                                          <p:spTgt spid="3">
+                                            <p:txEl>
+                                              <p:pRg st="7" end="7"/>
+                                            </p:txEl>
+                                          </p:spTgt>
+                                        </p:tgtEl>
+                                        <p:attrNameLst>
+                                          <p:attrName>style.visibility</p:attrName>
+                                        </p:attrNameLst>
+                                      </p:cBhvr>
+                                      <p:to>
+                                        <p:strVal val="visible"/>
+                                      </p:to>
+                                    </p:set>
+                                  </p:childTnLst>
+                                </p:cTn>
+                              </p:par>
+                              <p:par>
+                                <p:cTn id="21" presetID="1" presetClass="entr" presetSubtype="0" fill="hold" grpId="0" nodeType="withEffect">
+                                  <p:stCondLst>
+                                    <p:cond delay="0"/>
+                                  </p:stCondLst>
+                                  <p:childTnLst>
+                                    <p:set>
+                                      <p:cBhvr>
+                                        <p:cTn id="22" dur="1" fill="hold">
+                                          <p:stCondLst>
+                                            <p:cond delay="0"/>
+                                          </p:stCondLst>
+                                        </p:cTn>
+                                        <p:tgtEl>
+                                          <p:spTgt spid="3">
+                                            <p:txEl>
+                                              <p:pRg st="8" end="8"/>
+                                            </p:txEl>
+                                          </p:spTgt>
+                                        </p:tgtEl>
+                                        <p:attrNameLst>
+                                          <p:attrName>style.visibility</p:attrName>
+                                        </p:attrNameLst>
+                                      </p:cBhvr>
+                                      <p:to>
+                                        <p:strVal val="visible"/>
+                                      </p:to>
+                                    </p:set>
+                                  </p:childTnLst>
+                                </p:cTn>
+                              </p:par>
+                            </p:childTnLst>
+                          </p:cTn>
+                        </p:par>
+                      </p:childTnLst>
+                    </p:cTn>
+                  </p:par>
+                </p:childTnLst>
+              </p:cTn>
+              <p:prevCondLst>
+                <p:cond evt="onPrev" delay="0">
+                  <p:tgtEl>
+                    <p:sldTgt/>
+                  </p:tgtEl>
+                </p:cond>
+              </p:prevCondLst>
+              <p:nextCondLst>
+                <p:cond evt="onNext" delay="0">
+                  <p:tgtEl>
+                    <p:sldTgt/>
+                  </p:tgtEl>
+                </p:cond>
+              </p:nextCondLst>
+            </p:seq>
+          </p:childTnLst>
+        </p:cTn>
+      </p:par>
+    </p:tnLst>
+    <p:bldLst>
+      <p:bldP spid="3" grpId="0" build="p"/>
+    </p:bldLst>
+  </p:timing>
 </p:sld>
 </file>
 
